--- a/docs/pptx/carbo/jx-carbo-linsubhr-sens-death.pptx
+++ b/docs/pptx/carbo/jx-carbo-linsubhr-sens-death.pptx
@@ -5039,7 +5039,7 @@
           <p:spPr>
             <a:xfrm>
               <a:off x="817517" y="1896563"/>
-              <a:ext cx="6178966" cy="82021"/>
+              <a:ext cx="6842729" cy="82021"/>
             </a:xfrm>
             <a:prstGeom prst="rect">
               <a:avLst/>
@@ -5071,7 +5071,7 @@
                   <a:latin typeface="Helvetica"/>
                   <a:cs typeface="Helvetica"/>
                 </a:rPr>
-                <a:t>HR per 0.1 ratio decline: 2.45 (1.66-3.62), p = &lt;0.001  |  per IQR decline (Δ = 0.28): 12.37 (4.17-36.72)  |  IQR: [0.70, 0.98]</a:t>
+                <a:t>HR per 0.1 ratio decline: 2.45 (1.66-3.62), p_Bonf = &lt;0.001 (n = 6)  |  per IQR decline (Δ = 0.28): 12.37 (4.17-36.72)  |  IQR: [0.70, 0.98]</a:t>
               </a:r>
             </a:p>
           </p:txBody>

--- a/docs/pptx/carbo/jx-carbo-linsubhr-sens-death.pptx
+++ b/docs/pptx/carbo/jx-carbo-linsubhr-sens-death.pptx
@@ -4762,8 +4762,8 @@
           </p:nvSpPr>
           <p:spPr>
             <a:xfrm>
-              <a:off x="2155289" y="5785772"/>
-              <a:ext cx="155356" cy="80101"/>
+              <a:off x="2152181" y="5785772"/>
+              <a:ext cx="161574" cy="80101"/>
             </a:xfrm>
             <a:prstGeom prst="rect">
               <a:avLst/>
@@ -4795,7 +4795,7 @@
                   <a:latin typeface="Helvetica"/>
                   <a:cs typeface="Helvetica"/>
                 </a:rPr>
-                <a:t>0.6</a:t>
+                <a:t>-40</a:t>
               </a:r>
             </a:p>
           </p:txBody>
@@ -4808,8 +4808,8 @@
           </p:nvSpPr>
           <p:spPr>
             <a:xfrm>
-              <a:off x="3887213" y="5785772"/>
-              <a:ext cx="155356" cy="80101"/>
+              <a:off x="3884104" y="5785772"/>
+              <a:ext cx="161574" cy="80101"/>
             </a:xfrm>
             <a:prstGeom prst="rect">
               <a:avLst/>
@@ -4841,7 +4841,7 @@
                   <a:latin typeface="Helvetica"/>
                   <a:cs typeface="Helvetica"/>
                 </a:rPr>
-                <a:t>0.8</a:t>
+                <a:t>-20</a:t>
               </a:r>
             </a:p>
           </p:txBody>
@@ -4854,8 +4854,8 @@
           </p:nvSpPr>
           <p:spPr>
             <a:xfrm>
-              <a:off x="5619136" y="5785772"/>
-              <a:ext cx="155356" cy="80101"/>
+              <a:off x="5665725" y="5785772"/>
+              <a:ext cx="62179" cy="80101"/>
             </a:xfrm>
             <a:prstGeom prst="rect">
               <a:avLst/>
@@ -4887,7 +4887,7 @@
                   <a:latin typeface="Helvetica"/>
                   <a:cs typeface="Helvetica"/>
                 </a:rPr>
-                <a:t>1.0</a:t>
+                <a:t>0</a:t>
               </a:r>
             </a:p>
           </p:txBody>
@@ -4900,8 +4900,8 @@
           </p:nvSpPr>
           <p:spPr>
             <a:xfrm>
-              <a:off x="7351060" y="5785772"/>
-              <a:ext cx="155356" cy="80101"/>
+              <a:off x="7366559" y="5785772"/>
+              <a:ext cx="124358" cy="80101"/>
             </a:xfrm>
             <a:prstGeom prst="rect">
               <a:avLst/>
@@ -4933,7 +4933,7 @@
                   <a:latin typeface="Helvetica"/>
                   <a:cs typeface="Helvetica"/>
                 </a:rPr>
-                <a:t>1.2</a:t>
+                <a:t>20</a:t>
               </a:r>
             </a:p>
           </p:txBody>
@@ -4946,8 +4946,8 @@
           </p:nvSpPr>
           <p:spPr>
             <a:xfrm>
-              <a:off x="2691419" y="5925448"/>
-              <a:ext cx="4051889" cy="100218"/>
+              <a:off x="1561815" y="5925448"/>
+              <a:ext cx="6311097" cy="100218"/>
             </a:xfrm>
             <a:prstGeom prst="rect">
               <a:avLst/>
@@ -4979,7 +4979,7 @@
                   <a:latin typeface="Helvetica"/>
                   <a:cs typeface="Helvetica"/>
                 </a:rPr>
-                <a:t>Sensitivity eGFR Ratio (CKD-EPI 2012 CysC / CKD-EPI 2021 Cr)</a:t>
+                <a:t>Sensitivity eGFR Difference (%): 100 × (CKD-EPI 2012 CysC − CKD-EPI 2021 Cr) / CKD-EPI 2021 Cr</a:t>
               </a:r>
             </a:p>
           </p:txBody>
@@ -5039,7 +5039,7 @@
           <p:spPr>
             <a:xfrm>
               <a:off x="817517" y="1896563"/>
-              <a:ext cx="6842729" cy="82021"/>
+              <a:ext cx="6969465" cy="82021"/>
             </a:xfrm>
             <a:prstGeom prst="rect">
               <a:avLst/>
@@ -5071,7 +5071,7 @@
                   <a:latin typeface="Helvetica"/>
                   <a:cs typeface="Helvetica"/>
                 </a:rPr>
-                <a:t>HR per 0.1 ratio decline: 2.45 (1.66-3.62), p_Bonf = &lt;0.001 (n = 6)  |  per IQR decline (Δ = 0.28): 12.37 (4.17-36.72)  |  IQR: [0.70, 0.98]</a:t>
+                <a:t>HR per 10 % decline: 2.45 (1.66-3.62), p_Bonf = &lt;0.001 (n = 6)  |  per IQR decline (Δ = 28.0 %): 12.37 (4.17-36.72)  |  IQR: [-30.0, -2.0] %</a:t>
               </a:r>
             </a:p>
           </p:txBody>

--- a/docs/pptx/carbo/jx-carbo-linsubhr-sens-death.pptx
+++ b/docs/pptx/carbo/jx-carbo-linsubhr-sens-death.pptx
@@ -2265,27 +2265,62 @@
         </p:sp>
         <p:sp>
           <p:nvSpPr>
-            <p:cNvPr id="4" name="pl4"/>
-            <p:cNvSpPr/>
-            <p:nvPr/>
-          </p:nvSpPr>
-          <p:spPr>
-            <a:xfrm>
-              <a:off x="817517" y="5142518"/>
-              <a:ext cx="7799693" cy="0"/>
+            <p:cNvPr id="4" name="rc4"/>
+            <p:cNvSpPr/>
+            <p:nvPr/>
+          </p:nvSpPr>
+          <p:spPr>
+            <a:xfrm>
+              <a:off x="457200" y="1600200"/>
+              <a:ext cx="8229600" cy="4525962"/>
+            </a:xfrm>
+            <a:prstGeom prst="rect">
+              <a:avLst/>
+            </a:prstGeom>
+            <a:solidFill>
+              <a:srgbClr val="FFFFFF">
+                <a:alpha val="100000"/>
+              </a:srgbClr>
+            </a:solidFill>
+            <a:ln w="13550" cap="rnd">
+              <a:solidFill>
+                <a:srgbClr val="FFFFFF">
+                  <a:alpha val="100000"/>
+                </a:srgbClr>
+              </a:solidFill>
+              <a:prstDash val="solid"/>
+              <a:round/>
+            </a:ln>
+          </p:spPr>
+          <p:txBody>
+            <a:bodyPr/>
+            <a:lstStyle/>
+            <a:p/>
+          </p:txBody>
+        </p:sp>
+        <p:sp>
+          <p:nvSpPr>
+            <p:cNvPr id="5" name="pl5"/>
+            <p:cNvSpPr/>
+            <p:nvPr/>
+          </p:nvSpPr>
+          <p:spPr>
+            <a:xfrm>
+              <a:off x="887106" y="3250627"/>
+              <a:ext cx="7660515" cy="0"/>
             </a:xfrm>
             <a:custGeom>
               <a:avLst/>
               <a:pathLst>
-                <a:path w="7799693" h="0">
+                <a:path w="7660515" h="0">
                   <a:moveTo>
                     <a:pt x="0" y="0"/>
                   </a:moveTo>
                   <a:lnTo>
-                    <a:pt x="7799693" y="0"/>
-                  </a:lnTo>
-                  <a:lnTo>
-                    <a:pt x="7799693" y="0"/>
+                    <a:pt x="7660515" y="0"/>
+                  </a:lnTo>
+                  <a:lnTo>
+                    <a:pt x="7660515" y="0"/>
                   </a:lnTo>
                 </a:path>
               </a:pathLst>
@@ -2308,27 +2343,27 @@
         </p:sp>
         <p:sp>
           <p:nvSpPr>
-            <p:cNvPr id="5" name="pl5"/>
-            <p:cNvSpPr/>
-            <p:nvPr/>
-          </p:nvSpPr>
-          <p:spPr>
-            <a:xfrm>
-              <a:off x="817517" y="4313054"/>
-              <a:ext cx="7799693" cy="0"/>
+            <p:cNvPr id="6" name="pl6"/>
+            <p:cNvSpPr/>
+            <p:nvPr/>
+          </p:nvSpPr>
+          <p:spPr>
+            <a:xfrm>
+              <a:off x="887106" y="2951293"/>
+              <a:ext cx="7660515" cy="0"/>
             </a:xfrm>
             <a:custGeom>
               <a:avLst/>
               <a:pathLst>
-                <a:path w="7799693" h="0">
+                <a:path w="7660515" h="0">
                   <a:moveTo>
                     <a:pt x="0" y="0"/>
                   </a:moveTo>
                   <a:lnTo>
-                    <a:pt x="7799693" y="0"/>
-                  </a:lnTo>
-                  <a:lnTo>
-                    <a:pt x="7799693" y="0"/>
+                    <a:pt x="7660515" y="0"/>
+                  </a:lnTo>
+                  <a:lnTo>
+                    <a:pt x="7660515" y="0"/>
                   </a:lnTo>
                 </a:path>
               </a:pathLst>
@@ -2351,27 +2386,27 @@
         </p:sp>
         <p:sp>
           <p:nvSpPr>
-            <p:cNvPr id="6" name="pl6"/>
-            <p:cNvSpPr/>
-            <p:nvPr/>
-          </p:nvSpPr>
-          <p:spPr>
-            <a:xfrm>
-              <a:off x="817517" y="3483591"/>
-              <a:ext cx="7799693" cy="0"/>
+            <p:cNvPr id="7" name="pl7"/>
+            <p:cNvSpPr/>
+            <p:nvPr/>
+          </p:nvSpPr>
+          <p:spPr>
+            <a:xfrm>
+              <a:off x="887106" y="2651959"/>
+              <a:ext cx="7660515" cy="0"/>
             </a:xfrm>
             <a:custGeom>
               <a:avLst/>
               <a:pathLst>
-                <a:path w="7799693" h="0">
+                <a:path w="7660515" h="0">
                   <a:moveTo>
                     <a:pt x="0" y="0"/>
                   </a:moveTo>
                   <a:lnTo>
-                    <a:pt x="7799693" y="0"/>
-                  </a:lnTo>
-                  <a:lnTo>
-                    <a:pt x="7799693" y="0"/>
+                    <a:pt x="7660515" y="0"/>
+                  </a:lnTo>
+                  <a:lnTo>
+                    <a:pt x="7660515" y="0"/>
                   </a:lnTo>
                 </a:path>
               </a:pathLst>
@@ -2394,27 +2429,27 @@
         </p:sp>
         <p:sp>
           <p:nvSpPr>
-            <p:cNvPr id="7" name="pl7"/>
-            <p:cNvSpPr/>
-            <p:nvPr/>
-          </p:nvSpPr>
-          <p:spPr>
-            <a:xfrm>
-              <a:off x="817517" y="2654127"/>
-              <a:ext cx="7799693" cy="0"/>
+            <p:cNvPr id="8" name="pl8"/>
+            <p:cNvSpPr/>
+            <p:nvPr/>
+          </p:nvSpPr>
+          <p:spPr>
+            <a:xfrm>
+              <a:off x="887106" y="2352625"/>
+              <a:ext cx="7660515" cy="0"/>
             </a:xfrm>
             <a:custGeom>
               <a:avLst/>
               <a:pathLst>
-                <a:path w="7799693" h="0">
+                <a:path w="7660515" h="0">
                   <a:moveTo>
                     <a:pt x="0" y="0"/>
                   </a:moveTo>
                   <a:lnTo>
-                    <a:pt x="7799693" y="0"/>
-                  </a:lnTo>
-                  <a:lnTo>
-                    <a:pt x="7799693" y="0"/>
+                    <a:pt x="7660515" y="0"/>
+                  </a:lnTo>
+                  <a:lnTo>
+                    <a:pt x="7660515" y="0"/>
                   </a:lnTo>
                 </a:path>
               </a:pathLst>
@@ -2437,21 +2472,21 @@
         </p:sp>
         <p:sp>
           <p:nvSpPr>
-            <p:cNvPr id="8" name="pl8"/>
-            <p:cNvSpPr/>
-            <p:nvPr/>
-          </p:nvSpPr>
-          <p:spPr>
-            <a:xfrm>
-              <a:off x="1367006" y="2073503"/>
-              <a:ext cx="0" cy="3649639"/>
+            <p:cNvPr id="9" name="pl9"/>
+            <p:cNvSpPr/>
+            <p:nvPr/>
+          </p:nvSpPr>
+          <p:spPr>
+            <a:xfrm>
+              <a:off x="1426790" y="2143092"/>
+              <a:ext cx="0" cy="1317069"/>
             </a:xfrm>
             <a:custGeom>
               <a:avLst/>
               <a:pathLst>
-                <a:path w="0" h="3649639">
+                <a:path w="0" h="1317069">
                   <a:moveTo>
-                    <a:pt x="0" y="3649639"/>
+                    <a:pt x="0" y="1317069"/>
                   </a:moveTo>
                   <a:lnTo>
                     <a:pt x="0" y="0"/>
@@ -2480,21 +2515,21 @@
         </p:sp>
         <p:sp>
           <p:nvSpPr>
-            <p:cNvPr id="9" name="pl9"/>
-            <p:cNvSpPr/>
-            <p:nvPr/>
-          </p:nvSpPr>
-          <p:spPr>
-            <a:xfrm>
-              <a:off x="3098929" y="2073503"/>
-              <a:ext cx="0" cy="3649639"/>
+            <p:cNvPr id="10" name="pl10"/>
+            <p:cNvSpPr/>
+            <p:nvPr/>
+          </p:nvSpPr>
+          <p:spPr>
+            <a:xfrm>
+              <a:off x="3127809" y="2143092"/>
+              <a:ext cx="0" cy="1317069"/>
             </a:xfrm>
             <a:custGeom>
               <a:avLst/>
               <a:pathLst>
-                <a:path w="0" h="3649639">
+                <a:path w="0" h="1317069">
                   <a:moveTo>
-                    <a:pt x="0" y="3649639"/>
+                    <a:pt x="0" y="1317069"/>
                   </a:moveTo>
                   <a:lnTo>
                     <a:pt x="0" y="0"/>
@@ -2523,21 +2558,21 @@
         </p:sp>
         <p:sp>
           <p:nvSpPr>
-            <p:cNvPr id="10" name="pl10"/>
-            <p:cNvSpPr/>
-            <p:nvPr/>
-          </p:nvSpPr>
-          <p:spPr>
-            <a:xfrm>
-              <a:off x="4830853" y="2073503"/>
-              <a:ext cx="0" cy="3649639"/>
+            <p:cNvPr id="11" name="pl11"/>
+            <p:cNvSpPr/>
+            <p:nvPr/>
+          </p:nvSpPr>
+          <p:spPr>
+            <a:xfrm>
+              <a:off x="4828828" y="2143092"/>
+              <a:ext cx="0" cy="1317069"/>
             </a:xfrm>
             <a:custGeom>
               <a:avLst/>
               <a:pathLst>
-                <a:path w="0" h="3649639">
+                <a:path w="0" h="1317069">
                   <a:moveTo>
-                    <a:pt x="0" y="3649639"/>
+                    <a:pt x="0" y="1317069"/>
                   </a:moveTo>
                   <a:lnTo>
                     <a:pt x="0" y="0"/>
@@ -2566,21 +2601,21 @@
         </p:sp>
         <p:sp>
           <p:nvSpPr>
-            <p:cNvPr id="11" name="pl11"/>
-            <p:cNvSpPr/>
-            <p:nvPr/>
-          </p:nvSpPr>
-          <p:spPr>
-            <a:xfrm>
-              <a:off x="6562776" y="2073503"/>
-              <a:ext cx="0" cy="3649639"/>
+            <p:cNvPr id="12" name="pl12"/>
+            <p:cNvSpPr/>
+            <p:nvPr/>
+          </p:nvSpPr>
+          <p:spPr>
+            <a:xfrm>
+              <a:off x="6529847" y="2143092"/>
+              <a:ext cx="0" cy="1317069"/>
             </a:xfrm>
             <a:custGeom>
               <a:avLst/>
               <a:pathLst>
-                <a:path w="0" h="3649639">
+                <a:path w="0" h="1317069">
                   <a:moveTo>
-                    <a:pt x="0" y="3649639"/>
+                    <a:pt x="0" y="1317069"/>
                   </a:moveTo>
                   <a:lnTo>
                     <a:pt x="0" y="0"/>
@@ -2609,21 +2644,21 @@
         </p:sp>
         <p:sp>
           <p:nvSpPr>
-            <p:cNvPr id="12" name="pl12"/>
-            <p:cNvSpPr/>
-            <p:nvPr/>
-          </p:nvSpPr>
-          <p:spPr>
-            <a:xfrm>
-              <a:off x="8294700" y="2073503"/>
-              <a:ext cx="0" cy="3649639"/>
+            <p:cNvPr id="13" name="pl13"/>
+            <p:cNvSpPr/>
+            <p:nvPr/>
+          </p:nvSpPr>
+          <p:spPr>
+            <a:xfrm>
+              <a:off x="8230866" y="2143092"/>
+              <a:ext cx="0" cy="1317069"/>
             </a:xfrm>
             <a:custGeom>
               <a:avLst/>
               <a:pathLst>
-                <a:path w="0" h="3649639">
+                <a:path w="0" h="1317069">
                   <a:moveTo>
-                    <a:pt x="0" y="3649639"/>
+                    <a:pt x="0" y="1317069"/>
                   </a:moveTo>
                   <a:lnTo>
                     <a:pt x="0" y="0"/>
@@ -2652,27 +2687,27 @@
         </p:sp>
         <p:sp>
           <p:nvSpPr>
-            <p:cNvPr id="13" name="pl13"/>
-            <p:cNvSpPr/>
-            <p:nvPr/>
-          </p:nvSpPr>
-          <p:spPr>
-            <a:xfrm>
-              <a:off x="817517" y="5557249"/>
-              <a:ext cx="7799693" cy="0"/>
+            <p:cNvPr id="14" name="pl14"/>
+            <p:cNvSpPr/>
+            <p:nvPr/>
+          </p:nvSpPr>
+          <p:spPr>
+            <a:xfrm>
+              <a:off x="887106" y="3400294"/>
+              <a:ext cx="7660515" cy="0"/>
             </a:xfrm>
             <a:custGeom>
               <a:avLst/>
               <a:pathLst>
-                <a:path w="7799693" h="0">
+                <a:path w="7660515" h="0">
                   <a:moveTo>
                     <a:pt x="0" y="0"/>
                   </a:moveTo>
                   <a:lnTo>
-                    <a:pt x="7799693" y="0"/>
-                  </a:lnTo>
-                  <a:lnTo>
-                    <a:pt x="7799693" y="0"/>
+                    <a:pt x="7660515" y="0"/>
+                  </a:lnTo>
+                  <a:lnTo>
+                    <a:pt x="7660515" y="0"/>
                   </a:lnTo>
                 </a:path>
               </a:pathLst>
@@ -2695,27 +2730,27 @@
         </p:sp>
         <p:sp>
           <p:nvSpPr>
-            <p:cNvPr id="14" name="pl14"/>
-            <p:cNvSpPr/>
-            <p:nvPr/>
-          </p:nvSpPr>
-          <p:spPr>
-            <a:xfrm>
-              <a:off x="817517" y="4727786"/>
-              <a:ext cx="7799693" cy="0"/>
+            <p:cNvPr id="15" name="pl15"/>
+            <p:cNvSpPr/>
+            <p:nvPr/>
+          </p:nvSpPr>
+          <p:spPr>
+            <a:xfrm>
+              <a:off x="887106" y="3100960"/>
+              <a:ext cx="7660515" cy="0"/>
             </a:xfrm>
             <a:custGeom>
               <a:avLst/>
               <a:pathLst>
-                <a:path w="7799693" h="0">
+                <a:path w="7660515" h="0">
                   <a:moveTo>
                     <a:pt x="0" y="0"/>
                   </a:moveTo>
                   <a:lnTo>
-                    <a:pt x="7799693" y="0"/>
-                  </a:lnTo>
-                  <a:lnTo>
-                    <a:pt x="7799693" y="0"/>
+                    <a:pt x="7660515" y="0"/>
+                  </a:lnTo>
+                  <a:lnTo>
+                    <a:pt x="7660515" y="0"/>
                   </a:lnTo>
                 </a:path>
               </a:pathLst>
@@ -2738,27 +2773,27 @@
         </p:sp>
         <p:sp>
           <p:nvSpPr>
-            <p:cNvPr id="15" name="pl15"/>
-            <p:cNvSpPr/>
-            <p:nvPr/>
-          </p:nvSpPr>
-          <p:spPr>
-            <a:xfrm>
-              <a:off x="817517" y="3898322"/>
-              <a:ext cx="7799693" cy="0"/>
+            <p:cNvPr id="16" name="pl16"/>
+            <p:cNvSpPr/>
+            <p:nvPr/>
+          </p:nvSpPr>
+          <p:spPr>
+            <a:xfrm>
+              <a:off x="887106" y="2801626"/>
+              <a:ext cx="7660515" cy="0"/>
             </a:xfrm>
             <a:custGeom>
               <a:avLst/>
               <a:pathLst>
-                <a:path w="7799693" h="0">
+                <a:path w="7660515" h="0">
                   <a:moveTo>
                     <a:pt x="0" y="0"/>
                   </a:moveTo>
                   <a:lnTo>
-                    <a:pt x="7799693" y="0"/>
-                  </a:lnTo>
-                  <a:lnTo>
-                    <a:pt x="7799693" y="0"/>
+                    <a:pt x="7660515" y="0"/>
+                  </a:lnTo>
+                  <a:lnTo>
+                    <a:pt x="7660515" y="0"/>
                   </a:lnTo>
                 </a:path>
               </a:pathLst>
@@ -2781,27 +2816,27 @@
         </p:sp>
         <p:sp>
           <p:nvSpPr>
-            <p:cNvPr id="16" name="pl16"/>
-            <p:cNvSpPr/>
-            <p:nvPr/>
-          </p:nvSpPr>
-          <p:spPr>
-            <a:xfrm>
-              <a:off x="817517" y="3068859"/>
-              <a:ext cx="7799693" cy="0"/>
+            <p:cNvPr id="17" name="pl17"/>
+            <p:cNvSpPr/>
+            <p:nvPr/>
+          </p:nvSpPr>
+          <p:spPr>
+            <a:xfrm>
+              <a:off x="887106" y="2502292"/>
+              <a:ext cx="7660515" cy="0"/>
             </a:xfrm>
             <a:custGeom>
               <a:avLst/>
               <a:pathLst>
-                <a:path w="7799693" h="0">
+                <a:path w="7660515" h="0">
                   <a:moveTo>
                     <a:pt x="0" y="0"/>
                   </a:moveTo>
                   <a:lnTo>
-                    <a:pt x="7799693" y="0"/>
-                  </a:lnTo>
-                  <a:lnTo>
-                    <a:pt x="7799693" y="0"/>
+                    <a:pt x="7660515" y="0"/>
+                  </a:lnTo>
+                  <a:lnTo>
+                    <a:pt x="7660515" y="0"/>
                   </a:lnTo>
                 </a:path>
               </a:pathLst>
@@ -2824,27 +2859,27 @@
         </p:sp>
         <p:sp>
           <p:nvSpPr>
-            <p:cNvPr id="17" name="pl17"/>
-            <p:cNvSpPr/>
-            <p:nvPr/>
-          </p:nvSpPr>
-          <p:spPr>
-            <a:xfrm>
-              <a:off x="817517" y="2239395"/>
-              <a:ext cx="7799693" cy="0"/>
+            <p:cNvPr id="18" name="pl18"/>
+            <p:cNvSpPr/>
+            <p:nvPr/>
+          </p:nvSpPr>
+          <p:spPr>
+            <a:xfrm>
+              <a:off x="887106" y="2202958"/>
+              <a:ext cx="7660515" cy="0"/>
             </a:xfrm>
             <a:custGeom>
               <a:avLst/>
               <a:pathLst>
-                <a:path w="7799693" h="0">
+                <a:path w="7660515" h="0">
                   <a:moveTo>
                     <a:pt x="0" y="0"/>
                   </a:moveTo>
                   <a:lnTo>
-                    <a:pt x="7799693" y="0"/>
-                  </a:lnTo>
-                  <a:lnTo>
-                    <a:pt x="7799693" y="0"/>
+                    <a:pt x="7660515" y="0"/>
+                  </a:lnTo>
+                  <a:lnTo>
+                    <a:pt x="7660515" y="0"/>
                   </a:lnTo>
                 </a:path>
               </a:pathLst>
@@ -2867,21 +2902,21 @@
         </p:sp>
         <p:sp>
           <p:nvSpPr>
-            <p:cNvPr id="18" name="pl18"/>
-            <p:cNvSpPr/>
-            <p:nvPr/>
-          </p:nvSpPr>
-          <p:spPr>
-            <a:xfrm>
-              <a:off x="2232968" y="2073503"/>
-              <a:ext cx="0" cy="3649639"/>
+            <p:cNvPr id="19" name="pl19"/>
+            <p:cNvSpPr/>
+            <p:nvPr/>
+          </p:nvSpPr>
+          <p:spPr>
+            <a:xfrm>
+              <a:off x="2277299" y="2143092"/>
+              <a:ext cx="0" cy="1317069"/>
             </a:xfrm>
             <a:custGeom>
               <a:avLst/>
               <a:pathLst>
-                <a:path w="0" h="3649639">
+                <a:path w="0" h="1317069">
                   <a:moveTo>
-                    <a:pt x="0" y="3649639"/>
+                    <a:pt x="0" y="1317069"/>
                   </a:moveTo>
                   <a:lnTo>
                     <a:pt x="0" y="0"/>
@@ -2910,21 +2945,21 @@
         </p:sp>
         <p:sp>
           <p:nvSpPr>
-            <p:cNvPr id="19" name="pl19"/>
-            <p:cNvSpPr/>
-            <p:nvPr/>
-          </p:nvSpPr>
-          <p:spPr>
-            <a:xfrm>
-              <a:off x="3964891" y="2073503"/>
-              <a:ext cx="0" cy="3649639"/>
+            <p:cNvPr id="20" name="pl20"/>
+            <p:cNvSpPr/>
+            <p:nvPr/>
+          </p:nvSpPr>
+          <p:spPr>
+            <a:xfrm>
+              <a:off x="3978318" y="2143092"/>
+              <a:ext cx="0" cy="1317069"/>
             </a:xfrm>
             <a:custGeom>
               <a:avLst/>
               <a:pathLst>
-                <a:path w="0" h="3649639">
+                <a:path w="0" h="1317069">
                   <a:moveTo>
-                    <a:pt x="0" y="3649639"/>
+                    <a:pt x="0" y="1317069"/>
                   </a:moveTo>
                   <a:lnTo>
                     <a:pt x="0" y="0"/>
@@ -2953,21 +2988,21 @@
         </p:sp>
         <p:sp>
           <p:nvSpPr>
-            <p:cNvPr id="20" name="pl20"/>
-            <p:cNvSpPr/>
-            <p:nvPr/>
-          </p:nvSpPr>
-          <p:spPr>
-            <a:xfrm>
-              <a:off x="5696815" y="2073503"/>
-              <a:ext cx="0" cy="3649639"/>
+            <p:cNvPr id="21" name="pl21"/>
+            <p:cNvSpPr/>
+            <p:nvPr/>
+          </p:nvSpPr>
+          <p:spPr>
+            <a:xfrm>
+              <a:off x="5679337" y="2143092"/>
+              <a:ext cx="0" cy="1317069"/>
             </a:xfrm>
             <a:custGeom>
               <a:avLst/>
               <a:pathLst>
-                <a:path w="0" h="3649639">
+                <a:path w="0" h="1317069">
                   <a:moveTo>
-                    <a:pt x="0" y="3649639"/>
+                    <a:pt x="0" y="1317069"/>
                   </a:moveTo>
                   <a:lnTo>
                     <a:pt x="0" y="0"/>
@@ -2996,21 +3031,21 @@
         </p:sp>
         <p:sp>
           <p:nvSpPr>
-            <p:cNvPr id="21" name="pl21"/>
-            <p:cNvSpPr/>
-            <p:nvPr/>
-          </p:nvSpPr>
-          <p:spPr>
-            <a:xfrm>
-              <a:off x="7428738" y="2073503"/>
-              <a:ext cx="0" cy="3649639"/>
+            <p:cNvPr id="22" name="pl22"/>
+            <p:cNvSpPr/>
+            <p:nvPr/>
+          </p:nvSpPr>
+          <p:spPr>
+            <a:xfrm>
+              <a:off x="7380356" y="2143092"/>
+              <a:ext cx="0" cy="1317069"/>
             </a:xfrm>
             <a:custGeom>
               <a:avLst/>
               <a:pathLst>
-                <a:path w="0" h="3649639">
+                <a:path w="0" h="1317069">
                   <a:moveTo>
-                    <a:pt x="0" y="3649639"/>
+                    <a:pt x="0" y="1317069"/>
                   </a:moveTo>
                   <a:lnTo>
                     <a:pt x="0" y="0"/>
@@ -3039,501 +3074,501 @@
         </p:sp>
         <p:sp>
           <p:nvSpPr>
-            <p:cNvPr id="22" name="pg22"/>
-            <p:cNvSpPr/>
-            <p:nvPr/>
-          </p:nvSpPr>
-          <p:spPr>
-            <a:xfrm>
-              <a:off x="1845557" y="2073503"/>
-              <a:ext cx="6417121" cy="3481487"/>
+            <p:cNvPr id="23" name="pg23"/>
+            <p:cNvSpPr/>
+            <p:nvPr/>
+          </p:nvSpPr>
+          <p:spPr>
+            <a:xfrm>
+              <a:off x="1896802" y="2143092"/>
+              <a:ext cx="6302614" cy="1256387"/>
             </a:xfrm>
             <a:custGeom>
               <a:avLst/>
               <a:pathLst>
-                <a:path w="6417121" h="3481487">
+                <a:path w="6302614" h="1256387">
                   <a:moveTo>
-                    <a:pt x="1472745" y="0"/>
+                    <a:pt x="1446465" y="0"/>
                   </a:moveTo>
                   <a:lnTo>
-                    <a:pt x="1475167" y="13167"/>
-                  </a:lnTo>
-                  <a:lnTo>
-                    <a:pt x="1546789" y="363268"/>
-                  </a:lnTo>
-                  <a:lnTo>
-                    <a:pt x="1618412" y="678051"/>
-                  </a:lnTo>
-                  <a:lnTo>
-                    <a:pt x="1690034" y="961081"/>
-                  </a:lnTo>
-                  <a:lnTo>
-                    <a:pt x="1761657" y="1215559"/>
-                  </a:lnTo>
-                  <a:lnTo>
-                    <a:pt x="1833279" y="1444367"/>
-                  </a:lnTo>
-                  <a:lnTo>
-                    <a:pt x="1904902" y="1650093"/>
-                  </a:lnTo>
-                  <a:lnTo>
-                    <a:pt x="1976524" y="1835066"/>
-                  </a:lnTo>
-                  <a:lnTo>
-                    <a:pt x="2048147" y="2001380"/>
-                  </a:lnTo>
-                  <a:lnTo>
-                    <a:pt x="2119769" y="2150916"/>
-                  </a:lnTo>
-                  <a:lnTo>
-                    <a:pt x="2191392" y="2285368"/>
-                  </a:lnTo>
-                  <a:lnTo>
-                    <a:pt x="2263015" y="2406256"/>
-                  </a:lnTo>
-                  <a:lnTo>
-                    <a:pt x="2334637" y="2514950"/>
-                  </a:lnTo>
-                  <a:lnTo>
-                    <a:pt x="2406260" y="2612679"/>
-                  </a:lnTo>
-                  <a:lnTo>
-                    <a:pt x="2477882" y="2672933"/>
-                  </a:lnTo>
-                  <a:lnTo>
-                    <a:pt x="2549505" y="2706384"/>
-                  </a:lnTo>
-                  <a:lnTo>
-                    <a:pt x="2621127" y="2738456"/>
-                  </a:lnTo>
-                  <a:lnTo>
-                    <a:pt x="2692750" y="2769204"/>
-                  </a:lnTo>
-                  <a:lnTo>
-                    <a:pt x="2764372" y="2798684"/>
-                  </a:lnTo>
-                  <a:lnTo>
-                    <a:pt x="2835995" y="2826947"/>
-                  </a:lnTo>
-                  <a:lnTo>
-                    <a:pt x="2907617" y="2854044"/>
-                  </a:lnTo>
-                  <a:lnTo>
-                    <a:pt x="2979240" y="2880024"/>
-                  </a:lnTo>
-                  <a:lnTo>
-                    <a:pt x="3050862" y="2904931"/>
-                  </a:lnTo>
-                  <a:lnTo>
-                    <a:pt x="3122485" y="2928811"/>
-                  </a:lnTo>
-                  <a:lnTo>
-                    <a:pt x="3194107" y="2951706"/>
-                  </a:lnTo>
-                  <a:lnTo>
-                    <a:pt x="3265730" y="2973656"/>
-                  </a:lnTo>
-                  <a:lnTo>
-                    <a:pt x="3337352" y="2994701"/>
-                  </a:lnTo>
-                  <a:lnTo>
-                    <a:pt x="3408975" y="3014877"/>
-                  </a:lnTo>
-                  <a:lnTo>
-                    <a:pt x="3480597" y="3034221"/>
-                  </a:lnTo>
-                  <a:lnTo>
-                    <a:pt x="3552220" y="3052767"/>
-                  </a:lnTo>
-                  <a:lnTo>
-                    <a:pt x="3623843" y="3070548"/>
-                  </a:lnTo>
-                  <a:lnTo>
-                    <a:pt x="3695465" y="3087595"/>
-                  </a:lnTo>
-                  <a:lnTo>
-                    <a:pt x="3767088" y="3103939"/>
-                  </a:lnTo>
-                  <a:lnTo>
-                    <a:pt x="3838710" y="3119609"/>
-                  </a:lnTo>
-                  <a:lnTo>
-                    <a:pt x="3910333" y="3134632"/>
-                  </a:lnTo>
-                  <a:lnTo>
-                    <a:pt x="3981955" y="3149035"/>
-                  </a:lnTo>
-                  <a:lnTo>
-                    <a:pt x="4053578" y="3162844"/>
-                  </a:lnTo>
-                  <a:lnTo>
-                    <a:pt x="4125200" y="3176084"/>
-                  </a:lnTo>
-                  <a:lnTo>
-                    <a:pt x="4196823" y="3188777"/>
-                  </a:lnTo>
-                  <a:lnTo>
-                    <a:pt x="4268445" y="3200946"/>
-                  </a:lnTo>
-                  <a:lnTo>
-                    <a:pt x="4340068" y="3212614"/>
-                  </a:lnTo>
-                  <a:lnTo>
-                    <a:pt x="4411690" y="3223800"/>
-                  </a:lnTo>
-                  <a:lnTo>
-                    <a:pt x="4483313" y="3234524"/>
-                  </a:lnTo>
-                  <a:lnTo>
-                    <a:pt x="4554935" y="3244806"/>
-                  </a:lnTo>
-                  <a:lnTo>
-                    <a:pt x="4626558" y="3254664"/>
-                  </a:lnTo>
-                  <a:lnTo>
-                    <a:pt x="4698180" y="3264115"/>
-                  </a:lnTo>
-                  <a:lnTo>
-                    <a:pt x="4769803" y="3273177"/>
-                  </a:lnTo>
-                  <a:lnTo>
-                    <a:pt x="4841425" y="3281864"/>
-                  </a:lnTo>
-                  <a:lnTo>
-                    <a:pt x="4913048" y="3290193"/>
-                  </a:lnTo>
-                  <a:lnTo>
-                    <a:pt x="4984671" y="3298178"/>
-                  </a:lnTo>
-                  <a:lnTo>
-                    <a:pt x="5056293" y="3305834"/>
-                  </a:lnTo>
-                  <a:lnTo>
-                    <a:pt x="5127916" y="3313174"/>
-                  </a:lnTo>
-                  <a:lnTo>
-                    <a:pt x="5199538" y="3320212"/>
-                  </a:lnTo>
-                  <a:lnTo>
-                    <a:pt x="5271161" y="3326958"/>
-                  </a:lnTo>
-                  <a:lnTo>
-                    <a:pt x="5342783" y="3333427"/>
-                  </a:lnTo>
-                  <a:lnTo>
-                    <a:pt x="5414406" y="3339629"/>
-                  </a:lnTo>
-                  <a:lnTo>
-                    <a:pt x="5486028" y="3345574"/>
-                  </a:lnTo>
-                  <a:lnTo>
-                    <a:pt x="5557651" y="3351275"/>
-                  </a:lnTo>
-                  <a:lnTo>
-                    <a:pt x="5629273" y="3356740"/>
-                  </a:lnTo>
-                  <a:lnTo>
-                    <a:pt x="5700896" y="3361980"/>
-                  </a:lnTo>
-                  <a:lnTo>
-                    <a:pt x="5772518" y="3367004"/>
-                  </a:lnTo>
-                  <a:lnTo>
-                    <a:pt x="5844141" y="3371820"/>
-                  </a:lnTo>
-                  <a:lnTo>
-                    <a:pt x="5915763" y="3376438"/>
-                  </a:lnTo>
-                  <a:lnTo>
-                    <a:pt x="5987386" y="3380865"/>
-                  </a:lnTo>
-                  <a:lnTo>
-                    <a:pt x="6059008" y="3385110"/>
-                  </a:lnTo>
-                  <a:lnTo>
-                    <a:pt x="6130631" y="3389179"/>
-                  </a:lnTo>
-                  <a:lnTo>
-                    <a:pt x="6202253" y="3393081"/>
-                  </a:lnTo>
-                  <a:lnTo>
-                    <a:pt x="6273876" y="3396821"/>
-                  </a:lnTo>
-                  <a:lnTo>
-                    <a:pt x="6345499" y="3400407"/>
-                  </a:lnTo>
-                  <a:lnTo>
-                    <a:pt x="6417121" y="3403846"/>
-                  </a:lnTo>
-                  <a:lnTo>
-                    <a:pt x="6417121" y="3481487"/>
-                  </a:lnTo>
-                  <a:lnTo>
-                    <a:pt x="6345499" y="3481234"/>
-                  </a:lnTo>
-                  <a:lnTo>
-                    <a:pt x="6273876" y="3480952"/>
-                  </a:lnTo>
-                  <a:lnTo>
-                    <a:pt x="6202253" y="3480638"/>
-                  </a:lnTo>
-                  <a:lnTo>
-                    <a:pt x="6130631" y="3480290"/>
-                  </a:lnTo>
-                  <a:lnTo>
-                    <a:pt x="6059008" y="3479902"/>
-                  </a:lnTo>
-                  <a:lnTo>
-                    <a:pt x="5987386" y="3479471"/>
-                  </a:lnTo>
-                  <a:lnTo>
-                    <a:pt x="5915763" y="3478991"/>
-                  </a:lnTo>
-                  <a:lnTo>
-                    <a:pt x="5844141" y="3478457"/>
-                  </a:lnTo>
-                  <a:lnTo>
-                    <a:pt x="5772518" y="3477864"/>
-                  </a:lnTo>
-                  <a:lnTo>
-                    <a:pt x="5700896" y="3477204"/>
-                  </a:lnTo>
-                  <a:lnTo>
-                    <a:pt x="5629273" y="3476470"/>
-                  </a:lnTo>
-                  <a:lnTo>
-                    <a:pt x="5557651" y="3475654"/>
-                  </a:lnTo>
-                  <a:lnTo>
-                    <a:pt x="5486028" y="3474746"/>
-                  </a:lnTo>
-                  <a:lnTo>
-                    <a:pt x="5414406" y="3473736"/>
-                  </a:lnTo>
-                  <a:lnTo>
-                    <a:pt x="5342783" y="3472613"/>
-                  </a:lnTo>
-                  <a:lnTo>
-                    <a:pt x="5271161" y="3471364"/>
-                  </a:lnTo>
-                  <a:lnTo>
-                    <a:pt x="5199538" y="3469974"/>
-                  </a:lnTo>
-                  <a:lnTo>
-                    <a:pt x="5127916" y="3468429"/>
-                  </a:lnTo>
-                  <a:lnTo>
-                    <a:pt x="5056293" y="3466711"/>
-                  </a:lnTo>
-                  <a:lnTo>
-                    <a:pt x="4984671" y="3464799"/>
-                  </a:lnTo>
-                  <a:lnTo>
-                    <a:pt x="4913048" y="3462674"/>
-                  </a:lnTo>
-                  <a:lnTo>
-                    <a:pt x="4841425" y="3460309"/>
-                  </a:lnTo>
-                  <a:lnTo>
-                    <a:pt x="4769803" y="3457680"/>
-                  </a:lnTo>
-                  <a:lnTo>
-                    <a:pt x="4698180" y="3454755"/>
-                  </a:lnTo>
-                  <a:lnTo>
-                    <a:pt x="4626558" y="3451503"/>
-                  </a:lnTo>
-                  <a:lnTo>
-                    <a:pt x="4554935" y="3447885"/>
-                  </a:lnTo>
-                  <a:lnTo>
-                    <a:pt x="4483313" y="3443861"/>
-                  </a:lnTo>
-                  <a:lnTo>
-                    <a:pt x="4411690" y="3439387"/>
-                  </a:lnTo>
-                  <a:lnTo>
-                    <a:pt x="4340068" y="3434410"/>
-                  </a:lnTo>
-                  <a:lnTo>
-                    <a:pt x="4268445" y="3428874"/>
-                  </a:lnTo>
-                  <a:lnTo>
-                    <a:pt x="4196823" y="3422718"/>
-                  </a:lnTo>
-                  <a:lnTo>
-                    <a:pt x="4125200" y="3415871"/>
-                  </a:lnTo>
-                  <a:lnTo>
-                    <a:pt x="4053578" y="3408256"/>
-                  </a:lnTo>
-                  <a:lnTo>
-                    <a:pt x="3981955" y="3399786"/>
-                  </a:lnTo>
-                  <a:lnTo>
-                    <a:pt x="3910333" y="3390366"/>
-                  </a:lnTo>
-                  <a:lnTo>
-                    <a:pt x="3838710" y="3379889"/>
-                  </a:lnTo>
-                  <a:lnTo>
-                    <a:pt x="3767088" y="3368237"/>
-                  </a:lnTo>
-                  <a:lnTo>
-                    <a:pt x="3695465" y="3355278"/>
-                  </a:lnTo>
-                  <a:lnTo>
-                    <a:pt x="3623843" y="3340864"/>
-                  </a:lnTo>
-                  <a:lnTo>
-                    <a:pt x="3552220" y="3324834"/>
-                  </a:lnTo>
-                  <a:lnTo>
-                    <a:pt x="3480597" y="3307004"/>
-                  </a:lnTo>
-                  <a:lnTo>
-                    <a:pt x="3408975" y="3287175"/>
-                  </a:lnTo>
-                  <a:lnTo>
-                    <a:pt x="3337352" y="3265121"/>
-                  </a:lnTo>
-                  <a:lnTo>
-                    <a:pt x="3265730" y="3240592"/>
-                  </a:lnTo>
-                  <a:lnTo>
-                    <a:pt x="3194107" y="3213311"/>
-                  </a:lnTo>
-                  <a:lnTo>
-                    <a:pt x="3122485" y="3182970"/>
-                  </a:lnTo>
-                  <a:lnTo>
-                    <a:pt x="3050862" y="3149224"/>
-                  </a:lnTo>
-                  <a:lnTo>
-                    <a:pt x="2979240" y="3111693"/>
-                  </a:lnTo>
-                  <a:lnTo>
-                    <a:pt x="2907617" y="3069951"/>
-                  </a:lnTo>
-                  <a:lnTo>
-                    <a:pt x="2835995" y="3023525"/>
-                  </a:lnTo>
-                  <a:lnTo>
-                    <a:pt x="2764372" y="2971890"/>
-                  </a:lnTo>
-                  <a:lnTo>
-                    <a:pt x="2692750" y="2914463"/>
-                  </a:lnTo>
-                  <a:lnTo>
-                    <a:pt x="2621127" y="2850592"/>
-                  </a:lnTo>
-                  <a:lnTo>
-                    <a:pt x="2549505" y="2779556"/>
-                  </a:lnTo>
-                  <a:lnTo>
-                    <a:pt x="2477882" y="2700550"/>
-                  </a:lnTo>
-                  <a:lnTo>
-                    <a:pt x="2406260" y="2638042"/>
-                  </a:lnTo>
-                  <a:lnTo>
-                    <a:pt x="2334637" y="2601649"/>
-                  </a:lnTo>
-                  <a:lnTo>
-                    <a:pt x="2263015" y="2563691"/>
-                  </a:lnTo>
-                  <a:lnTo>
-                    <a:pt x="2191392" y="2524099"/>
-                  </a:lnTo>
-                  <a:lnTo>
-                    <a:pt x="2119769" y="2482804"/>
-                  </a:lnTo>
-                  <a:lnTo>
-                    <a:pt x="2048147" y="2439731"/>
-                  </a:lnTo>
-                  <a:lnTo>
-                    <a:pt x="1976524" y="2394805"/>
-                  </a:lnTo>
-                  <a:lnTo>
-                    <a:pt x="1904902" y="2347945"/>
-                  </a:lnTo>
-                  <a:lnTo>
-                    <a:pt x="1833279" y="2299070"/>
-                  </a:lnTo>
-                  <a:lnTo>
-                    <a:pt x="1761657" y="2248091"/>
-                  </a:lnTo>
-                  <a:lnTo>
-                    <a:pt x="1690034" y="2194918"/>
-                  </a:lnTo>
-                  <a:lnTo>
-                    <a:pt x="1618412" y="2139457"/>
-                  </a:lnTo>
-                  <a:lnTo>
-                    <a:pt x="1546789" y="2081609"/>
-                  </a:lnTo>
-                  <a:lnTo>
-                    <a:pt x="1475167" y="2021273"/>
-                  </a:lnTo>
-                  <a:lnTo>
-                    <a:pt x="1403544" y="1958339"/>
-                  </a:lnTo>
-                  <a:lnTo>
-                    <a:pt x="1331922" y="1892698"/>
-                  </a:lnTo>
-                  <a:lnTo>
-                    <a:pt x="1260299" y="1824232"/>
-                  </a:lnTo>
-                  <a:lnTo>
-                    <a:pt x="1188677" y="1752820"/>
-                  </a:lnTo>
-                  <a:lnTo>
-                    <a:pt x="1117054" y="1678334"/>
-                  </a:lnTo>
-                  <a:lnTo>
-                    <a:pt x="1045432" y="1600644"/>
-                  </a:lnTo>
-                  <a:lnTo>
-                    <a:pt x="973809" y="1519610"/>
-                  </a:lnTo>
-                  <a:lnTo>
-                    <a:pt x="902187" y="1435089"/>
-                  </a:lnTo>
-                  <a:lnTo>
-                    <a:pt x="830564" y="1346931"/>
-                  </a:lnTo>
-                  <a:lnTo>
-                    <a:pt x="758941" y="1254980"/>
-                  </a:lnTo>
-                  <a:lnTo>
-                    <a:pt x="687319" y="1159071"/>
-                  </a:lnTo>
-                  <a:lnTo>
-                    <a:pt x="615696" y="1059036"/>
-                  </a:lnTo>
-                  <a:lnTo>
-                    <a:pt x="544074" y="954696"/>
-                  </a:lnTo>
-                  <a:lnTo>
-                    <a:pt x="472451" y="845865"/>
-                  </a:lnTo>
-                  <a:lnTo>
-                    <a:pt x="400829" y="732352"/>
-                  </a:lnTo>
-                  <a:lnTo>
-                    <a:pt x="329206" y="613954"/>
-                  </a:lnTo>
-                  <a:lnTo>
-                    <a:pt x="257584" y="490461"/>
-                  </a:lnTo>
-                  <a:lnTo>
-                    <a:pt x="185961" y="361654"/>
-                  </a:lnTo>
-                  <a:lnTo>
-                    <a:pt x="114339" y="227304"/>
-                  </a:lnTo>
-                  <a:lnTo>
-                    <a:pt x="42716" y="87172"/>
+                    <a:pt x="1448844" y="4751"/>
+                  </a:lnTo>
+                  <a:lnTo>
+                    <a:pt x="1519188" y="131094"/>
+                  </a:lnTo>
+                  <a:lnTo>
+                    <a:pt x="1589533" y="244692"/>
+                  </a:lnTo>
+                  <a:lnTo>
+                    <a:pt x="1659877" y="346831"/>
+                  </a:lnTo>
+                  <a:lnTo>
+                    <a:pt x="1730222" y="438666"/>
+                  </a:lnTo>
+                  <a:lnTo>
+                    <a:pt x="1800566" y="521238"/>
+                  </a:lnTo>
+                  <a:lnTo>
+                    <a:pt x="1870911" y="595479"/>
+                  </a:lnTo>
+                  <a:lnTo>
+                    <a:pt x="1941255" y="662232"/>
+                  </a:lnTo>
+                  <a:lnTo>
+                    <a:pt x="2011600" y="722250"/>
+                  </a:lnTo>
+                  <a:lnTo>
+                    <a:pt x="2081944" y="776215"/>
+                  </a:lnTo>
+                  <a:lnTo>
+                    <a:pt x="2152289" y="824735"/>
+                  </a:lnTo>
+                  <a:lnTo>
+                    <a:pt x="2222633" y="868361"/>
+                  </a:lnTo>
+                  <a:lnTo>
+                    <a:pt x="2292978" y="907586"/>
+                  </a:lnTo>
+                  <a:lnTo>
+                    <a:pt x="2363322" y="942854"/>
+                  </a:lnTo>
+                  <a:lnTo>
+                    <a:pt x="2433667" y="964598"/>
+                  </a:lnTo>
+                  <a:lnTo>
+                    <a:pt x="2504011" y="976670"/>
+                  </a:lnTo>
+                  <a:lnTo>
+                    <a:pt x="2574356" y="988244"/>
+                  </a:lnTo>
+                  <a:lnTo>
+                    <a:pt x="2644700" y="999340"/>
+                  </a:lnTo>
+                  <a:lnTo>
+                    <a:pt x="2715045" y="1009979"/>
+                  </a:lnTo>
+                  <a:lnTo>
+                    <a:pt x="2785389" y="1020178"/>
+                  </a:lnTo>
+                  <a:lnTo>
+                    <a:pt x="2855734" y="1029957"/>
+                  </a:lnTo>
+                  <a:lnTo>
+                    <a:pt x="2926078" y="1039332"/>
+                  </a:lnTo>
+                  <a:lnTo>
+                    <a:pt x="2996423" y="1048321"/>
+                  </a:lnTo>
+                  <a:lnTo>
+                    <a:pt x="3066767" y="1056939"/>
+                  </a:lnTo>
+                  <a:lnTo>
+                    <a:pt x="3137112" y="1065201"/>
+                  </a:lnTo>
+                  <a:lnTo>
+                    <a:pt x="3207456" y="1073122"/>
+                  </a:lnTo>
+                  <a:lnTo>
+                    <a:pt x="3277801" y="1080717"/>
+                  </a:lnTo>
+                  <a:lnTo>
+                    <a:pt x="3348145" y="1087998"/>
+                  </a:lnTo>
+                  <a:lnTo>
+                    <a:pt x="3418490" y="1094979"/>
+                  </a:lnTo>
+                  <a:lnTo>
+                    <a:pt x="3488834" y="1101672"/>
+                  </a:lnTo>
+                  <a:lnTo>
+                    <a:pt x="3559178" y="1108088"/>
+                  </a:lnTo>
+                  <a:lnTo>
+                    <a:pt x="3629523" y="1114240"/>
+                  </a:lnTo>
+                  <a:lnTo>
+                    <a:pt x="3699867" y="1120138"/>
+                  </a:lnTo>
+                  <a:lnTo>
+                    <a:pt x="3770212" y="1125793"/>
+                  </a:lnTo>
+                  <a:lnTo>
+                    <a:pt x="3840556" y="1131215"/>
+                  </a:lnTo>
+                  <a:lnTo>
+                    <a:pt x="3910901" y="1136412"/>
+                  </a:lnTo>
+                  <a:lnTo>
+                    <a:pt x="3981245" y="1141396"/>
+                  </a:lnTo>
+                  <a:lnTo>
+                    <a:pt x="4051590" y="1146174"/>
+                  </a:lnTo>
+                  <a:lnTo>
+                    <a:pt x="4121934" y="1150754"/>
+                  </a:lnTo>
+                  <a:lnTo>
+                    <a:pt x="4192279" y="1155146"/>
+                  </a:lnTo>
+                  <a:lnTo>
+                    <a:pt x="4262623" y="1159356"/>
+                  </a:lnTo>
+                  <a:lnTo>
+                    <a:pt x="4332968" y="1163393"/>
+                  </a:lnTo>
+                  <a:lnTo>
+                    <a:pt x="4403312" y="1167263"/>
+                  </a:lnTo>
+                  <a:lnTo>
+                    <a:pt x="4473657" y="1170974"/>
+                  </a:lnTo>
+                  <a:lnTo>
+                    <a:pt x="4544001" y="1174531"/>
+                  </a:lnTo>
+                  <a:lnTo>
+                    <a:pt x="4614346" y="1177942"/>
+                  </a:lnTo>
+                  <a:lnTo>
+                    <a:pt x="4684690" y="1181212"/>
+                  </a:lnTo>
+                  <a:lnTo>
+                    <a:pt x="4755035" y="1184347"/>
+                  </a:lnTo>
+                  <a:lnTo>
+                    <a:pt x="4825379" y="1187353"/>
+                  </a:lnTo>
+                  <a:lnTo>
+                    <a:pt x="4895724" y="1190235"/>
+                  </a:lnTo>
+                  <a:lnTo>
+                    <a:pt x="4966068" y="1192997"/>
+                  </a:lnTo>
+                  <a:lnTo>
+                    <a:pt x="5036413" y="1195646"/>
+                  </a:lnTo>
+                  <a:lnTo>
+                    <a:pt x="5106757" y="1198186"/>
+                  </a:lnTo>
+                  <a:lnTo>
+                    <a:pt x="5177102" y="1200621"/>
+                  </a:lnTo>
+                  <a:lnTo>
+                    <a:pt x="5247446" y="1202955"/>
+                  </a:lnTo>
+                  <a:lnTo>
+                    <a:pt x="5317791" y="1205193"/>
+                  </a:lnTo>
+                  <a:lnTo>
+                    <a:pt x="5388135" y="1207339"/>
+                  </a:lnTo>
+                  <a:lnTo>
+                    <a:pt x="5458480" y="1209396"/>
+                  </a:lnTo>
+                  <a:lnTo>
+                    <a:pt x="5528824" y="1211368"/>
+                  </a:lnTo>
+                  <a:lnTo>
+                    <a:pt x="5599169" y="1213259"/>
+                  </a:lnTo>
+                  <a:lnTo>
+                    <a:pt x="5669513" y="1215072"/>
+                  </a:lnTo>
+                  <a:lnTo>
+                    <a:pt x="5739858" y="1216810"/>
+                  </a:lnTo>
+                  <a:lnTo>
+                    <a:pt x="5810202" y="1218477"/>
+                  </a:lnTo>
+                  <a:lnTo>
+                    <a:pt x="5880547" y="1220074"/>
+                  </a:lnTo>
+                  <a:lnTo>
+                    <a:pt x="5950891" y="1221606"/>
+                  </a:lnTo>
+                  <a:lnTo>
+                    <a:pt x="6021236" y="1223075"/>
+                  </a:lnTo>
+                  <a:lnTo>
+                    <a:pt x="6091580" y="1224483"/>
+                  </a:lnTo>
+                  <a:lnTo>
+                    <a:pt x="6161925" y="1225833"/>
+                  </a:lnTo>
+                  <a:lnTo>
+                    <a:pt x="6232269" y="1227127"/>
+                  </a:lnTo>
+                  <a:lnTo>
+                    <a:pt x="6302614" y="1228368"/>
+                  </a:lnTo>
+                  <a:lnTo>
+                    <a:pt x="6302614" y="1256387"/>
+                  </a:lnTo>
+                  <a:lnTo>
+                    <a:pt x="6232269" y="1256295"/>
+                  </a:lnTo>
+                  <a:lnTo>
+                    <a:pt x="6161925" y="1256193"/>
+                  </a:lnTo>
+                  <a:lnTo>
+                    <a:pt x="6091580" y="1256080"/>
+                  </a:lnTo>
+                  <a:lnTo>
+                    <a:pt x="6021236" y="1255954"/>
+                  </a:lnTo>
+                  <a:lnTo>
+                    <a:pt x="5950891" y="1255814"/>
+                  </a:lnTo>
+                  <a:lnTo>
+                    <a:pt x="5880547" y="1255659"/>
+                  </a:lnTo>
+                  <a:lnTo>
+                    <a:pt x="5810202" y="1255486"/>
+                  </a:lnTo>
+                  <a:lnTo>
+                    <a:pt x="5739858" y="1255293"/>
+                  </a:lnTo>
+                  <a:lnTo>
+                    <a:pt x="5669513" y="1255079"/>
+                  </a:lnTo>
+                  <a:lnTo>
+                    <a:pt x="5599169" y="1254841"/>
+                  </a:lnTo>
+                  <a:lnTo>
+                    <a:pt x="5528824" y="1254576"/>
+                  </a:lnTo>
+                  <a:lnTo>
+                    <a:pt x="5458480" y="1254281"/>
+                  </a:lnTo>
+                  <a:lnTo>
+                    <a:pt x="5388135" y="1253954"/>
+                  </a:lnTo>
+                  <a:lnTo>
+                    <a:pt x="5317791" y="1253589"/>
+                  </a:lnTo>
+                  <a:lnTo>
+                    <a:pt x="5247446" y="1253184"/>
+                  </a:lnTo>
+                  <a:lnTo>
+                    <a:pt x="5177102" y="1252733"/>
+                  </a:lnTo>
+                  <a:lnTo>
+                    <a:pt x="5106757" y="1252232"/>
+                  </a:lnTo>
+                  <a:lnTo>
+                    <a:pt x="5036413" y="1251674"/>
+                  </a:lnTo>
+                  <a:lnTo>
+                    <a:pt x="4966068" y="1251054"/>
+                  </a:lnTo>
+                  <a:lnTo>
+                    <a:pt x="4895724" y="1250364"/>
+                  </a:lnTo>
+                  <a:lnTo>
+                    <a:pt x="4825379" y="1249597"/>
+                  </a:lnTo>
+                  <a:lnTo>
+                    <a:pt x="4755035" y="1248744"/>
+                  </a:lnTo>
+                  <a:lnTo>
+                    <a:pt x="4684690" y="1247795"/>
+                  </a:lnTo>
+                  <a:lnTo>
+                    <a:pt x="4614346" y="1246740"/>
+                  </a:lnTo>
+                  <a:lnTo>
+                    <a:pt x="4544001" y="1245566"/>
+                  </a:lnTo>
+                  <a:lnTo>
+                    <a:pt x="4473657" y="1244260"/>
+                  </a:lnTo>
+                  <a:lnTo>
+                    <a:pt x="4403312" y="1242808"/>
+                  </a:lnTo>
+                  <a:lnTo>
+                    <a:pt x="4332968" y="1241193"/>
+                  </a:lnTo>
+                  <a:lnTo>
+                    <a:pt x="4262623" y="1239397"/>
+                  </a:lnTo>
+                  <a:lnTo>
+                    <a:pt x="4192279" y="1237400"/>
+                  </a:lnTo>
+                  <a:lnTo>
+                    <a:pt x="4121934" y="1235178"/>
+                  </a:lnTo>
+                  <a:lnTo>
+                    <a:pt x="4051590" y="1232707"/>
+                  </a:lnTo>
+                  <a:lnTo>
+                    <a:pt x="3981245" y="1229959"/>
+                  </a:lnTo>
+                  <a:lnTo>
+                    <a:pt x="3910901" y="1226902"/>
+                  </a:lnTo>
+                  <a:lnTo>
+                    <a:pt x="3840556" y="1223503"/>
+                  </a:lnTo>
+                  <a:lnTo>
+                    <a:pt x="3770212" y="1219722"/>
+                  </a:lnTo>
+                  <a:lnTo>
+                    <a:pt x="3699867" y="1215517"/>
+                  </a:lnTo>
+                  <a:lnTo>
+                    <a:pt x="3629523" y="1210840"/>
+                  </a:lnTo>
+                  <a:lnTo>
+                    <a:pt x="3559178" y="1205639"/>
+                  </a:lnTo>
+                  <a:lnTo>
+                    <a:pt x="3488834" y="1199854"/>
+                  </a:lnTo>
+                  <a:lnTo>
+                    <a:pt x="3418490" y="1193420"/>
+                  </a:lnTo>
+                  <a:lnTo>
+                    <a:pt x="3348145" y="1186264"/>
+                  </a:lnTo>
+                  <a:lnTo>
+                    <a:pt x="3277801" y="1178305"/>
+                  </a:lnTo>
+                  <a:lnTo>
+                    <a:pt x="3207456" y="1169453"/>
+                  </a:lnTo>
+                  <a:lnTo>
+                    <a:pt x="3137112" y="1159608"/>
+                  </a:lnTo>
+                  <a:lnTo>
+                    <a:pt x="3066767" y="1148659"/>
+                  </a:lnTo>
+                  <a:lnTo>
+                    <a:pt x="2996423" y="1136481"/>
+                  </a:lnTo>
+                  <a:lnTo>
+                    <a:pt x="2926078" y="1122936"/>
+                  </a:lnTo>
+                  <a:lnTo>
+                    <a:pt x="2855734" y="1107873"/>
+                  </a:lnTo>
+                  <a:lnTo>
+                    <a:pt x="2785389" y="1091119"/>
+                  </a:lnTo>
+                  <a:lnTo>
+                    <a:pt x="2715045" y="1072485"/>
+                  </a:lnTo>
+                  <a:lnTo>
+                    <a:pt x="2644700" y="1051761"/>
+                  </a:lnTo>
+                  <a:lnTo>
+                    <a:pt x="2574356" y="1028711"/>
+                  </a:lnTo>
+                  <a:lnTo>
+                    <a:pt x="2504011" y="1003076"/>
+                  </a:lnTo>
+                  <a:lnTo>
+                    <a:pt x="2433667" y="974564"/>
+                  </a:lnTo>
+                  <a:lnTo>
+                    <a:pt x="2363322" y="952007"/>
+                  </a:lnTo>
+                  <a:lnTo>
+                    <a:pt x="2292978" y="938874"/>
+                  </a:lnTo>
+                  <a:lnTo>
+                    <a:pt x="2222633" y="925175"/>
+                  </a:lnTo>
+                  <a:lnTo>
+                    <a:pt x="2152289" y="910888"/>
+                  </a:lnTo>
+                  <a:lnTo>
+                    <a:pt x="2081944" y="895985"/>
+                  </a:lnTo>
+                  <a:lnTo>
+                    <a:pt x="2011600" y="880441"/>
+                  </a:lnTo>
+                  <a:lnTo>
+                    <a:pt x="1941255" y="864228"/>
+                  </a:lnTo>
+                  <a:lnTo>
+                    <a:pt x="1870911" y="847318"/>
+                  </a:lnTo>
+                  <a:lnTo>
+                    <a:pt x="1800566" y="829680"/>
+                  </a:lnTo>
+                  <a:lnTo>
+                    <a:pt x="1730222" y="811283"/>
+                  </a:lnTo>
+                  <a:lnTo>
+                    <a:pt x="1659877" y="792094"/>
+                  </a:lnTo>
+                  <a:lnTo>
+                    <a:pt x="1589533" y="772079"/>
+                  </a:lnTo>
+                  <a:lnTo>
+                    <a:pt x="1519188" y="751204"/>
+                  </a:lnTo>
+                  <a:lnTo>
+                    <a:pt x="1448844" y="729429"/>
+                  </a:lnTo>
+                  <a:lnTo>
+                    <a:pt x="1378499" y="706718"/>
+                  </a:lnTo>
+                  <a:lnTo>
+                    <a:pt x="1308155" y="683030"/>
+                  </a:lnTo>
+                  <a:lnTo>
+                    <a:pt x="1237810" y="658322"/>
+                  </a:lnTo>
+                  <a:lnTo>
+                    <a:pt x="1167466" y="632551"/>
+                  </a:lnTo>
+                  <a:lnTo>
+                    <a:pt x="1097121" y="605671"/>
+                  </a:lnTo>
+                  <a:lnTo>
+                    <a:pt x="1026777" y="577634"/>
+                  </a:lnTo>
+                  <a:lnTo>
+                    <a:pt x="956432" y="548391"/>
+                  </a:lnTo>
+                  <a:lnTo>
+                    <a:pt x="886088" y="517890"/>
+                  </a:lnTo>
+                  <a:lnTo>
+                    <a:pt x="815743" y="486075"/>
+                  </a:lnTo>
+                  <a:lnTo>
+                    <a:pt x="745399" y="452892"/>
+                  </a:lnTo>
+                  <a:lnTo>
+                    <a:pt x="675054" y="418281"/>
+                  </a:lnTo>
+                  <a:lnTo>
+                    <a:pt x="604710" y="382181"/>
+                  </a:lnTo>
+                  <a:lnTo>
+                    <a:pt x="534365" y="344527"/>
+                  </a:lnTo>
+                  <a:lnTo>
+                    <a:pt x="464021" y="305253"/>
+                  </a:lnTo>
+                  <a:lnTo>
+                    <a:pt x="393676" y="264288"/>
+                  </a:lnTo>
+                  <a:lnTo>
+                    <a:pt x="323332" y="221561"/>
+                  </a:lnTo>
+                  <a:lnTo>
+                    <a:pt x="252987" y="176995"/>
+                  </a:lnTo>
+                  <a:lnTo>
+                    <a:pt x="182643" y="130512"/>
+                  </a:lnTo>
+                  <a:lnTo>
+                    <a:pt x="112298" y="82028"/>
+                  </a:lnTo>
+                  <a:lnTo>
+                    <a:pt x="41954" y="31458"/>
                   </a:lnTo>
                   <a:lnTo>
                     <a:pt x="0" y="0"/>
@@ -3556,231 +3591,231 @@
         </p:sp>
         <p:sp>
           <p:nvSpPr>
-            <p:cNvPr id="23" name="pl23"/>
-            <p:cNvSpPr/>
-            <p:nvPr/>
-          </p:nvSpPr>
-          <p:spPr>
-            <a:xfrm>
-              <a:off x="3318303" y="2073503"/>
-              <a:ext cx="4944376" cy="3403846"/>
+            <p:cNvPr id="24" name="pl24"/>
+            <p:cNvSpPr/>
+            <p:nvPr/>
+          </p:nvSpPr>
+          <p:spPr>
+            <a:xfrm>
+              <a:off x="3343268" y="2143092"/>
+              <a:ext cx="4856148" cy="1228368"/>
             </a:xfrm>
             <a:custGeom>
               <a:avLst/>
               <a:pathLst>
-                <a:path w="4944376" h="3403846">
+                <a:path w="4856148" h="1228368">
                   <a:moveTo>
                     <a:pt x="0" y="0"/>
                   </a:moveTo>
                   <a:lnTo>
-                    <a:pt x="2421" y="13167"/>
-                  </a:lnTo>
-                  <a:lnTo>
-                    <a:pt x="74044" y="363268"/>
-                  </a:lnTo>
-                  <a:lnTo>
-                    <a:pt x="145667" y="678051"/>
-                  </a:lnTo>
-                  <a:lnTo>
-                    <a:pt x="217289" y="961081"/>
-                  </a:lnTo>
-                  <a:lnTo>
-                    <a:pt x="288912" y="1215559"/>
-                  </a:lnTo>
-                  <a:lnTo>
-                    <a:pt x="360534" y="1444367"/>
-                  </a:lnTo>
-                  <a:lnTo>
-                    <a:pt x="432157" y="1650093"/>
-                  </a:lnTo>
-                  <a:lnTo>
-                    <a:pt x="503779" y="1835066"/>
-                  </a:lnTo>
-                  <a:lnTo>
-                    <a:pt x="575402" y="2001380"/>
-                  </a:lnTo>
-                  <a:lnTo>
-                    <a:pt x="647024" y="2150916"/>
-                  </a:lnTo>
-                  <a:lnTo>
-                    <a:pt x="718647" y="2285368"/>
-                  </a:lnTo>
-                  <a:lnTo>
-                    <a:pt x="790269" y="2406256"/>
-                  </a:lnTo>
-                  <a:lnTo>
-                    <a:pt x="861892" y="2514950"/>
-                  </a:lnTo>
-                  <a:lnTo>
-                    <a:pt x="933514" y="2612679"/>
-                  </a:lnTo>
-                  <a:lnTo>
-                    <a:pt x="1005137" y="2672933"/>
-                  </a:lnTo>
-                  <a:lnTo>
-                    <a:pt x="1076759" y="2706384"/>
-                  </a:lnTo>
-                  <a:lnTo>
-                    <a:pt x="1148382" y="2738456"/>
-                  </a:lnTo>
-                  <a:lnTo>
-                    <a:pt x="1220004" y="2769204"/>
-                  </a:lnTo>
-                  <a:lnTo>
-                    <a:pt x="1291627" y="2798684"/>
-                  </a:lnTo>
-                  <a:lnTo>
-                    <a:pt x="1363249" y="2826947"/>
-                  </a:lnTo>
-                  <a:lnTo>
-                    <a:pt x="1434872" y="2854044"/>
-                  </a:lnTo>
-                  <a:lnTo>
-                    <a:pt x="1506494" y="2880024"/>
-                  </a:lnTo>
-                  <a:lnTo>
-                    <a:pt x="1578117" y="2904931"/>
-                  </a:lnTo>
-                  <a:lnTo>
-                    <a:pt x="1649740" y="2928811"/>
-                  </a:lnTo>
-                  <a:lnTo>
-                    <a:pt x="1721362" y="2951706"/>
-                  </a:lnTo>
-                  <a:lnTo>
-                    <a:pt x="1792985" y="2973656"/>
-                  </a:lnTo>
-                  <a:lnTo>
-                    <a:pt x="1864607" y="2994701"/>
-                  </a:lnTo>
-                  <a:lnTo>
-                    <a:pt x="1936230" y="3014877"/>
-                  </a:lnTo>
-                  <a:lnTo>
-                    <a:pt x="2007852" y="3034221"/>
-                  </a:lnTo>
-                  <a:lnTo>
-                    <a:pt x="2079475" y="3052767"/>
-                  </a:lnTo>
-                  <a:lnTo>
-                    <a:pt x="2151097" y="3070548"/>
-                  </a:lnTo>
-                  <a:lnTo>
-                    <a:pt x="2222720" y="3087595"/>
-                  </a:lnTo>
-                  <a:lnTo>
-                    <a:pt x="2294342" y="3103939"/>
-                  </a:lnTo>
-                  <a:lnTo>
-                    <a:pt x="2365965" y="3119609"/>
-                  </a:lnTo>
-                  <a:lnTo>
-                    <a:pt x="2437587" y="3134632"/>
-                  </a:lnTo>
-                  <a:lnTo>
-                    <a:pt x="2509210" y="3149035"/>
-                  </a:lnTo>
-                  <a:lnTo>
-                    <a:pt x="2580832" y="3162844"/>
-                  </a:lnTo>
-                  <a:lnTo>
-                    <a:pt x="2652455" y="3176084"/>
-                  </a:lnTo>
-                  <a:lnTo>
-                    <a:pt x="2724077" y="3188777"/>
-                  </a:lnTo>
-                  <a:lnTo>
-                    <a:pt x="2795700" y="3200946"/>
-                  </a:lnTo>
-                  <a:lnTo>
-                    <a:pt x="2867322" y="3212614"/>
-                  </a:lnTo>
-                  <a:lnTo>
-                    <a:pt x="2938945" y="3223800"/>
-                  </a:lnTo>
-                  <a:lnTo>
-                    <a:pt x="3010568" y="3234524"/>
-                  </a:lnTo>
-                  <a:lnTo>
-                    <a:pt x="3082190" y="3244806"/>
-                  </a:lnTo>
-                  <a:lnTo>
-                    <a:pt x="3153813" y="3254664"/>
-                  </a:lnTo>
-                  <a:lnTo>
-                    <a:pt x="3225435" y="3264115"/>
-                  </a:lnTo>
-                  <a:lnTo>
-                    <a:pt x="3297058" y="3273177"/>
-                  </a:lnTo>
-                  <a:lnTo>
-                    <a:pt x="3368680" y="3281864"/>
-                  </a:lnTo>
-                  <a:lnTo>
-                    <a:pt x="3440303" y="3290193"/>
-                  </a:lnTo>
-                  <a:lnTo>
-                    <a:pt x="3511925" y="3298178"/>
-                  </a:lnTo>
-                  <a:lnTo>
-                    <a:pt x="3583548" y="3305834"/>
-                  </a:lnTo>
-                  <a:lnTo>
-                    <a:pt x="3655170" y="3313174"/>
-                  </a:lnTo>
-                  <a:lnTo>
-                    <a:pt x="3726793" y="3320212"/>
-                  </a:lnTo>
-                  <a:lnTo>
-                    <a:pt x="3798415" y="3326958"/>
-                  </a:lnTo>
-                  <a:lnTo>
-                    <a:pt x="3870038" y="3333427"/>
-                  </a:lnTo>
-                  <a:lnTo>
-                    <a:pt x="3941660" y="3339629"/>
-                  </a:lnTo>
-                  <a:lnTo>
-                    <a:pt x="4013283" y="3345574"/>
-                  </a:lnTo>
-                  <a:lnTo>
-                    <a:pt x="4084905" y="3351275"/>
-                  </a:lnTo>
-                  <a:lnTo>
-                    <a:pt x="4156528" y="3356740"/>
-                  </a:lnTo>
-                  <a:lnTo>
-                    <a:pt x="4228150" y="3361980"/>
-                  </a:lnTo>
-                  <a:lnTo>
-                    <a:pt x="4299773" y="3367004"/>
-                  </a:lnTo>
-                  <a:lnTo>
-                    <a:pt x="4371396" y="3371820"/>
-                  </a:lnTo>
-                  <a:lnTo>
-                    <a:pt x="4443018" y="3376438"/>
-                  </a:lnTo>
-                  <a:lnTo>
-                    <a:pt x="4514641" y="3380865"/>
-                  </a:lnTo>
-                  <a:lnTo>
-                    <a:pt x="4586263" y="3385110"/>
-                  </a:lnTo>
-                  <a:lnTo>
-                    <a:pt x="4657886" y="3389179"/>
-                  </a:lnTo>
-                  <a:lnTo>
-                    <a:pt x="4729508" y="3393081"/>
-                  </a:lnTo>
-                  <a:lnTo>
-                    <a:pt x="4801131" y="3396821"/>
-                  </a:lnTo>
-                  <a:lnTo>
-                    <a:pt x="4872753" y="3400407"/>
-                  </a:lnTo>
-                  <a:lnTo>
-                    <a:pt x="4944376" y="3403846"/>
+                    <a:pt x="2378" y="4751"/>
+                  </a:lnTo>
+                  <a:lnTo>
+                    <a:pt x="72723" y="131094"/>
+                  </a:lnTo>
+                  <a:lnTo>
+                    <a:pt x="143067" y="244692"/>
+                  </a:lnTo>
+                  <a:lnTo>
+                    <a:pt x="213412" y="346831"/>
+                  </a:lnTo>
+                  <a:lnTo>
+                    <a:pt x="283756" y="438666"/>
+                  </a:lnTo>
+                  <a:lnTo>
+                    <a:pt x="354101" y="521238"/>
+                  </a:lnTo>
+                  <a:lnTo>
+                    <a:pt x="424445" y="595479"/>
+                  </a:lnTo>
+                  <a:lnTo>
+                    <a:pt x="494790" y="662232"/>
+                  </a:lnTo>
+                  <a:lnTo>
+                    <a:pt x="565134" y="722250"/>
+                  </a:lnTo>
+                  <a:lnTo>
+                    <a:pt x="635479" y="776215"/>
+                  </a:lnTo>
+                  <a:lnTo>
+                    <a:pt x="705823" y="824735"/>
+                  </a:lnTo>
+                  <a:lnTo>
+                    <a:pt x="776168" y="868361"/>
+                  </a:lnTo>
+                  <a:lnTo>
+                    <a:pt x="846512" y="907586"/>
+                  </a:lnTo>
+                  <a:lnTo>
+                    <a:pt x="916857" y="942854"/>
+                  </a:lnTo>
+                  <a:lnTo>
+                    <a:pt x="987201" y="964598"/>
+                  </a:lnTo>
+                  <a:lnTo>
+                    <a:pt x="1057546" y="976670"/>
+                  </a:lnTo>
+                  <a:lnTo>
+                    <a:pt x="1127890" y="988244"/>
+                  </a:lnTo>
+                  <a:lnTo>
+                    <a:pt x="1198235" y="999340"/>
+                  </a:lnTo>
+                  <a:lnTo>
+                    <a:pt x="1268579" y="1009979"/>
+                  </a:lnTo>
+                  <a:lnTo>
+                    <a:pt x="1338924" y="1020178"/>
+                  </a:lnTo>
+                  <a:lnTo>
+                    <a:pt x="1409268" y="1029957"/>
+                  </a:lnTo>
+                  <a:lnTo>
+                    <a:pt x="1479613" y="1039332"/>
+                  </a:lnTo>
+                  <a:lnTo>
+                    <a:pt x="1549957" y="1048321"/>
+                  </a:lnTo>
+                  <a:lnTo>
+                    <a:pt x="1620302" y="1056939"/>
+                  </a:lnTo>
+                  <a:lnTo>
+                    <a:pt x="1690646" y="1065201"/>
+                  </a:lnTo>
+                  <a:lnTo>
+                    <a:pt x="1760990" y="1073122"/>
+                  </a:lnTo>
+                  <a:lnTo>
+                    <a:pt x="1831335" y="1080717"/>
+                  </a:lnTo>
+                  <a:lnTo>
+                    <a:pt x="1901679" y="1087998"/>
+                  </a:lnTo>
+                  <a:lnTo>
+                    <a:pt x="1972024" y="1094979"/>
+                  </a:lnTo>
+                  <a:lnTo>
+                    <a:pt x="2042368" y="1101672"/>
+                  </a:lnTo>
+                  <a:lnTo>
+                    <a:pt x="2112713" y="1108088"/>
+                  </a:lnTo>
+                  <a:lnTo>
+                    <a:pt x="2183057" y="1114240"/>
+                  </a:lnTo>
+                  <a:lnTo>
+                    <a:pt x="2253402" y="1120138"/>
+                  </a:lnTo>
+                  <a:lnTo>
+                    <a:pt x="2323746" y="1125793"/>
+                  </a:lnTo>
+                  <a:lnTo>
+                    <a:pt x="2394091" y="1131215"/>
+                  </a:lnTo>
+                  <a:lnTo>
+                    <a:pt x="2464435" y="1136412"/>
+                  </a:lnTo>
+                  <a:lnTo>
+                    <a:pt x="2534780" y="1141396"/>
+                  </a:lnTo>
+                  <a:lnTo>
+                    <a:pt x="2605124" y="1146174"/>
+                  </a:lnTo>
+                  <a:lnTo>
+                    <a:pt x="2675469" y="1150754"/>
+                  </a:lnTo>
+                  <a:lnTo>
+                    <a:pt x="2745813" y="1155146"/>
+                  </a:lnTo>
+                  <a:lnTo>
+                    <a:pt x="2816158" y="1159356"/>
+                  </a:lnTo>
+                  <a:lnTo>
+                    <a:pt x="2886502" y="1163393"/>
+                  </a:lnTo>
+                  <a:lnTo>
+                    <a:pt x="2956847" y="1167263"/>
+                  </a:lnTo>
+                  <a:lnTo>
+                    <a:pt x="3027191" y="1170974"/>
+                  </a:lnTo>
+                  <a:lnTo>
+                    <a:pt x="3097536" y="1174531"/>
+                  </a:lnTo>
+                  <a:lnTo>
+                    <a:pt x="3167880" y="1177942"/>
+                  </a:lnTo>
+                  <a:lnTo>
+                    <a:pt x="3238225" y="1181212"/>
+                  </a:lnTo>
+                  <a:lnTo>
+                    <a:pt x="3308569" y="1184347"/>
+                  </a:lnTo>
+                  <a:lnTo>
+                    <a:pt x="3378914" y="1187353"/>
+                  </a:lnTo>
+                  <a:lnTo>
+                    <a:pt x="3449258" y="1190235"/>
+                  </a:lnTo>
+                  <a:lnTo>
+                    <a:pt x="3519603" y="1192997"/>
+                  </a:lnTo>
+                  <a:lnTo>
+                    <a:pt x="3589947" y="1195646"/>
+                  </a:lnTo>
+                  <a:lnTo>
+                    <a:pt x="3660292" y="1198186"/>
+                  </a:lnTo>
+                  <a:lnTo>
+                    <a:pt x="3730636" y="1200621"/>
+                  </a:lnTo>
+                  <a:lnTo>
+                    <a:pt x="3800981" y="1202955"/>
+                  </a:lnTo>
+                  <a:lnTo>
+                    <a:pt x="3871325" y="1205193"/>
+                  </a:lnTo>
+                  <a:lnTo>
+                    <a:pt x="3941670" y="1207339"/>
+                  </a:lnTo>
+                  <a:lnTo>
+                    <a:pt x="4012014" y="1209396"/>
+                  </a:lnTo>
+                  <a:lnTo>
+                    <a:pt x="4082359" y="1211368"/>
+                  </a:lnTo>
+                  <a:lnTo>
+                    <a:pt x="4152703" y="1213259"/>
+                  </a:lnTo>
+                  <a:lnTo>
+                    <a:pt x="4223048" y="1215072"/>
+                  </a:lnTo>
+                  <a:lnTo>
+                    <a:pt x="4293392" y="1216810"/>
+                  </a:lnTo>
+                  <a:lnTo>
+                    <a:pt x="4363737" y="1218477"/>
+                  </a:lnTo>
+                  <a:lnTo>
+                    <a:pt x="4434081" y="1220074"/>
+                  </a:lnTo>
+                  <a:lnTo>
+                    <a:pt x="4504426" y="1221606"/>
+                  </a:lnTo>
+                  <a:lnTo>
+                    <a:pt x="4574770" y="1223075"/>
+                  </a:lnTo>
+                  <a:lnTo>
+                    <a:pt x="4645115" y="1224483"/>
+                  </a:lnTo>
+                  <a:lnTo>
+                    <a:pt x="4715459" y="1225833"/>
+                  </a:lnTo>
+                  <a:lnTo>
+                    <a:pt x="4785804" y="1227127"/>
+                  </a:lnTo>
+                  <a:lnTo>
+                    <a:pt x="4856148" y="1228368"/>
                   </a:lnTo>
                 </a:path>
               </a:pathLst>
@@ -3794,288 +3829,288 @@
         </p:sp>
         <p:sp>
           <p:nvSpPr>
-            <p:cNvPr id="24" name="pl24"/>
-            <p:cNvSpPr/>
-            <p:nvPr/>
-          </p:nvSpPr>
-          <p:spPr>
-            <a:xfrm>
-              <a:off x="1845557" y="2073503"/>
-              <a:ext cx="6417121" cy="3481487"/>
+            <p:cNvPr id="25" name="pl25"/>
+            <p:cNvSpPr/>
+            <p:nvPr/>
+          </p:nvSpPr>
+          <p:spPr>
+            <a:xfrm>
+              <a:off x="1896802" y="2143092"/>
+              <a:ext cx="6302614" cy="1256387"/>
             </a:xfrm>
             <a:custGeom>
               <a:avLst/>
               <a:pathLst>
-                <a:path w="6417121" h="3481487">
+                <a:path w="6302614" h="1256387">
                   <a:moveTo>
-                    <a:pt x="6417121" y="3481487"/>
+                    <a:pt x="6302614" y="1256387"/>
                   </a:moveTo>
                   <a:lnTo>
-                    <a:pt x="6345499" y="3481234"/>
-                  </a:lnTo>
-                  <a:lnTo>
-                    <a:pt x="6273876" y="3480952"/>
-                  </a:lnTo>
-                  <a:lnTo>
-                    <a:pt x="6202253" y="3480638"/>
-                  </a:lnTo>
-                  <a:lnTo>
-                    <a:pt x="6130631" y="3480290"/>
-                  </a:lnTo>
-                  <a:lnTo>
-                    <a:pt x="6059008" y="3479902"/>
-                  </a:lnTo>
-                  <a:lnTo>
-                    <a:pt x="5987386" y="3479471"/>
-                  </a:lnTo>
-                  <a:lnTo>
-                    <a:pt x="5915763" y="3478991"/>
-                  </a:lnTo>
-                  <a:lnTo>
-                    <a:pt x="5844141" y="3478457"/>
-                  </a:lnTo>
-                  <a:lnTo>
-                    <a:pt x="5772518" y="3477864"/>
-                  </a:lnTo>
-                  <a:lnTo>
-                    <a:pt x="5700896" y="3477204"/>
-                  </a:lnTo>
-                  <a:lnTo>
-                    <a:pt x="5629273" y="3476470"/>
-                  </a:lnTo>
-                  <a:lnTo>
-                    <a:pt x="5557651" y="3475654"/>
-                  </a:lnTo>
-                  <a:lnTo>
-                    <a:pt x="5486028" y="3474746"/>
-                  </a:lnTo>
-                  <a:lnTo>
-                    <a:pt x="5414406" y="3473736"/>
-                  </a:lnTo>
-                  <a:lnTo>
-                    <a:pt x="5342783" y="3472613"/>
-                  </a:lnTo>
-                  <a:lnTo>
-                    <a:pt x="5271161" y="3471364"/>
-                  </a:lnTo>
-                  <a:lnTo>
-                    <a:pt x="5199538" y="3469974"/>
-                  </a:lnTo>
-                  <a:lnTo>
-                    <a:pt x="5127916" y="3468429"/>
-                  </a:lnTo>
-                  <a:lnTo>
-                    <a:pt x="5056293" y="3466711"/>
-                  </a:lnTo>
-                  <a:lnTo>
-                    <a:pt x="4984671" y="3464799"/>
-                  </a:lnTo>
-                  <a:lnTo>
-                    <a:pt x="4913048" y="3462674"/>
-                  </a:lnTo>
-                  <a:lnTo>
-                    <a:pt x="4841425" y="3460309"/>
-                  </a:lnTo>
-                  <a:lnTo>
-                    <a:pt x="4769803" y="3457680"/>
-                  </a:lnTo>
-                  <a:lnTo>
-                    <a:pt x="4698180" y="3454755"/>
-                  </a:lnTo>
-                  <a:lnTo>
-                    <a:pt x="4626558" y="3451503"/>
-                  </a:lnTo>
-                  <a:lnTo>
-                    <a:pt x="4554935" y="3447885"/>
-                  </a:lnTo>
-                  <a:lnTo>
-                    <a:pt x="4483313" y="3443861"/>
-                  </a:lnTo>
-                  <a:lnTo>
-                    <a:pt x="4411690" y="3439387"/>
-                  </a:lnTo>
-                  <a:lnTo>
-                    <a:pt x="4340068" y="3434410"/>
-                  </a:lnTo>
-                  <a:lnTo>
-                    <a:pt x="4268445" y="3428874"/>
-                  </a:lnTo>
-                  <a:lnTo>
-                    <a:pt x="4196823" y="3422718"/>
-                  </a:lnTo>
-                  <a:lnTo>
-                    <a:pt x="4125200" y="3415871"/>
-                  </a:lnTo>
-                  <a:lnTo>
-                    <a:pt x="4053578" y="3408256"/>
-                  </a:lnTo>
-                  <a:lnTo>
-                    <a:pt x="3981955" y="3399786"/>
-                  </a:lnTo>
-                  <a:lnTo>
-                    <a:pt x="3910333" y="3390366"/>
-                  </a:lnTo>
-                  <a:lnTo>
-                    <a:pt x="3838710" y="3379889"/>
-                  </a:lnTo>
-                  <a:lnTo>
-                    <a:pt x="3767088" y="3368237"/>
-                  </a:lnTo>
-                  <a:lnTo>
-                    <a:pt x="3695465" y="3355278"/>
-                  </a:lnTo>
-                  <a:lnTo>
-                    <a:pt x="3623843" y="3340864"/>
-                  </a:lnTo>
-                  <a:lnTo>
-                    <a:pt x="3552220" y="3324834"/>
-                  </a:lnTo>
-                  <a:lnTo>
-                    <a:pt x="3480597" y="3307004"/>
-                  </a:lnTo>
-                  <a:lnTo>
-                    <a:pt x="3408975" y="3287175"/>
-                  </a:lnTo>
-                  <a:lnTo>
-                    <a:pt x="3337352" y="3265121"/>
-                  </a:lnTo>
-                  <a:lnTo>
-                    <a:pt x="3265730" y="3240592"/>
-                  </a:lnTo>
-                  <a:lnTo>
-                    <a:pt x="3194107" y="3213311"/>
-                  </a:lnTo>
-                  <a:lnTo>
-                    <a:pt x="3122485" y="3182970"/>
-                  </a:lnTo>
-                  <a:lnTo>
-                    <a:pt x="3050862" y="3149224"/>
-                  </a:lnTo>
-                  <a:lnTo>
-                    <a:pt x="2979240" y="3111693"/>
-                  </a:lnTo>
-                  <a:lnTo>
-                    <a:pt x="2907617" y="3069951"/>
-                  </a:lnTo>
-                  <a:lnTo>
-                    <a:pt x="2835995" y="3023525"/>
-                  </a:lnTo>
-                  <a:lnTo>
-                    <a:pt x="2764372" y="2971890"/>
-                  </a:lnTo>
-                  <a:lnTo>
-                    <a:pt x="2692750" y="2914463"/>
-                  </a:lnTo>
-                  <a:lnTo>
-                    <a:pt x="2621127" y="2850592"/>
-                  </a:lnTo>
-                  <a:lnTo>
-                    <a:pt x="2549505" y="2779556"/>
-                  </a:lnTo>
-                  <a:lnTo>
-                    <a:pt x="2477882" y="2700550"/>
-                  </a:lnTo>
-                  <a:lnTo>
-                    <a:pt x="2406260" y="2638042"/>
-                  </a:lnTo>
-                  <a:lnTo>
-                    <a:pt x="2334637" y="2601649"/>
-                  </a:lnTo>
-                  <a:lnTo>
-                    <a:pt x="2263015" y="2563691"/>
-                  </a:lnTo>
-                  <a:lnTo>
-                    <a:pt x="2191392" y="2524099"/>
-                  </a:lnTo>
-                  <a:lnTo>
-                    <a:pt x="2119769" y="2482804"/>
-                  </a:lnTo>
-                  <a:lnTo>
-                    <a:pt x="2048147" y="2439731"/>
-                  </a:lnTo>
-                  <a:lnTo>
-                    <a:pt x="1976524" y="2394805"/>
-                  </a:lnTo>
-                  <a:lnTo>
-                    <a:pt x="1904902" y="2347945"/>
-                  </a:lnTo>
-                  <a:lnTo>
-                    <a:pt x="1833279" y="2299070"/>
-                  </a:lnTo>
-                  <a:lnTo>
-                    <a:pt x="1761657" y="2248091"/>
-                  </a:lnTo>
-                  <a:lnTo>
-                    <a:pt x="1690034" y="2194918"/>
-                  </a:lnTo>
-                  <a:lnTo>
-                    <a:pt x="1618412" y="2139457"/>
-                  </a:lnTo>
-                  <a:lnTo>
-                    <a:pt x="1546789" y="2081609"/>
-                  </a:lnTo>
-                  <a:lnTo>
-                    <a:pt x="1475167" y="2021273"/>
-                  </a:lnTo>
-                  <a:lnTo>
-                    <a:pt x="1403544" y="1958339"/>
-                  </a:lnTo>
-                  <a:lnTo>
-                    <a:pt x="1331922" y="1892698"/>
-                  </a:lnTo>
-                  <a:lnTo>
-                    <a:pt x="1260299" y="1824232"/>
-                  </a:lnTo>
-                  <a:lnTo>
-                    <a:pt x="1188677" y="1752820"/>
-                  </a:lnTo>
-                  <a:lnTo>
-                    <a:pt x="1117054" y="1678334"/>
-                  </a:lnTo>
-                  <a:lnTo>
-                    <a:pt x="1045432" y="1600644"/>
-                  </a:lnTo>
-                  <a:lnTo>
-                    <a:pt x="973809" y="1519610"/>
-                  </a:lnTo>
-                  <a:lnTo>
-                    <a:pt x="902187" y="1435089"/>
-                  </a:lnTo>
-                  <a:lnTo>
-                    <a:pt x="830564" y="1346931"/>
-                  </a:lnTo>
-                  <a:lnTo>
-                    <a:pt x="758941" y="1254980"/>
-                  </a:lnTo>
-                  <a:lnTo>
-                    <a:pt x="687319" y="1159071"/>
-                  </a:lnTo>
-                  <a:lnTo>
-                    <a:pt x="615696" y="1059036"/>
-                  </a:lnTo>
-                  <a:lnTo>
-                    <a:pt x="544074" y="954696"/>
-                  </a:lnTo>
-                  <a:lnTo>
-                    <a:pt x="472451" y="845865"/>
-                  </a:lnTo>
-                  <a:lnTo>
-                    <a:pt x="400829" y="732352"/>
-                  </a:lnTo>
-                  <a:lnTo>
-                    <a:pt x="329206" y="613954"/>
-                  </a:lnTo>
-                  <a:lnTo>
-                    <a:pt x="257584" y="490461"/>
-                  </a:lnTo>
-                  <a:lnTo>
-                    <a:pt x="185961" y="361654"/>
-                  </a:lnTo>
-                  <a:lnTo>
-                    <a:pt x="114339" y="227304"/>
-                  </a:lnTo>
-                  <a:lnTo>
-                    <a:pt x="42716" y="87172"/>
+                    <a:pt x="6232269" y="1256295"/>
+                  </a:lnTo>
+                  <a:lnTo>
+                    <a:pt x="6161925" y="1256193"/>
+                  </a:lnTo>
+                  <a:lnTo>
+                    <a:pt x="6091580" y="1256080"/>
+                  </a:lnTo>
+                  <a:lnTo>
+                    <a:pt x="6021236" y="1255954"/>
+                  </a:lnTo>
+                  <a:lnTo>
+                    <a:pt x="5950891" y="1255814"/>
+                  </a:lnTo>
+                  <a:lnTo>
+                    <a:pt x="5880547" y="1255659"/>
+                  </a:lnTo>
+                  <a:lnTo>
+                    <a:pt x="5810202" y="1255486"/>
+                  </a:lnTo>
+                  <a:lnTo>
+                    <a:pt x="5739858" y="1255293"/>
+                  </a:lnTo>
+                  <a:lnTo>
+                    <a:pt x="5669513" y="1255079"/>
+                  </a:lnTo>
+                  <a:lnTo>
+                    <a:pt x="5599169" y="1254841"/>
+                  </a:lnTo>
+                  <a:lnTo>
+                    <a:pt x="5528824" y="1254576"/>
+                  </a:lnTo>
+                  <a:lnTo>
+                    <a:pt x="5458480" y="1254281"/>
+                  </a:lnTo>
+                  <a:lnTo>
+                    <a:pt x="5388135" y="1253954"/>
+                  </a:lnTo>
+                  <a:lnTo>
+                    <a:pt x="5317791" y="1253589"/>
+                  </a:lnTo>
+                  <a:lnTo>
+                    <a:pt x="5247446" y="1253184"/>
+                  </a:lnTo>
+                  <a:lnTo>
+                    <a:pt x="5177102" y="1252733"/>
+                  </a:lnTo>
+                  <a:lnTo>
+                    <a:pt x="5106757" y="1252232"/>
+                  </a:lnTo>
+                  <a:lnTo>
+                    <a:pt x="5036413" y="1251674"/>
+                  </a:lnTo>
+                  <a:lnTo>
+                    <a:pt x="4966068" y="1251054"/>
+                  </a:lnTo>
+                  <a:lnTo>
+                    <a:pt x="4895724" y="1250364"/>
+                  </a:lnTo>
+                  <a:lnTo>
+                    <a:pt x="4825379" y="1249597"/>
+                  </a:lnTo>
+                  <a:lnTo>
+                    <a:pt x="4755035" y="1248744"/>
+                  </a:lnTo>
+                  <a:lnTo>
+                    <a:pt x="4684690" y="1247795"/>
+                  </a:lnTo>
+                  <a:lnTo>
+                    <a:pt x="4614346" y="1246740"/>
+                  </a:lnTo>
+                  <a:lnTo>
+                    <a:pt x="4544001" y="1245566"/>
+                  </a:lnTo>
+                  <a:lnTo>
+                    <a:pt x="4473657" y="1244260"/>
+                  </a:lnTo>
+                  <a:lnTo>
+                    <a:pt x="4403312" y="1242808"/>
+                  </a:lnTo>
+                  <a:lnTo>
+                    <a:pt x="4332968" y="1241193"/>
+                  </a:lnTo>
+                  <a:lnTo>
+                    <a:pt x="4262623" y="1239397"/>
+                  </a:lnTo>
+                  <a:lnTo>
+                    <a:pt x="4192279" y="1237400"/>
+                  </a:lnTo>
+                  <a:lnTo>
+                    <a:pt x="4121934" y="1235178"/>
+                  </a:lnTo>
+                  <a:lnTo>
+                    <a:pt x="4051590" y="1232707"/>
+                  </a:lnTo>
+                  <a:lnTo>
+                    <a:pt x="3981245" y="1229959"/>
+                  </a:lnTo>
+                  <a:lnTo>
+                    <a:pt x="3910901" y="1226902"/>
+                  </a:lnTo>
+                  <a:lnTo>
+                    <a:pt x="3840556" y="1223503"/>
+                  </a:lnTo>
+                  <a:lnTo>
+                    <a:pt x="3770212" y="1219722"/>
+                  </a:lnTo>
+                  <a:lnTo>
+                    <a:pt x="3699867" y="1215517"/>
+                  </a:lnTo>
+                  <a:lnTo>
+                    <a:pt x="3629523" y="1210840"/>
+                  </a:lnTo>
+                  <a:lnTo>
+                    <a:pt x="3559178" y="1205639"/>
+                  </a:lnTo>
+                  <a:lnTo>
+                    <a:pt x="3488834" y="1199854"/>
+                  </a:lnTo>
+                  <a:lnTo>
+                    <a:pt x="3418490" y="1193420"/>
+                  </a:lnTo>
+                  <a:lnTo>
+                    <a:pt x="3348145" y="1186264"/>
+                  </a:lnTo>
+                  <a:lnTo>
+                    <a:pt x="3277801" y="1178305"/>
+                  </a:lnTo>
+                  <a:lnTo>
+                    <a:pt x="3207456" y="1169453"/>
+                  </a:lnTo>
+                  <a:lnTo>
+                    <a:pt x="3137112" y="1159608"/>
+                  </a:lnTo>
+                  <a:lnTo>
+                    <a:pt x="3066767" y="1148659"/>
+                  </a:lnTo>
+                  <a:lnTo>
+                    <a:pt x="2996423" y="1136481"/>
+                  </a:lnTo>
+                  <a:lnTo>
+                    <a:pt x="2926078" y="1122936"/>
+                  </a:lnTo>
+                  <a:lnTo>
+                    <a:pt x="2855734" y="1107873"/>
+                  </a:lnTo>
+                  <a:lnTo>
+                    <a:pt x="2785389" y="1091119"/>
+                  </a:lnTo>
+                  <a:lnTo>
+                    <a:pt x="2715045" y="1072485"/>
+                  </a:lnTo>
+                  <a:lnTo>
+                    <a:pt x="2644700" y="1051761"/>
+                  </a:lnTo>
+                  <a:lnTo>
+                    <a:pt x="2574356" y="1028711"/>
+                  </a:lnTo>
+                  <a:lnTo>
+                    <a:pt x="2504011" y="1003076"/>
+                  </a:lnTo>
+                  <a:lnTo>
+                    <a:pt x="2433667" y="974564"/>
+                  </a:lnTo>
+                  <a:lnTo>
+                    <a:pt x="2363322" y="952007"/>
+                  </a:lnTo>
+                  <a:lnTo>
+                    <a:pt x="2292978" y="938874"/>
+                  </a:lnTo>
+                  <a:lnTo>
+                    <a:pt x="2222633" y="925175"/>
+                  </a:lnTo>
+                  <a:lnTo>
+                    <a:pt x="2152289" y="910888"/>
+                  </a:lnTo>
+                  <a:lnTo>
+                    <a:pt x="2081944" y="895985"/>
+                  </a:lnTo>
+                  <a:lnTo>
+                    <a:pt x="2011600" y="880441"/>
+                  </a:lnTo>
+                  <a:lnTo>
+                    <a:pt x="1941255" y="864228"/>
+                  </a:lnTo>
+                  <a:lnTo>
+                    <a:pt x="1870911" y="847318"/>
+                  </a:lnTo>
+                  <a:lnTo>
+                    <a:pt x="1800566" y="829680"/>
+                  </a:lnTo>
+                  <a:lnTo>
+                    <a:pt x="1730222" y="811283"/>
+                  </a:lnTo>
+                  <a:lnTo>
+                    <a:pt x="1659877" y="792094"/>
+                  </a:lnTo>
+                  <a:lnTo>
+                    <a:pt x="1589533" y="772079"/>
+                  </a:lnTo>
+                  <a:lnTo>
+                    <a:pt x="1519188" y="751204"/>
+                  </a:lnTo>
+                  <a:lnTo>
+                    <a:pt x="1448844" y="729429"/>
+                  </a:lnTo>
+                  <a:lnTo>
+                    <a:pt x="1378499" y="706718"/>
+                  </a:lnTo>
+                  <a:lnTo>
+                    <a:pt x="1308155" y="683030"/>
+                  </a:lnTo>
+                  <a:lnTo>
+                    <a:pt x="1237810" y="658322"/>
+                  </a:lnTo>
+                  <a:lnTo>
+                    <a:pt x="1167466" y="632551"/>
+                  </a:lnTo>
+                  <a:lnTo>
+                    <a:pt x="1097121" y="605671"/>
+                  </a:lnTo>
+                  <a:lnTo>
+                    <a:pt x="1026777" y="577634"/>
+                  </a:lnTo>
+                  <a:lnTo>
+                    <a:pt x="956432" y="548391"/>
+                  </a:lnTo>
+                  <a:lnTo>
+                    <a:pt x="886088" y="517890"/>
+                  </a:lnTo>
+                  <a:lnTo>
+                    <a:pt x="815743" y="486075"/>
+                  </a:lnTo>
+                  <a:lnTo>
+                    <a:pt x="745399" y="452892"/>
+                  </a:lnTo>
+                  <a:lnTo>
+                    <a:pt x="675054" y="418281"/>
+                  </a:lnTo>
+                  <a:lnTo>
+                    <a:pt x="604710" y="382181"/>
+                  </a:lnTo>
+                  <a:lnTo>
+                    <a:pt x="534365" y="344527"/>
+                  </a:lnTo>
+                  <a:lnTo>
+                    <a:pt x="464021" y="305253"/>
+                  </a:lnTo>
+                  <a:lnTo>
+                    <a:pt x="393676" y="264288"/>
+                  </a:lnTo>
+                  <a:lnTo>
+                    <a:pt x="323332" y="221561"/>
+                  </a:lnTo>
+                  <a:lnTo>
+                    <a:pt x="252987" y="176995"/>
+                  </a:lnTo>
+                  <a:lnTo>
+                    <a:pt x="182643" y="130512"/>
+                  </a:lnTo>
+                  <a:lnTo>
+                    <a:pt x="112298" y="82028"/>
+                  </a:lnTo>
+                  <a:lnTo>
+                    <a:pt x="41954" y="31458"/>
                   </a:lnTo>
                   <a:lnTo>
                     <a:pt x="0" y="0"/>
@@ -4092,246 +4127,246 @@
         </p:sp>
         <p:sp>
           <p:nvSpPr>
-            <p:cNvPr id="25" name="pl25"/>
-            <p:cNvSpPr/>
-            <p:nvPr/>
-          </p:nvSpPr>
-          <p:spPr>
-            <a:xfrm>
-              <a:off x="2900473" y="2073503"/>
-              <a:ext cx="5362205" cy="3470311"/>
+            <p:cNvPr id="26" name="pl26"/>
+            <p:cNvSpPr/>
+            <p:nvPr/>
+          </p:nvSpPr>
+          <p:spPr>
+            <a:xfrm>
+              <a:off x="2932894" y="2143092"/>
+              <a:ext cx="5266522" cy="1252353"/>
             </a:xfrm>
             <a:custGeom>
               <a:avLst/>
               <a:pathLst>
-                <a:path w="5362205" h="3470311">
+                <a:path w="5266522" h="1252353">
                   <a:moveTo>
                     <a:pt x="0" y="0"/>
                   </a:moveTo>
                   <a:lnTo>
-                    <a:pt x="62138" y="218310"/>
-                  </a:lnTo>
-                  <a:lnTo>
-                    <a:pt x="133761" y="451937"/>
-                  </a:lnTo>
-                  <a:lnTo>
-                    <a:pt x="205384" y="668848"/>
-                  </a:lnTo>
-                  <a:lnTo>
-                    <a:pt x="277006" y="870240"/>
-                  </a:lnTo>
-                  <a:lnTo>
-                    <a:pt x="348629" y="1057224"/>
-                  </a:lnTo>
-                  <a:lnTo>
-                    <a:pt x="420251" y="1230830"/>
-                  </a:lnTo>
-                  <a:lnTo>
-                    <a:pt x="491874" y="1392015"/>
-                  </a:lnTo>
-                  <a:lnTo>
-                    <a:pt x="563496" y="1541669"/>
-                  </a:lnTo>
-                  <a:lnTo>
-                    <a:pt x="635119" y="1680615"/>
-                  </a:lnTo>
-                  <a:lnTo>
-                    <a:pt x="706741" y="1809620"/>
-                  </a:lnTo>
-                  <a:lnTo>
-                    <a:pt x="778364" y="1929396"/>
-                  </a:lnTo>
-                  <a:lnTo>
-                    <a:pt x="849986" y="2040602"/>
-                  </a:lnTo>
-                  <a:lnTo>
-                    <a:pt x="921609" y="2143852"/>
-                  </a:lnTo>
-                  <a:lnTo>
-                    <a:pt x="993231" y="2239715"/>
-                  </a:lnTo>
-                  <a:lnTo>
-                    <a:pt x="1064854" y="2328720"/>
-                  </a:lnTo>
-                  <a:lnTo>
-                    <a:pt x="1136476" y="2411356"/>
-                  </a:lnTo>
-                  <a:lnTo>
-                    <a:pt x="1208099" y="2488080"/>
-                  </a:lnTo>
-                  <a:lnTo>
-                    <a:pt x="1279721" y="2559316"/>
-                  </a:lnTo>
-                  <a:lnTo>
-                    <a:pt x="1351344" y="2625454"/>
-                  </a:lnTo>
-                  <a:lnTo>
-                    <a:pt x="1422966" y="2686861"/>
-                  </a:lnTo>
-                  <a:lnTo>
-                    <a:pt x="1494589" y="2743874"/>
-                  </a:lnTo>
-                  <a:lnTo>
-                    <a:pt x="1566212" y="2796808"/>
-                  </a:lnTo>
-                  <a:lnTo>
-                    <a:pt x="1637834" y="2845956"/>
-                  </a:lnTo>
-                  <a:lnTo>
-                    <a:pt x="1709457" y="2891586"/>
-                  </a:lnTo>
-                  <a:lnTo>
-                    <a:pt x="1781079" y="2933953"/>
-                  </a:lnTo>
-                  <a:lnTo>
-                    <a:pt x="1852702" y="2973288"/>
-                  </a:lnTo>
-                  <a:lnTo>
-                    <a:pt x="1924324" y="3009809"/>
-                  </a:lnTo>
-                  <a:lnTo>
-                    <a:pt x="1995947" y="3043716"/>
-                  </a:lnTo>
-                  <a:lnTo>
-                    <a:pt x="2067569" y="3075198"/>
-                  </a:lnTo>
-                  <a:lnTo>
-                    <a:pt x="2139192" y="3104428"/>
-                  </a:lnTo>
-                  <a:lnTo>
-                    <a:pt x="2210814" y="3131567"/>
-                  </a:lnTo>
-                  <a:lnTo>
-                    <a:pt x="2282437" y="3156763"/>
-                  </a:lnTo>
-                  <a:lnTo>
-                    <a:pt x="2354059" y="3180157"/>
-                  </a:lnTo>
-                  <a:lnTo>
-                    <a:pt x="2425682" y="3201878"/>
-                  </a:lnTo>
-                  <a:lnTo>
-                    <a:pt x="2497304" y="3222044"/>
-                  </a:lnTo>
-                  <a:lnTo>
-                    <a:pt x="2568927" y="3240768"/>
-                  </a:lnTo>
-                  <a:lnTo>
-                    <a:pt x="2640549" y="3258152"/>
-                  </a:lnTo>
-                  <a:lnTo>
-                    <a:pt x="2712172" y="3274292"/>
-                  </a:lnTo>
-                  <a:lnTo>
-                    <a:pt x="2783794" y="3289277"/>
-                  </a:lnTo>
-                  <a:lnTo>
-                    <a:pt x="2855417" y="3303191"/>
-                  </a:lnTo>
-                  <a:lnTo>
-                    <a:pt x="2927040" y="3316108"/>
-                  </a:lnTo>
-                  <a:lnTo>
-                    <a:pt x="2998662" y="3328102"/>
-                  </a:lnTo>
-                  <a:lnTo>
-                    <a:pt x="3070285" y="3339238"/>
-                  </a:lnTo>
-                  <a:lnTo>
-                    <a:pt x="3141907" y="3349577"/>
-                  </a:lnTo>
-                  <a:lnTo>
-                    <a:pt x="3213530" y="3359176"/>
-                  </a:lnTo>
-                  <a:lnTo>
-                    <a:pt x="3285152" y="3368088"/>
-                  </a:lnTo>
-                  <a:lnTo>
-                    <a:pt x="3356775" y="3376363"/>
-                  </a:lnTo>
-                  <a:lnTo>
-                    <a:pt x="3428397" y="3384046"/>
-                  </a:lnTo>
-                  <a:lnTo>
-                    <a:pt x="3500020" y="3391179"/>
-                  </a:lnTo>
-                  <a:lnTo>
-                    <a:pt x="3571642" y="3397802"/>
-                  </a:lnTo>
-                  <a:lnTo>
-                    <a:pt x="3643265" y="3403951"/>
-                  </a:lnTo>
-                  <a:lnTo>
-                    <a:pt x="3714887" y="3409660"/>
-                  </a:lnTo>
-                  <a:lnTo>
-                    <a:pt x="3786510" y="3414960"/>
-                  </a:lnTo>
-                  <a:lnTo>
-                    <a:pt x="3858132" y="3419881"/>
-                  </a:lnTo>
-                  <a:lnTo>
-                    <a:pt x="3929755" y="3424451"/>
-                  </a:lnTo>
-                  <a:lnTo>
-                    <a:pt x="4001377" y="3428693"/>
-                  </a:lnTo>
-                  <a:lnTo>
-                    <a:pt x="4073000" y="3432632"/>
-                  </a:lnTo>
-                  <a:lnTo>
-                    <a:pt x="4144622" y="3436289"/>
-                  </a:lnTo>
-                  <a:lnTo>
-                    <a:pt x="4216245" y="3439684"/>
-                  </a:lnTo>
-                  <a:lnTo>
-                    <a:pt x="4287868" y="3442837"/>
-                  </a:lnTo>
-                  <a:lnTo>
-                    <a:pt x="4359490" y="3445764"/>
-                  </a:lnTo>
-                  <a:lnTo>
-                    <a:pt x="4431113" y="3448481"/>
-                  </a:lnTo>
-                  <a:lnTo>
-                    <a:pt x="4502735" y="3451004"/>
-                  </a:lnTo>
-                  <a:lnTo>
-                    <a:pt x="4574358" y="3453347"/>
-                  </a:lnTo>
-                  <a:lnTo>
-                    <a:pt x="4645980" y="3455522"/>
-                  </a:lnTo>
-                  <a:lnTo>
-                    <a:pt x="4717603" y="3457541"/>
-                  </a:lnTo>
-                  <a:lnTo>
-                    <a:pt x="4789225" y="3459416"/>
-                  </a:lnTo>
-                  <a:lnTo>
-                    <a:pt x="4860848" y="3461157"/>
-                  </a:lnTo>
-                  <a:lnTo>
-                    <a:pt x="4932470" y="3462773"/>
-                  </a:lnTo>
-                  <a:lnTo>
-                    <a:pt x="5004093" y="3464273"/>
-                  </a:lnTo>
-                  <a:lnTo>
-                    <a:pt x="5075715" y="3465667"/>
-                  </a:lnTo>
-                  <a:lnTo>
-                    <a:pt x="5147338" y="3466960"/>
-                  </a:lnTo>
-                  <a:lnTo>
-                    <a:pt x="5218960" y="3468161"/>
-                  </a:lnTo>
-                  <a:lnTo>
-                    <a:pt x="5290583" y="3469276"/>
-                  </a:lnTo>
-                  <a:lnTo>
-                    <a:pt x="5362205" y="3470311"/>
+                    <a:pt x="61030" y="78783"/>
+                  </a:lnTo>
+                  <a:lnTo>
+                    <a:pt x="131374" y="163093"/>
+                  </a:lnTo>
+                  <a:lnTo>
+                    <a:pt x="201719" y="241371"/>
+                  </a:lnTo>
+                  <a:lnTo>
+                    <a:pt x="272063" y="314049"/>
+                  </a:lnTo>
+                  <a:lnTo>
+                    <a:pt x="342408" y="381527"/>
+                  </a:lnTo>
+                  <a:lnTo>
+                    <a:pt x="412752" y="444177"/>
+                  </a:lnTo>
+                  <a:lnTo>
+                    <a:pt x="483097" y="502345"/>
+                  </a:lnTo>
+                  <a:lnTo>
+                    <a:pt x="553441" y="556352"/>
+                  </a:lnTo>
+                  <a:lnTo>
+                    <a:pt x="623786" y="606494"/>
+                  </a:lnTo>
+                  <a:lnTo>
+                    <a:pt x="694130" y="653049"/>
+                  </a:lnTo>
+                  <a:lnTo>
+                    <a:pt x="764475" y="696273"/>
+                  </a:lnTo>
+                  <a:lnTo>
+                    <a:pt x="834819" y="736405"/>
+                  </a:lnTo>
+                  <a:lnTo>
+                    <a:pt x="905164" y="773665"/>
+                  </a:lnTo>
+                  <a:lnTo>
+                    <a:pt x="975508" y="808260"/>
+                  </a:lnTo>
+                  <a:lnTo>
+                    <a:pt x="1045853" y="840380"/>
+                  </a:lnTo>
+                  <a:lnTo>
+                    <a:pt x="1116197" y="870201"/>
+                  </a:lnTo>
+                  <a:lnTo>
+                    <a:pt x="1186542" y="897889"/>
+                  </a:lnTo>
+                  <a:lnTo>
+                    <a:pt x="1256886" y="923596"/>
+                  </a:lnTo>
+                  <a:lnTo>
+                    <a:pt x="1327231" y="947464"/>
+                  </a:lnTo>
+                  <a:lnTo>
+                    <a:pt x="1397575" y="969625"/>
+                  </a:lnTo>
+                  <a:lnTo>
+                    <a:pt x="1467919" y="990199"/>
+                  </a:lnTo>
+                  <a:lnTo>
+                    <a:pt x="1538264" y="1009302"/>
+                  </a:lnTo>
+                  <a:lnTo>
+                    <a:pt x="1608608" y="1027038"/>
+                  </a:lnTo>
+                  <a:lnTo>
+                    <a:pt x="1678953" y="1043505"/>
+                  </a:lnTo>
+                  <a:lnTo>
+                    <a:pt x="1749297" y="1058794"/>
+                  </a:lnTo>
+                  <a:lnTo>
+                    <a:pt x="1819642" y="1072989"/>
+                  </a:lnTo>
+                  <a:lnTo>
+                    <a:pt x="1889986" y="1086169"/>
+                  </a:lnTo>
+                  <a:lnTo>
+                    <a:pt x="1960331" y="1098405"/>
+                  </a:lnTo>
+                  <a:lnTo>
+                    <a:pt x="2030675" y="1109766"/>
+                  </a:lnTo>
+                  <a:lnTo>
+                    <a:pt x="2101020" y="1120315"/>
+                  </a:lnTo>
+                  <a:lnTo>
+                    <a:pt x="2171364" y="1130108"/>
+                  </a:lnTo>
+                  <a:lnTo>
+                    <a:pt x="2241709" y="1139201"/>
+                  </a:lnTo>
+                  <a:lnTo>
+                    <a:pt x="2312053" y="1147644"/>
+                  </a:lnTo>
+                  <a:lnTo>
+                    <a:pt x="2382398" y="1155482"/>
+                  </a:lnTo>
+                  <a:lnTo>
+                    <a:pt x="2452742" y="1162760"/>
+                  </a:lnTo>
+                  <a:lnTo>
+                    <a:pt x="2523087" y="1169516"/>
+                  </a:lnTo>
+                  <a:lnTo>
+                    <a:pt x="2593431" y="1175790"/>
+                  </a:lnTo>
+                  <a:lnTo>
+                    <a:pt x="2663776" y="1181615"/>
+                  </a:lnTo>
+                  <a:lnTo>
+                    <a:pt x="2734120" y="1187022"/>
+                  </a:lnTo>
+                  <a:lnTo>
+                    <a:pt x="2804465" y="1192043"/>
+                  </a:lnTo>
+                  <a:lnTo>
+                    <a:pt x="2874809" y="1196705"/>
+                  </a:lnTo>
+                  <a:lnTo>
+                    <a:pt x="2945154" y="1201033"/>
+                  </a:lnTo>
+                  <a:lnTo>
+                    <a:pt x="3015498" y="1205052"/>
+                  </a:lnTo>
+                  <a:lnTo>
+                    <a:pt x="3085843" y="1208783"/>
+                  </a:lnTo>
+                  <a:lnTo>
+                    <a:pt x="3156187" y="1212247"/>
+                  </a:lnTo>
+                  <a:lnTo>
+                    <a:pt x="3226532" y="1215463"/>
+                  </a:lnTo>
+                  <a:lnTo>
+                    <a:pt x="3296876" y="1218450"/>
+                  </a:lnTo>
+                  <a:lnTo>
+                    <a:pt x="3367221" y="1221222"/>
+                  </a:lnTo>
+                  <a:lnTo>
+                    <a:pt x="3437565" y="1223796"/>
+                  </a:lnTo>
+                  <a:lnTo>
+                    <a:pt x="3507910" y="1226186"/>
+                  </a:lnTo>
+                  <a:lnTo>
+                    <a:pt x="3578254" y="1228405"/>
+                  </a:lnTo>
+                  <a:lnTo>
+                    <a:pt x="3648599" y="1230466"/>
+                  </a:lnTo>
+                  <a:lnTo>
+                    <a:pt x="3718943" y="1232378"/>
+                  </a:lnTo>
+                  <a:lnTo>
+                    <a:pt x="3789288" y="1234154"/>
+                  </a:lnTo>
+                  <a:lnTo>
+                    <a:pt x="3859632" y="1235803"/>
+                  </a:lnTo>
+                  <a:lnTo>
+                    <a:pt x="3929977" y="1237334"/>
+                  </a:lnTo>
+                  <a:lnTo>
+                    <a:pt x="4000321" y="1238756"/>
+                  </a:lnTo>
+                  <a:lnTo>
+                    <a:pt x="4070666" y="1240075"/>
+                  </a:lnTo>
+                  <a:lnTo>
+                    <a:pt x="4141010" y="1241301"/>
+                  </a:lnTo>
+                  <a:lnTo>
+                    <a:pt x="4211355" y="1242438"/>
+                  </a:lnTo>
+                  <a:lnTo>
+                    <a:pt x="4281699" y="1243495"/>
+                  </a:lnTo>
+                  <a:lnTo>
+                    <a:pt x="4352044" y="1244475"/>
+                  </a:lnTo>
+                  <a:lnTo>
+                    <a:pt x="4422388" y="1245386"/>
+                  </a:lnTo>
+                  <a:lnTo>
+                    <a:pt x="4492733" y="1246231"/>
+                  </a:lnTo>
+                  <a:lnTo>
+                    <a:pt x="4563077" y="1247016"/>
+                  </a:lnTo>
+                  <a:lnTo>
+                    <a:pt x="4633422" y="1247745"/>
+                  </a:lnTo>
+                  <a:lnTo>
+                    <a:pt x="4703766" y="1248421"/>
+                  </a:lnTo>
+                  <a:lnTo>
+                    <a:pt x="4774111" y="1249050"/>
+                  </a:lnTo>
+                  <a:lnTo>
+                    <a:pt x="4844455" y="1249633"/>
+                  </a:lnTo>
+                  <a:lnTo>
+                    <a:pt x="4914800" y="1250174"/>
+                  </a:lnTo>
+                  <a:lnTo>
+                    <a:pt x="4985144" y="1250677"/>
+                  </a:lnTo>
+                  <a:lnTo>
+                    <a:pt x="5055489" y="1251144"/>
+                  </a:lnTo>
+                  <a:lnTo>
+                    <a:pt x="5125833" y="1251577"/>
+                  </a:lnTo>
+                  <a:lnTo>
+                    <a:pt x="5196177" y="1251980"/>
+                  </a:lnTo>
+                  <a:lnTo>
+                    <a:pt x="5266522" y="1252353"/>
                   </a:lnTo>
                 </a:path>
               </a:pathLst>
@@ -4354,27 +4389,27 @@
         </p:sp>
         <p:sp>
           <p:nvSpPr>
-            <p:cNvPr id="26" name="pl26"/>
-            <p:cNvSpPr/>
-            <p:nvPr/>
-          </p:nvSpPr>
-          <p:spPr>
-            <a:xfrm>
-              <a:off x="817517" y="4727786"/>
-              <a:ext cx="7799693" cy="0"/>
+            <p:cNvPr id="27" name="pl27"/>
+            <p:cNvSpPr/>
+            <p:nvPr/>
+          </p:nvSpPr>
+          <p:spPr>
+            <a:xfrm>
+              <a:off x="887106" y="3100960"/>
+              <a:ext cx="7660515" cy="0"/>
             </a:xfrm>
             <a:custGeom>
               <a:avLst/>
               <a:pathLst>
-                <a:path w="7799693" h="0">
+                <a:path w="7660515" h="0">
                   <a:moveTo>
                     <a:pt x="0" y="0"/>
                   </a:moveTo>
                   <a:lnTo>
-                    <a:pt x="7799693" y="0"/>
-                  </a:lnTo>
-                  <a:lnTo>
-                    <a:pt x="7799693" y="0"/>
+                    <a:pt x="7660515" y="0"/>
+                  </a:lnTo>
+                  <a:lnTo>
+                    <a:pt x="7660515" y="0"/>
                   </a:lnTo>
                 </a:path>
               </a:pathLst>
@@ -4397,21 +4432,21 @@
         </p:sp>
         <p:sp>
           <p:nvSpPr>
-            <p:cNvPr id="27" name="pl27"/>
-            <p:cNvSpPr/>
-            <p:nvPr/>
-          </p:nvSpPr>
-          <p:spPr>
-            <a:xfrm>
-              <a:off x="4284781" y="2073503"/>
-              <a:ext cx="0" cy="3649639"/>
+            <p:cNvPr id="28" name="pl28"/>
+            <p:cNvSpPr/>
+            <p:nvPr/>
+          </p:nvSpPr>
+          <p:spPr>
+            <a:xfrm>
+              <a:off x="4292500" y="2143092"/>
+              <a:ext cx="0" cy="1317069"/>
             </a:xfrm>
             <a:custGeom>
               <a:avLst/>
               <a:pathLst>
-                <a:path w="0" h="3649639">
+                <a:path w="0" h="1317069">
                   <a:moveTo>
-                    <a:pt x="0" y="3649639"/>
+                    <a:pt x="0" y="1317069"/>
                   </a:moveTo>
                   <a:lnTo>
                     <a:pt x="0" y="0"/>
@@ -4440,21 +4475,21 @@
         </p:sp>
         <p:sp>
           <p:nvSpPr>
-            <p:cNvPr id="28" name="pl28"/>
-            <p:cNvSpPr/>
-            <p:nvPr/>
-          </p:nvSpPr>
-          <p:spPr>
-            <a:xfrm>
-              <a:off x="3095906" y="2073503"/>
-              <a:ext cx="0" cy="3649639"/>
+            <p:cNvPr id="29" name="pl29"/>
+            <p:cNvSpPr/>
+            <p:nvPr/>
+          </p:nvSpPr>
+          <p:spPr>
+            <a:xfrm>
+              <a:off x="3124839" y="2143092"/>
+              <a:ext cx="0" cy="1317069"/>
             </a:xfrm>
             <a:custGeom>
               <a:avLst/>
               <a:pathLst>
-                <a:path w="0" h="3649639">
+                <a:path w="0" h="1317069">
                   <a:moveTo>
-                    <a:pt x="0" y="3649639"/>
+                    <a:pt x="0" y="1317069"/>
                   </a:moveTo>
                   <a:lnTo>
                     <a:pt x="0" y="0"/>
@@ -4483,21 +4518,21 @@
         </p:sp>
         <p:sp>
           <p:nvSpPr>
-            <p:cNvPr id="29" name="pl29"/>
-            <p:cNvSpPr/>
-            <p:nvPr/>
-          </p:nvSpPr>
-          <p:spPr>
-            <a:xfrm>
-              <a:off x="5522967" y="2073503"/>
-              <a:ext cx="0" cy="3649639"/>
+            <p:cNvPr id="30" name="pl30"/>
+            <p:cNvSpPr/>
+            <p:nvPr/>
+          </p:nvSpPr>
+          <p:spPr>
+            <a:xfrm>
+              <a:off x="5508592" y="2143092"/>
+              <a:ext cx="0" cy="1317069"/>
             </a:xfrm>
             <a:custGeom>
               <a:avLst/>
               <a:pathLst>
-                <a:path w="0" h="3649639">
+                <a:path w="0" h="1317069">
                   <a:moveTo>
-                    <a:pt x="0" y="3649639"/>
+                    <a:pt x="0" y="1317069"/>
                   </a:moveTo>
                   <a:lnTo>
                     <a:pt x="0" y="0"/>
@@ -4526,13 +4561,13 @@
         </p:sp>
         <p:sp>
           <p:nvSpPr>
-            <p:cNvPr id="30" name="tx30"/>
-            <p:cNvSpPr/>
-            <p:nvPr/>
-          </p:nvSpPr>
-          <p:spPr>
-            <a:xfrm>
-              <a:off x="692708" y="5517199"/>
+            <p:cNvPr id="31" name="tx31"/>
+            <p:cNvSpPr/>
+            <p:nvPr/>
+          </p:nvSpPr>
+          <p:spPr>
+            <a:xfrm>
+              <a:off x="762297" y="3360243"/>
               <a:ext cx="62179" cy="80101"/>
             </a:xfrm>
             <a:prstGeom prst="rect">
@@ -4572,13 +4607,13 @@
         </p:sp>
         <p:sp>
           <p:nvSpPr>
-            <p:cNvPr id="31" name="tx31"/>
-            <p:cNvSpPr/>
-            <p:nvPr/>
-          </p:nvSpPr>
-          <p:spPr>
-            <a:xfrm>
-              <a:off x="692708" y="4687735"/>
+            <p:cNvPr id="32" name="tx32"/>
+            <p:cNvSpPr/>
+            <p:nvPr/>
+          </p:nvSpPr>
+          <p:spPr>
+            <a:xfrm>
+              <a:off x="762297" y="3060909"/>
               <a:ext cx="62179" cy="80101"/>
             </a:xfrm>
             <a:prstGeom prst="rect">
@@ -4618,13 +4653,13 @@
         </p:sp>
         <p:sp>
           <p:nvSpPr>
-            <p:cNvPr id="32" name="tx32"/>
-            <p:cNvSpPr/>
-            <p:nvPr/>
-          </p:nvSpPr>
-          <p:spPr>
-            <a:xfrm>
-              <a:off x="692708" y="3858272"/>
+            <p:cNvPr id="33" name="tx33"/>
+            <p:cNvSpPr/>
+            <p:nvPr/>
+          </p:nvSpPr>
+          <p:spPr>
+            <a:xfrm>
+              <a:off x="762297" y="2761575"/>
               <a:ext cx="62179" cy="80101"/>
             </a:xfrm>
             <a:prstGeom prst="rect">
@@ -4664,13 +4699,13 @@
         </p:sp>
         <p:sp>
           <p:nvSpPr>
-            <p:cNvPr id="33" name="tx33"/>
-            <p:cNvSpPr/>
-            <p:nvPr/>
-          </p:nvSpPr>
-          <p:spPr>
-            <a:xfrm>
-              <a:off x="692708" y="3028808"/>
+            <p:cNvPr id="34" name="tx34"/>
+            <p:cNvSpPr/>
+            <p:nvPr/>
+          </p:nvSpPr>
+          <p:spPr>
+            <a:xfrm>
+              <a:off x="762297" y="2462242"/>
               <a:ext cx="62179" cy="80101"/>
             </a:xfrm>
             <a:prstGeom prst="rect">
@@ -4710,13 +4745,13 @@
         </p:sp>
         <p:sp>
           <p:nvSpPr>
-            <p:cNvPr id="34" name="tx34"/>
-            <p:cNvSpPr/>
-            <p:nvPr/>
-          </p:nvSpPr>
-          <p:spPr>
-            <a:xfrm>
-              <a:off x="692708" y="2199345"/>
+            <p:cNvPr id="35" name="tx35"/>
+            <p:cNvSpPr/>
+            <p:nvPr/>
+          </p:nvSpPr>
+          <p:spPr>
+            <a:xfrm>
+              <a:off x="762297" y="2162908"/>
               <a:ext cx="62179" cy="80101"/>
             </a:xfrm>
             <a:prstGeom prst="rect">
@@ -4756,13 +4791,13 @@
         </p:sp>
         <p:sp>
           <p:nvSpPr>
-            <p:cNvPr id="35" name="tx35"/>
-            <p:cNvSpPr/>
-            <p:nvPr/>
-          </p:nvSpPr>
-          <p:spPr>
-            <a:xfrm>
-              <a:off x="2152181" y="5785772"/>
+            <p:cNvPr id="36" name="tx36"/>
+            <p:cNvSpPr/>
+            <p:nvPr/>
+          </p:nvSpPr>
+          <p:spPr>
+            <a:xfrm>
+              <a:off x="2196512" y="3522791"/>
               <a:ext cx="161574" cy="80101"/>
             </a:xfrm>
             <a:prstGeom prst="rect">
@@ -4802,13 +4837,13 @@
         </p:sp>
         <p:sp>
           <p:nvSpPr>
-            <p:cNvPr id="36" name="tx36"/>
-            <p:cNvSpPr/>
-            <p:nvPr/>
-          </p:nvSpPr>
-          <p:spPr>
-            <a:xfrm>
-              <a:off x="3884104" y="5785772"/>
+            <p:cNvPr id="37" name="tx37"/>
+            <p:cNvSpPr/>
+            <p:nvPr/>
+          </p:nvSpPr>
+          <p:spPr>
+            <a:xfrm>
+              <a:off x="3897531" y="3522791"/>
               <a:ext cx="161574" cy="80101"/>
             </a:xfrm>
             <a:prstGeom prst="rect">
@@ -4848,13 +4883,13 @@
         </p:sp>
         <p:sp>
           <p:nvSpPr>
-            <p:cNvPr id="37" name="tx37"/>
-            <p:cNvSpPr/>
-            <p:nvPr/>
-          </p:nvSpPr>
-          <p:spPr>
-            <a:xfrm>
-              <a:off x="5665725" y="5785772"/>
+            <p:cNvPr id="38" name="tx38"/>
+            <p:cNvSpPr/>
+            <p:nvPr/>
+          </p:nvSpPr>
+          <p:spPr>
+            <a:xfrm>
+              <a:off x="5648248" y="3522791"/>
               <a:ext cx="62179" cy="80101"/>
             </a:xfrm>
             <a:prstGeom prst="rect">
@@ -4894,13 +4929,13 @@
         </p:sp>
         <p:sp>
           <p:nvSpPr>
-            <p:cNvPr id="38" name="tx38"/>
-            <p:cNvSpPr/>
-            <p:nvPr/>
-          </p:nvSpPr>
-          <p:spPr>
-            <a:xfrm>
-              <a:off x="7366559" y="5785772"/>
+            <p:cNvPr id="39" name="tx39"/>
+            <p:cNvSpPr/>
+            <p:nvPr/>
+          </p:nvSpPr>
+          <p:spPr>
+            <a:xfrm>
+              <a:off x="7318177" y="3522791"/>
               <a:ext cx="124358" cy="80101"/>
             </a:xfrm>
             <a:prstGeom prst="rect">
@@ -4940,13 +4975,13 @@
         </p:sp>
         <p:sp>
           <p:nvSpPr>
-            <p:cNvPr id="39" name="tx39"/>
-            <p:cNvSpPr/>
-            <p:nvPr/>
-          </p:nvSpPr>
-          <p:spPr>
-            <a:xfrm>
-              <a:off x="1561815" y="5925448"/>
+            <p:cNvPr id="40" name="tx40"/>
+            <p:cNvSpPr/>
+            <p:nvPr/>
+          </p:nvSpPr>
+          <p:spPr>
+            <a:xfrm>
+              <a:off x="1561815" y="3662467"/>
               <a:ext cx="6311097" cy="100218"/>
             </a:xfrm>
             <a:prstGeom prst="rect">
@@ -4986,13 +5021,13 @@
         </p:sp>
         <p:sp>
           <p:nvSpPr>
-            <p:cNvPr id="40" name="tx40"/>
+            <p:cNvPr id="41" name="tx41"/>
             <p:cNvSpPr/>
             <p:nvPr/>
           </p:nvSpPr>
           <p:spPr>
             <a:xfrm rot="-5400000">
-              <a:off x="181100" y="3848213"/>
+              <a:off x="250689" y="2751517"/>
               <a:ext cx="791596" cy="100218"/>
             </a:xfrm>
             <a:prstGeom prst="rect">
@@ -5032,13 +5067,13 @@
         </p:sp>
         <p:sp>
           <p:nvSpPr>
-            <p:cNvPr id="41" name="tx41"/>
-            <p:cNvSpPr/>
-            <p:nvPr/>
-          </p:nvSpPr>
-          <p:spPr>
-            <a:xfrm>
-              <a:off x="817517" y="1896563"/>
+            <p:cNvPr id="42" name="tx42"/>
+            <p:cNvSpPr/>
+            <p:nvPr/>
+          </p:nvSpPr>
+          <p:spPr>
+            <a:xfrm>
+              <a:off x="887106" y="1966152"/>
               <a:ext cx="6969465" cy="82021"/>
             </a:xfrm>
             <a:prstGeom prst="rect">
@@ -5078,13 +5113,3489 @@
         </p:sp>
         <p:sp>
           <p:nvSpPr>
-            <p:cNvPr id="42" name="tx42"/>
-            <p:cNvSpPr/>
-            <p:nvPr/>
-          </p:nvSpPr>
-          <p:spPr>
-            <a:xfrm>
-              <a:off x="817517" y="1669789"/>
+            <p:cNvPr id="43" name="tx43"/>
+            <p:cNvSpPr/>
+            <p:nvPr/>
+          </p:nvSpPr>
+          <p:spPr>
+            <a:xfrm>
+              <a:off x="887106" y="1739378"/>
+              <a:ext cx="3630990" cy="120152"/>
+            </a:xfrm>
+            <a:prstGeom prst="rect">
+              <a:avLst/>
+            </a:prstGeom>
+            <a:noFill/>
+          </p:spPr>
+          <p:txBody>
+            <a:bodyPr lIns="0" rIns="0" tIns="0" bIns="0" anchorCtr="1" anchor="ctr" wrap="none"/>
+            <a:lstStyle/>
+            <a:p>
+              <a:pPr algn="l" marL="0" marR="0" indent="0">
+                <a:lnSpc>
+                  <a:spcPts val="1320"/>
+                </a:lnSpc>
+                <a:spcBef>
+                  <a:spcPts val="0"/>
+                </a:spcBef>
+                <a:spcAft>
+                  <a:spcPts val="0"/>
+                </a:spcAft>
+              </a:pPr>
+              <a:r>
+                <a:rPr sz="1320">
+                  <a:solidFill>
+                    <a:srgbClr val="000000">
+                      <a:alpha val="100000"/>
+                    </a:srgbClr>
+                  </a:solidFill>
+                  <a:latin typeface="Helvetica"/>
+                  <a:cs typeface="Helvetica"/>
+                </a:rPr>
+                <a:t>90-Day Death (Cox PH) (Sensitivity, Carboplatin)</a:t>
+              </a:r>
+            </a:p>
+          </p:txBody>
+        </p:sp>
+        <p:sp>
+          <p:nvSpPr>
+            <p:cNvPr id="44" name="pl44"/>
+            <p:cNvSpPr/>
+            <p:nvPr/>
+          </p:nvSpPr>
+          <p:spPr>
+            <a:xfrm>
+              <a:off x="887106" y="5444019"/>
+              <a:ext cx="7660515" cy="0"/>
+            </a:xfrm>
+            <a:custGeom>
+              <a:avLst/>
+              <a:pathLst>
+                <a:path w="7660515" h="0">
+                  <a:moveTo>
+                    <a:pt x="0" y="0"/>
+                  </a:moveTo>
+                  <a:lnTo>
+                    <a:pt x="7660515" y="0"/>
+                  </a:lnTo>
+                  <a:lnTo>
+                    <a:pt x="7660515" y="0"/>
+                  </a:lnTo>
+                </a:path>
+              </a:pathLst>
+            </a:custGeom>
+            <a:ln w="6775" cap="flat">
+              <a:solidFill>
+                <a:srgbClr val="EBEBEB">
+                  <a:alpha val="100000"/>
+                </a:srgbClr>
+              </a:solidFill>
+              <a:prstDash val="solid"/>
+              <a:round/>
+            </a:ln>
+          </p:spPr>
+          <p:txBody>
+            <a:bodyPr/>
+            <a:lstStyle/>
+            <a:p/>
+          </p:txBody>
+        </p:sp>
+        <p:sp>
+          <p:nvSpPr>
+            <p:cNvPr id="45" name="pl45"/>
+            <p:cNvSpPr/>
+            <p:nvPr/>
+          </p:nvSpPr>
+          <p:spPr>
+            <a:xfrm>
+              <a:off x="887106" y="5144686"/>
+              <a:ext cx="7660515" cy="0"/>
+            </a:xfrm>
+            <a:custGeom>
+              <a:avLst/>
+              <a:pathLst>
+                <a:path w="7660515" h="0">
+                  <a:moveTo>
+                    <a:pt x="0" y="0"/>
+                  </a:moveTo>
+                  <a:lnTo>
+                    <a:pt x="7660515" y="0"/>
+                  </a:lnTo>
+                  <a:lnTo>
+                    <a:pt x="7660515" y="0"/>
+                  </a:lnTo>
+                </a:path>
+              </a:pathLst>
+            </a:custGeom>
+            <a:ln w="6775" cap="flat">
+              <a:solidFill>
+                <a:srgbClr val="EBEBEB">
+                  <a:alpha val="100000"/>
+                </a:srgbClr>
+              </a:solidFill>
+              <a:prstDash val="solid"/>
+              <a:round/>
+            </a:ln>
+          </p:spPr>
+          <p:txBody>
+            <a:bodyPr/>
+            <a:lstStyle/>
+            <a:p/>
+          </p:txBody>
+        </p:sp>
+        <p:sp>
+          <p:nvSpPr>
+            <p:cNvPr id="46" name="pl46"/>
+            <p:cNvSpPr/>
+            <p:nvPr/>
+          </p:nvSpPr>
+          <p:spPr>
+            <a:xfrm>
+              <a:off x="887106" y="4845352"/>
+              <a:ext cx="7660515" cy="0"/>
+            </a:xfrm>
+            <a:custGeom>
+              <a:avLst/>
+              <a:pathLst>
+                <a:path w="7660515" h="0">
+                  <a:moveTo>
+                    <a:pt x="0" y="0"/>
+                  </a:moveTo>
+                  <a:lnTo>
+                    <a:pt x="7660515" y="0"/>
+                  </a:lnTo>
+                  <a:lnTo>
+                    <a:pt x="7660515" y="0"/>
+                  </a:lnTo>
+                </a:path>
+              </a:pathLst>
+            </a:custGeom>
+            <a:ln w="6775" cap="flat">
+              <a:solidFill>
+                <a:srgbClr val="EBEBEB">
+                  <a:alpha val="100000"/>
+                </a:srgbClr>
+              </a:solidFill>
+              <a:prstDash val="solid"/>
+              <a:round/>
+            </a:ln>
+          </p:spPr>
+          <p:txBody>
+            <a:bodyPr/>
+            <a:lstStyle/>
+            <a:p/>
+          </p:txBody>
+        </p:sp>
+        <p:sp>
+          <p:nvSpPr>
+            <p:cNvPr id="47" name="pl47"/>
+            <p:cNvSpPr/>
+            <p:nvPr/>
+          </p:nvSpPr>
+          <p:spPr>
+            <a:xfrm>
+              <a:off x="887106" y="4546018"/>
+              <a:ext cx="7660515" cy="0"/>
+            </a:xfrm>
+            <a:custGeom>
+              <a:avLst/>
+              <a:pathLst>
+                <a:path w="7660515" h="0">
+                  <a:moveTo>
+                    <a:pt x="0" y="0"/>
+                  </a:moveTo>
+                  <a:lnTo>
+                    <a:pt x="7660515" y="0"/>
+                  </a:lnTo>
+                  <a:lnTo>
+                    <a:pt x="7660515" y="0"/>
+                  </a:lnTo>
+                </a:path>
+              </a:pathLst>
+            </a:custGeom>
+            <a:ln w="6775" cap="flat">
+              <a:solidFill>
+                <a:srgbClr val="EBEBEB">
+                  <a:alpha val="100000"/>
+                </a:srgbClr>
+              </a:solidFill>
+              <a:prstDash val="solid"/>
+              <a:round/>
+            </a:ln>
+          </p:spPr>
+          <p:txBody>
+            <a:bodyPr/>
+            <a:lstStyle/>
+            <a:p/>
+          </p:txBody>
+        </p:sp>
+        <p:sp>
+          <p:nvSpPr>
+            <p:cNvPr id="48" name="pl48"/>
+            <p:cNvSpPr/>
+            <p:nvPr/>
+          </p:nvSpPr>
+          <p:spPr>
+            <a:xfrm>
+              <a:off x="1001535" y="4336484"/>
+              <a:ext cx="0" cy="1317069"/>
+            </a:xfrm>
+            <a:custGeom>
+              <a:avLst/>
+              <a:pathLst>
+                <a:path w="0" h="1317069">
+                  <a:moveTo>
+                    <a:pt x="0" y="1317069"/>
+                  </a:moveTo>
+                  <a:lnTo>
+                    <a:pt x="0" y="0"/>
+                  </a:lnTo>
+                  <a:lnTo>
+                    <a:pt x="0" y="0"/>
+                  </a:lnTo>
+                </a:path>
+              </a:pathLst>
+            </a:custGeom>
+            <a:ln w="6775" cap="flat">
+              <a:solidFill>
+                <a:srgbClr val="EBEBEB">
+                  <a:alpha val="100000"/>
+                </a:srgbClr>
+              </a:solidFill>
+              <a:prstDash val="solid"/>
+              <a:round/>
+            </a:ln>
+          </p:spPr>
+          <p:txBody>
+            <a:bodyPr/>
+            <a:lstStyle/>
+            <a:p/>
+          </p:txBody>
+        </p:sp>
+        <p:sp>
+          <p:nvSpPr>
+            <p:cNvPr id="49" name="pl49"/>
+            <p:cNvSpPr/>
+            <p:nvPr/>
+          </p:nvSpPr>
+          <p:spPr>
+            <a:xfrm>
+              <a:off x="1852045" y="4336484"/>
+              <a:ext cx="0" cy="1317069"/>
+            </a:xfrm>
+            <a:custGeom>
+              <a:avLst/>
+              <a:pathLst>
+                <a:path w="0" h="1317069">
+                  <a:moveTo>
+                    <a:pt x="0" y="1317069"/>
+                  </a:moveTo>
+                  <a:lnTo>
+                    <a:pt x="0" y="0"/>
+                  </a:lnTo>
+                  <a:lnTo>
+                    <a:pt x="0" y="0"/>
+                  </a:lnTo>
+                </a:path>
+              </a:pathLst>
+            </a:custGeom>
+            <a:ln w="6775" cap="flat">
+              <a:solidFill>
+                <a:srgbClr val="EBEBEB">
+                  <a:alpha val="100000"/>
+                </a:srgbClr>
+              </a:solidFill>
+              <a:prstDash val="solid"/>
+              <a:round/>
+            </a:ln>
+          </p:spPr>
+          <p:txBody>
+            <a:bodyPr/>
+            <a:lstStyle/>
+            <a:p/>
+          </p:txBody>
+        </p:sp>
+        <p:sp>
+          <p:nvSpPr>
+            <p:cNvPr id="50" name="pl50"/>
+            <p:cNvSpPr/>
+            <p:nvPr/>
+          </p:nvSpPr>
+          <p:spPr>
+            <a:xfrm>
+              <a:off x="2702554" y="4336484"/>
+              <a:ext cx="0" cy="1317069"/>
+            </a:xfrm>
+            <a:custGeom>
+              <a:avLst/>
+              <a:pathLst>
+                <a:path w="0" h="1317069">
+                  <a:moveTo>
+                    <a:pt x="0" y="1317069"/>
+                  </a:moveTo>
+                  <a:lnTo>
+                    <a:pt x="0" y="0"/>
+                  </a:lnTo>
+                  <a:lnTo>
+                    <a:pt x="0" y="0"/>
+                  </a:lnTo>
+                </a:path>
+              </a:pathLst>
+            </a:custGeom>
+            <a:ln w="6775" cap="flat">
+              <a:solidFill>
+                <a:srgbClr val="EBEBEB">
+                  <a:alpha val="100000"/>
+                </a:srgbClr>
+              </a:solidFill>
+              <a:prstDash val="solid"/>
+              <a:round/>
+            </a:ln>
+          </p:spPr>
+          <p:txBody>
+            <a:bodyPr/>
+            <a:lstStyle/>
+            <a:p/>
+          </p:txBody>
+        </p:sp>
+        <p:sp>
+          <p:nvSpPr>
+            <p:cNvPr id="51" name="pl51"/>
+            <p:cNvSpPr/>
+            <p:nvPr/>
+          </p:nvSpPr>
+          <p:spPr>
+            <a:xfrm>
+              <a:off x="3553064" y="4336484"/>
+              <a:ext cx="0" cy="1317069"/>
+            </a:xfrm>
+            <a:custGeom>
+              <a:avLst/>
+              <a:pathLst>
+                <a:path w="0" h="1317069">
+                  <a:moveTo>
+                    <a:pt x="0" y="1317069"/>
+                  </a:moveTo>
+                  <a:lnTo>
+                    <a:pt x="0" y="0"/>
+                  </a:lnTo>
+                  <a:lnTo>
+                    <a:pt x="0" y="0"/>
+                  </a:lnTo>
+                </a:path>
+              </a:pathLst>
+            </a:custGeom>
+            <a:ln w="6775" cap="flat">
+              <a:solidFill>
+                <a:srgbClr val="EBEBEB">
+                  <a:alpha val="100000"/>
+                </a:srgbClr>
+              </a:solidFill>
+              <a:prstDash val="solid"/>
+              <a:round/>
+            </a:ln>
+          </p:spPr>
+          <p:txBody>
+            <a:bodyPr/>
+            <a:lstStyle/>
+            <a:p/>
+          </p:txBody>
+        </p:sp>
+        <p:sp>
+          <p:nvSpPr>
+            <p:cNvPr id="52" name="pl52"/>
+            <p:cNvSpPr/>
+            <p:nvPr/>
+          </p:nvSpPr>
+          <p:spPr>
+            <a:xfrm>
+              <a:off x="4403573" y="4336484"/>
+              <a:ext cx="0" cy="1317069"/>
+            </a:xfrm>
+            <a:custGeom>
+              <a:avLst/>
+              <a:pathLst>
+                <a:path w="0" h="1317069">
+                  <a:moveTo>
+                    <a:pt x="0" y="1317069"/>
+                  </a:moveTo>
+                  <a:lnTo>
+                    <a:pt x="0" y="0"/>
+                  </a:lnTo>
+                  <a:lnTo>
+                    <a:pt x="0" y="0"/>
+                  </a:lnTo>
+                </a:path>
+              </a:pathLst>
+            </a:custGeom>
+            <a:ln w="6775" cap="flat">
+              <a:solidFill>
+                <a:srgbClr val="EBEBEB">
+                  <a:alpha val="100000"/>
+                </a:srgbClr>
+              </a:solidFill>
+              <a:prstDash val="solid"/>
+              <a:round/>
+            </a:ln>
+          </p:spPr>
+          <p:txBody>
+            <a:bodyPr/>
+            <a:lstStyle/>
+            <a:p/>
+          </p:txBody>
+        </p:sp>
+        <p:sp>
+          <p:nvSpPr>
+            <p:cNvPr id="53" name="pl53"/>
+            <p:cNvSpPr/>
+            <p:nvPr/>
+          </p:nvSpPr>
+          <p:spPr>
+            <a:xfrm>
+              <a:off x="5254082" y="4336484"/>
+              <a:ext cx="0" cy="1317069"/>
+            </a:xfrm>
+            <a:custGeom>
+              <a:avLst/>
+              <a:pathLst>
+                <a:path w="0" h="1317069">
+                  <a:moveTo>
+                    <a:pt x="0" y="1317069"/>
+                  </a:moveTo>
+                  <a:lnTo>
+                    <a:pt x="0" y="0"/>
+                  </a:lnTo>
+                  <a:lnTo>
+                    <a:pt x="0" y="0"/>
+                  </a:lnTo>
+                </a:path>
+              </a:pathLst>
+            </a:custGeom>
+            <a:ln w="6775" cap="flat">
+              <a:solidFill>
+                <a:srgbClr val="EBEBEB">
+                  <a:alpha val="100000"/>
+                </a:srgbClr>
+              </a:solidFill>
+              <a:prstDash val="solid"/>
+              <a:round/>
+            </a:ln>
+          </p:spPr>
+          <p:txBody>
+            <a:bodyPr/>
+            <a:lstStyle/>
+            <a:p/>
+          </p:txBody>
+        </p:sp>
+        <p:sp>
+          <p:nvSpPr>
+            <p:cNvPr id="54" name="pl54"/>
+            <p:cNvSpPr/>
+            <p:nvPr/>
+          </p:nvSpPr>
+          <p:spPr>
+            <a:xfrm>
+              <a:off x="6104592" y="4336484"/>
+              <a:ext cx="0" cy="1317069"/>
+            </a:xfrm>
+            <a:custGeom>
+              <a:avLst/>
+              <a:pathLst>
+                <a:path w="0" h="1317069">
+                  <a:moveTo>
+                    <a:pt x="0" y="1317069"/>
+                  </a:moveTo>
+                  <a:lnTo>
+                    <a:pt x="0" y="0"/>
+                  </a:lnTo>
+                  <a:lnTo>
+                    <a:pt x="0" y="0"/>
+                  </a:lnTo>
+                </a:path>
+              </a:pathLst>
+            </a:custGeom>
+            <a:ln w="6775" cap="flat">
+              <a:solidFill>
+                <a:srgbClr val="EBEBEB">
+                  <a:alpha val="100000"/>
+                </a:srgbClr>
+              </a:solidFill>
+              <a:prstDash val="solid"/>
+              <a:round/>
+            </a:ln>
+          </p:spPr>
+          <p:txBody>
+            <a:bodyPr/>
+            <a:lstStyle/>
+            <a:p/>
+          </p:txBody>
+        </p:sp>
+        <p:sp>
+          <p:nvSpPr>
+            <p:cNvPr id="55" name="pl55"/>
+            <p:cNvSpPr/>
+            <p:nvPr/>
+          </p:nvSpPr>
+          <p:spPr>
+            <a:xfrm>
+              <a:off x="6955101" y="4336484"/>
+              <a:ext cx="0" cy="1317069"/>
+            </a:xfrm>
+            <a:custGeom>
+              <a:avLst/>
+              <a:pathLst>
+                <a:path w="0" h="1317069">
+                  <a:moveTo>
+                    <a:pt x="0" y="1317069"/>
+                  </a:moveTo>
+                  <a:lnTo>
+                    <a:pt x="0" y="0"/>
+                  </a:lnTo>
+                  <a:lnTo>
+                    <a:pt x="0" y="0"/>
+                  </a:lnTo>
+                </a:path>
+              </a:pathLst>
+            </a:custGeom>
+            <a:ln w="6775" cap="flat">
+              <a:solidFill>
+                <a:srgbClr val="EBEBEB">
+                  <a:alpha val="100000"/>
+                </a:srgbClr>
+              </a:solidFill>
+              <a:prstDash val="solid"/>
+              <a:round/>
+            </a:ln>
+          </p:spPr>
+          <p:txBody>
+            <a:bodyPr/>
+            <a:lstStyle/>
+            <a:p/>
+          </p:txBody>
+        </p:sp>
+        <p:sp>
+          <p:nvSpPr>
+            <p:cNvPr id="56" name="pl56"/>
+            <p:cNvSpPr/>
+            <p:nvPr/>
+          </p:nvSpPr>
+          <p:spPr>
+            <a:xfrm>
+              <a:off x="7805611" y="4336484"/>
+              <a:ext cx="0" cy="1317069"/>
+            </a:xfrm>
+            <a:custGeom>
+              <a:avLst/>
+              <a:pathLst>
+                <a:path w="0" h="1317069">
+                  <a:moveTo>
+                    <a:pt x="0" y="1317069"/>
+                  </a:moveTo>
+                  <a:lnTo>
+                    <a:pt x="0" y="0"/>
+                  </a:lnTo>
+                  <a:lnTo>
+                    <a:pt x="0" y="0"/>
+                  </a:lnTo>
+                </a:path>
+              </a:pathLst>
+            </a:custGeom>
+            <a:ln w="6775" cap="flat">
+              <a:solidFill>
+                <a:srgbClr val="EBEBEB">
+                  <a:alpha val="100000"/>
+                </a:srgbClr>
+              </a:solidFill>
+              <a:prstDash val="solid"/>
+              <a:round/>
+            </a:ln>
+          </p:spPr>
+          <p:txBody>
+            <a:bodyPr/>
+            <a:lstStyle/>
+            <a:p/>
+          </p:txBody>
+        </p:sp>
+        <p:sp>
+          <p:nvSpPr>
+            <p:cNvPr id="57" name="pl57"/>
+            <p:cNvSpPr/>
+            <p:nvPr/>
+          </p:nvSpPr>
+          <p:spPr>
+            <a:xfrm>
+              <a:off x="887106" y="5593686"/>
+              <a:ext cx="7660515" cy="0"/>
+            </a:xfrm>
+            <a:custGeom>
+              <a:avLst/>
+              <a:pathLst>
+                <a:path w="7660515" h="0">
+                  <a:moveTo>
+                    <a:pt x="0" y="0"/>
+                  </a:moveTo>
+                  <a:lnTo>
+                    <a:pt x="7660515" y="0"/>
+                  </a:lnTo>
+                  <a:lnTo>
+                    <a:pt x="7660515" y="0"/>
+                  </a:lnTo>
+                </a:path>
+              </a:pathLst>
+            </a:custGeom>
+            <a:ln w="13550" cap="flat">
+              <a:solidFill>
+                <a:srgbClr val="EBEBEB">
+                  <a:alpha val="100000"/>
+                </a:srgbClr>
+              </a:solidFill>
+              <a:prstDash val="solid"/>
+              <a:round/>
+            </a:ln>
+          </p:spPr>
+          <p:txBody>
+            <a:bodyPr/>
+            <a:lstStyle/>
+            <a:p/>
+          </p:txBody>
+        </p:sp>
+        <p:sp>
+          <p:nvSpPr>
+            <p:cNvPr id="58" name="pl58"/>
+            <p:cNvSpPr/>
+            <p:nvPr/>
+          </p:nvSpPr>
+          <p:spPr>
+            <a:xfrm>
+              <a:off x="887106" y="5294352"/>
+              <a:ext cx="7660515" cy="0"/>
+            </a:xfrm>
+            <a:custGeom>
+              <a:avLst/>
+              <a:pathLst>
+                <a:path w="7660515" h="0">
+                  <a:moveTo>
+                    <a:pt x="0" y="0"/>
+                  </a:moveTo>
+                  <a:lnTo>
+                    <a:pt x="7660515" y="0"/>
+                  </a:lnTo>
+                  <a:lnTo>
+                    <a:pt x="7660515" y="0"/>
+                  </a:lnTo>
+                </a:path>
+              </a:pathLst>
+            </a:custGeom>
+            <a:ln w="13550" cap="flat">
+              <a:solidFill>
+                <a:srgbClr val="EBEBEB">
+                  <a:alpha val="100000"/>
+                </a:srgbClr>
+              </a:solidFill>
+              <a:prstDash val="solid"/>
+              <a:round/>
+            </a:ln>
+          </p:spPr>
+          <p:txBody>
+            <a:bodyPr/>
+            <a:lstStyle/>
+            <a:p/>
+          </p:txBody>
+        </p:sp>
+        <p:sp>
+          <p:nvSpPr>
+            <p:cNvPr id="59" name="pl59"/>
+            <p:cNvSpPr/>
+            <p:nvPr/>
+          </p:nvSpPr>
+          <p:spPr>
+            <a:xfrm>
+              <a:off x="887106" y="4995019"/>
+              <a:ext cx="7660515" cy="0"/>
+            </a:xfrm>
+            <a:custGeom>
+              <a:avLst/>
+              <a:pathLst>
+                <a:path w="7660515" h="0">
+                  <a:moveTo>
+                    <a:pt x="0" y="0"/>
+                  </a:moveTo>
+                  <a:lnTo>
+                    <a:pt x="7660515" y="0"/>
+                  </a:lnTo>
+                  <a:lnTo>
+                    <a:pt x="7660515" y="0"/>
+                  </a:lnTo>
+                </a:path>
+              </a:pathLst>
+            </a:custGeom>
+            <a:ln w="13550" cap="flat">
+              <a:solidFill>
+                <a:srgbClr val="EBEBEB">
+                  <a:alpha val="100000"/>
+                </a:srgbClr>
+              </a:solidFill>
+              <a:prstDash val="solid"/>
+              <a:round/>
+            </a:ln>
+          </p:spPr>
+          <p:txBody>
+            <a:bodyPr/>
+            <a:lstStyle/>
+            <a:p/>
+          </p:txBody>
+        </p:sp>
+        <p:sp>
+          <p:nvSpPr>
+            <p:cNvPr id="60" name="pl60"/>
+            <p:cNvSpPr/>
+            <p:nvPr/>
+          </p:nvSpPr>
+          <p:spPr>
+            <a:xfrm>
+              <a:off x="887106" y="4695685"/>
+              <a:ext cx="7660515" cy="0"/>
+            </a:xfrm>
+            <a:custGeom>
+              <a:avLst/>
+              <a:pathLst>
+                <a:path w="7660515" h="0">
+                  <a:moveTo>
+                    <a:pt x="0" y="0"/>
+                  </a:moveTo>
+                  <a:lnTo>
+                    <a:pt x="7660515" y="0"/>
+                  </a:lnTo>
+                  <a:lnTo>
+                    <a:pt x="7660515" y="0"/>
+                  </a:lnTo>
+                </a:path>
+              </a:pathLst>
+            </a:custGeom>
+            <a:ln w="13550" cap="flat">
+              <a:solidFill>
+                <a:srgbClr val="EBEBEB">
+                  <a:alpha val="100000"/>
+                </a:srgbClr>
+              </a:solidFill>
+              <a:prstDash val="solid"/>
+              <a:round/>
+            </a:ln>
+          </p:spPr>
+          <p:txBody>
+            <a:bodyPr/>
+            <a:lstStyle/>
+            <a:p/>
+          </p:txBody>
+        </p:sp>
+        <p:sp>
+          <p:nvSpPr>
+            <p:cNvPr id="61" name="pl61"/>
+            <p:cNvSpPr/>
+            <p:nvPr/>
+          </p:nvSpPr>
+          <p:spPr>
+            <a:xfrm>
+              <a:off x="887106" y="4396351"/>
+              <a:ext cx="7660515" cy="0"/>
+            </a:xfrm>
+            <a:custGeom>
+              <a:avLst/>
+              <a:pathLst>
+                <a:path w="7660515" h="0">
+                  <a:moveTo>
+                    <a:pt x="0" y="0"/>
+                  </a:moveTo>
+                  <a:lnTo>
+                    <a:pt x="7660515" y="0"/>
+                  </a:lnTo>
+                  <a:lnTo>
+                    <a:pt x="7660515" y="0"/>
+                  </a:lnTo>
+                </a:path>
+              </a:pathLst>
+            </a:custGeom>
+            <a:ln w="13550" cap="flat">
+              <a:solidFill>
+                <a:srgbClr val="EBEBEB">
+                  <a:alpha val="100000"/>
+                </a:srgbClr>
+              </a:solidFill>
+              <a:prstDash val="solid"/>
+              <a:round/>
+            </a:ln>
+          </p:spPr>
+          <p:txBody>
+            <a:bodyPr/>
+            <a:lstStyle/>
+            <a:p/>
+          </p:txBody>
+        </p:sp>
+        <p:sp>
+          <p:nvSpPr>
+            <p:cNvPr id="62" name="pl62"/>
+            <p:cNvSpPr/>
+            <p:nvPr/>
+          </p:nvSpPr>
+          <p:spPr>
+            <a:xfrm>
+              <a:off x="1426790" y="4336484"/>
+              <a:ext cx="0" cy="1317069"/>
+            </a:xfrm>
+            <a:custGeom>
+              <a:avLst/>
+              <a:pathLst>
+                <a:path w="0" h="1317069">
+                  <a:moveTo>
+                    <a:pt x="0" y="1317069"/>
+                  </a:moveTo>
+                  <a:lnTo>
+                    <a:pt x="0" y="0"/>
+                  </a:lnTo>
+                  <a:lnTo>
+                    <a:pt x="0" y="0"/>
+                  </a:lnTo>
+                </a:path>
+              </a:pathLst>
+            </a:custGeom>
+            <a:ln w="13550" cap="flat">
+              <a:solidFill>
+                <a:srgbClr val="EBEBEB">
+                  <a:alpha val="100000"/>
+                </a:srgbClr>
+              </a:solidFill>
+              <a:prstDash val="solid"/>
+              <a:round/>
+            </a:ln>
+          </p:spPr>
+          <p:txBody>
+            <a:bodyPr/>
+            <a:lstStyle/>
+            <a:p/>
+          </p:txBody>
+        </p:sp>
+        <p:sp>
+          <p:nvSpPr>
+            <p:cNvPr id="63" name="pl63"/>
+            <p:cNvSpPr/>
+            <p:nvPr/>
+          </p:nvSpPr>
+          <p:spPr>
+            <a:xfrm>
+              <a:off x="2277299" y="4336484"/>
+              <a:ext cx="0" cy="1317069"/>
+            </a:xfrm>
+            <a:custGeom>
+              <a:avLst/>
+              <a:pathLst>
+                <a:path w="0" h="1317069">
+                  <a:moveTo>
+                    <a:pt x="0" y="1317069"/>
+                  </a:moveTo>
+                  <a:lnTo>
+                    <a:pt x="0" y="0"/>
+                  </a:lnTo>
+                  <a:lnTo>
+                    <a:pt x="0" y="0"/>
+                  </a:lnTo>
+                </a:path>
+              </a:pathLst>
+            </a:custGeom>
+            <a:ln w="13550" cap="flat">
+              <a:solidFill>
+                <a:srgbClr val="EBEBEB">
+                  <a:alpha val="100000"/>
+                </a:srgbClr>
+              </a:solidFill>
+              <a:prstDash val="solid"/>
+              <a:round/>
+            </a:ln>
+          </p:spPr>
+          <p:txBody>
+            <a:bodyPr/>
+            <a:lstStyle/>
+            <a:p/>
+          </p:txBody>
+        </p:sp>
+        <p:sp>
+          <p:nvSpPr>
+            <p:cNvPr id="64" name="pl64"/>
+            <p:cNvSpPr/>
+            <p:nvPr/>
+          </p:nvSpPr>
+          <p:spPr>
+            <a:xfrm>
+              <a:off x="3127809" y="4336484"/>
+              <a:ext cx="0" cy="1317069"/>
+            </a:xfrm>
+            <a:custGeom>
+              <a:avLst/>
+              <a:pathLst>
+                <a:path w="0" h="1317069">
+                  <a:moveTo>
+                    <a:pt x="0" y="1317069"/>
+                  </a:moveTo>
+                  <a:lnTo>
+                    <a:pt x="0" y="0"/>
+                  </a:lnTo>
+                  <a:lnTo>
+                    <a:pt x="0" y="0"/>
+                  </a:lnTo>
+                </a:path>
+              </a:pathLst>
+            </a:custGeom>
+            <a:ln w="13550" cap="flat">
+              <a:solidFill>
+                <a:srgbClr val="EBEBEB">
+                  <a:alpha val="100000"/>
+                </a:srgbClr>
+              </a:solidFill>
+              <a:prstDash val="solid"/>
+              <a:round/>
+            </a:ln>
+          </p:spPr>
+          <p:txBody>
+            <a:bodyPr/>
+            <a:lstStyle/>
+            <a:p/>
+          </p:txBody>
+        </p:sp>
+        <p:sp>
+          <p:nvSpPr>
+            <p:cNvPr id="65" name="pl65"/>
+            <p:cNvSpPr/>
+            <p:nvPr/>
+          </p:nvSpPr>
+          <p:spPr>
+            <a:xfrm>
+              <a:off x="3978318" y="4336484"/>
+              <a:ext cx="0" cy="1317069"/>
+            </a:xfrm>
+            <a:custGeom>
+              <a:avLst/>
+              <a:pathLst>
+                <a:path w="0" h="1317069">
+                  <a:moveTo>
+                    <a:pt x="0" y="1317069"/>
+                  </a:moveTo>
+                  <a:lnTo>
+                    <a:pt x="0" y="0"/>
+                  </a:lnTo>
+                  <a:lnTo>
+                    <a:pt x="0" y="0"/>
+                  </a:lnTo>
+                </a:path>
+              </a:pathLst>
+            </a:custGeom>
+            <a:ln w="13550" cap="flat">
+              <a:solidFill>
+                <a:srgbClr val="EBEBEB">
+                  <a:alpha val="100000"/>
+                </a:srgbClr>
+              </a:solidFill>
+              <a:prstDash val="solid"/>
+              <a:round/>
+            </a:ln>
+          </p:spPr>
+          <p:txBody>
+            <a:bodyPr/>
+            <a:lstStyle/>
+            <a:p/>
+          </p:txBody>
+        </p:sp>
+        <p:sp>
+          <p:nvSpPr>
+            <p:cNvPr id="66" name="pl66"/>
+            <p:cNvSpPr/>
+            <p:nvPr/>
+          </p:nvSpPr>
+          <p:spPr>
+            <a:xfrm>
+              <a:off x="4828828" y="4336484"/>
+              <a:ext cx="0" cy="1317069"/>
+            </a:xfrm>
+            <a:custGeom>
+              <a:avLst/>
+              <a:pathLst>
+                <a:path w="0" h="1317069">
+                  <a:moveTo>
+                    <a:pt x="0" y="1317069"/>
+                  </a:moveTo>
+                  <a:lnTo>
+                    <a:pt x="0" y="0"/>
+                  </a:lnTo>
+                  <a:lnTo>
+                    <a:pt x="0" y="0"/>
+                  </a:lnTo>
+                </a:path>
+              </a:pathLst>
+            </a:custGeom>
+            <a:ln w="13550" cap="flat">
+              <a:solidFill>
+                <a:srgbClr val="EBEBEB">
+                  <a:alpha val="100000"/>
+                </a:srgbClr>
+              </a:solidFill>
+              <a:prstDash val="solid"/>
+              <a:round/>
+            </a:ln>
+          </p:spPr>
+          <p:txBody>
+            <a:bodyPr/>
+            <a:lstStyle/>
+            <a:p/>
+          </p:txBody>
+        </p:sp>
+        <p:sp>
+          <p:nvSpPr>
+            <p:cNvPr id="67" name="pl67"/>
+            <p:cNvSpPr/>
+            <p:nvPr/>
+          </p:nvSpPr>
+          <p:spPr>
+            <a:xfrm>
+              <a:off x="5679337" y="4336484"/>
+              <a:ext cx="0" cy="1317069"/>
+            </a:xfrm>
+            <a:custGeom>
+              <a:avLst/>
+              <a:pathLst>
+                <a:path w="0" h="1317069">
+                  <a:moveTo>
+                    <a:pt x="0" y="1317069"/>
+                  </a:moveTo>
+                  <a:lnTo>
+                    <a:pt x="0" y="0"/>
+                  </a:lnTo>
+                  <a:lnTo>
+                    <a:pt x="0" y="0"/>
+                  </a:lnTo>
+                </a:path>
+              </a:pathLst>
+            </a:custGeom>
+            <a:ln w="13550" cap="flat">
+              <a:solidFill>
+                <a:srgbClr val="EBEBEB">
+                  <a:alpha val="100000"/>
+                </a:srgbClr>
+              </a:solidFill>
+              <a:prstDash val="solid"/>
+              <a:round/>
+            </a:ln>
+          </p:spPr>
+          <p:txBody>
+            <a:bodyPr/>
+            <a:lstStyle/>
+            <a:p/>
+          </p:txBody>
+        </p:sp>
+        <p:sp>
+          <p:nvSpPr>
+            <p:cNvPr id="68" name="pl68"/>
+            <p:cNvSpPr/>
+            <p:nvPr/>
+          </p:nvSpPr>
+          <p:spPr>
+            <a:xfrm>
+              <a:off x="6529847" y="4336484"/>
+              <a:ext cx="0" cy="1317069"/>
+            </a:xfrm>
+            <a:custGeom>
+              <a:avLst/>
+              <a:pathLst>
+                <a:path w="0" h="1317069">
+                  <a:moveTo>
+                    <a:pt x="0" y="1317069"/>
+                  </a:moveTo>
+                  <a:lnTo>
+                    <a:pt x="0" y="0"/>
+                  </a:lnTo>
+                  <a:lnTo>
+                    <a:pt x="0" y="0"/>
+                  </a:lnTo>
+                </a:path>
+              </a:pathLst>
+            </a:custGeom>
+            <a:ln w="13550" cap="flat">
+              <a:solidFill>
+                <a:srgbClr val="EBEBEB">
+                  <a:alpha val="100000"/>
+                </a:srgbClr>
+              </a:solidFill>
+              <a:prstDash val="solid"/>
+              <a:round/>
+            </a:ln>
+          </p:spPr>
+          <p:txBody>
+            <a:bodyPr/>
+            <a:lstStyle/>
+            <a:p/>
+          </p:txBody>
+        </p:sp>
+        <p:sp>
+          <p:nvSpPr>
+            <p:cNvPr id="69" name="pl69"/>
+            <p:cNvSpPr/>
+            <p:nvPr/>
+          </p:nvSpPr>
+          <p:spPr>
+            <a:xfrm>
+              <a:off x="7380356" y="4336484"/>
+              <a:ext cx="0" cy="1317069"/>
+            </a:xfrm>
+            <a:custGeom>
+              <a:avLst/>
+              <a:pathLst>
+                <a:path w="0" h="1317069">
+                  <a:moveTo>
+                    <a:pt x="0" y="1317069"/>
+                  </a:moveTo>
+                  <a:lnTo>
+                    <a:pt x="0" y="0"/>
+                  </a:lnTo>
+                  <a:lnTo>
+                    <a:pt x="0" y="0"/>
+                  </a:lnTo>
+                </a:path>
+              </a:pathLst>
+            </a:custGeom>
+            <a:ln w="13550" cap="flat">
+              <a:solidFill>
+                <a:srgbClr val="EBEBEB">
+                  <a:alpha val="100000"/>
+                </a:srgbClr>
+              </a:solidFill>
+              <a:prstDash val="solid"/>
+              <a:round/>
+            </a:ln>
+          </p:spPr>
+          <p:txBody>
+            <a:bodyPr/>
+            <a:lstStyle/>
+            <a:p/>
+          </p:txBody>
+        </p:sp>
+        <p:sp>
+          <p:nvSpPr>
+            <p:cNvPr id="70" name="pl70"/>
+            <p:cNvSpPr/>
+            <p:nvPr/>
+          </p:nvSpPr>
+          <p:spPr>
+            <a:xfrm>
+              <a:off x="8230866" y="4336484"/>
+              <a:ext cx="0" cy="1317069"/>
+            </a:xfrm>
+            <a:custGeom>
+              <a:avLst/>
+              <a:pathLst>
+                <a:path w="0" h="1317069">
+                  <a:moveTo>
+                    <a:pt x="0" y="1317069"/>
+                  </a:moveTo>
+                  <a:lnTo>
+                    <a:pt x="0" y="0"/>
+                  </a:lnTo>
+                  <a:lnTo>
+                    <a:pt x="0" y="0"/>
+                  </a:lnTo>
+                </a:path>
+              </a:pathLst>
+            </a:custGeom>
+            <a:ln w="13550" cap="flat">
+              <a:solidFill>
+                <a:srgbClr val="EBEBEB">
+                  <a:alpha val="100000"/>
+                </a:srgbClr>
+              </a:solidFill>
+              <a:prstDash val="solid"/>
+              <a:round/>
+            </a:ln>
+          </p:spPr>
+          <p:txBody>
+            <a:bodyPr/>
+            <a:lstStyle/>
+            <a:p/>
+          </p:txBody>
+        </p:sp>
+        <p:sp>
+          <p:nvSpPr>
+            <p:cNvPr id="71" name="pg71"/>
+            <p:cNvSpPr/>
+            <p:nvPr/>
+          </p:nvSpPr>
+          <p:spPr>
+            <a:xfrm>
+              <a:off x="1896802" y="4336484"/>
+              <a:ext cx="6302614" cy="1256387"/>
+            </a:xfrm>
+            <a:custGeom>
+              <a:avLst/>
+              <a:pathLst>
+                <a:path w="6302614" h="1256387">
+                  <a:moveTo>
+                    <a:pt x="1446465" y="0"/>
+                  </a:moveTo>
+                  <a:lnTo>
+                    <a:pt x="1448844" y="4751"/>
+                  </a:lnTo>
+                  <a:lnTo>
+                    <a:pt x="1519188" y="131094"/>
+                  </a:lnTo>
+                  <a:lnTo>
+                    <a:pt x="1589533" y="244692"/>
+                  </a:lnTo>
+                  <a:lnTo>
+                    <a:pt x="1659877" y="346831"/>
+                  </a:lnTo>
+                  <a:lnTo>
+                    <a:pt x="1730222" y="438666"/>
+                  </a:lnTo>
+                  <a:lnTo>
+                    <a:pt x="1800566" y="521238"/>
+                  </a:lnTo>
+                  <a:lnTo>
+                    <a:pt x="1870911" y="595479"/>
+                  </a:lnTo>
+                  <a:lnTo>
+                    <a:pt x="1941255" y="662232"/>
+                  </a:lnTo>
+                  <a:lnTo>
+                    <a:pt x="2011600" y="722250"/>
+                  </a:lnTo>
+                  <a:lnTo>
+                    <a:pt x="2081944" y="776215"/>
+                  </a:lnTo>
+                  <a:lnTo>
+                    <a:pt x="2152289" y="824735"/>
+                  </a:lnTo>
+                  <a:lnTo>
+                    <a:pt x="2222633" y="868361"/>
+                  </a:lnTo>
+                  <a:lnTo>
+                    <a:pt x="2292978" y="907586"/>
+                  </a:lnTo>
+                  <a:lnTo>
+                    <a:pt x="2363322" y="942854"/>
+                  </a:lnTo>
+                  <a:lnTo>
+                    <a:pt x="2433667" y="964598"/>
+                  </a:lnTo>
+                  <a:lnTo>
+                    <a:pt x="2504011" y="976670"/>
+                  </a:lnTo>
+                  <a:lnTo>
+                    <a:pt x="2574356" y="988244"/>
+                  </a:lnTo>
+                  <a:lnTo>
+                    <a:pt x="2644700" y="999340"/>
+                  </a:lnTo>
+                  <a:lnTo>
+                    <a:pt x="2715045" y="1009979"/>
+                  </a:lnTo>
+                  <a:lnTo>
+                    <a:pt x="2785389" y="1020178"/>
+                  </a:lnTo>
+                  <a:lnTo>
+                    <a:pt x="2855734" y="1029957"/>
+                  </a:lnTo>
+                  <a:lnTo>
+                    <a:pt x="2926078" y="1039332"/>
+                  </a:lnTo>
+                  <a:lnTo>
+                    <a:pt x="2996423" y="1048321"/>
+                  </a:lnTo>
+                  <a:lnTo>
+                    <a:pt x="3066767" y="1056939"/>
+                  </a:lnTo>
+                  <a:lnTo>
+                    <a:pt x="3137112" y="1065201"/>
+                  </a:lnTo>
+                  <a:lnTo>
+                    <a:pt x="3207456" y="1073122"/>
+                  </a:lnTo>
+                  <a:lnTo>
+                    <a:pt x="3277801" y="1080717"/>
+                  </a:lnTo>
+                  <a:lnTo>
+                    <a:pt x="3348145" y="1087998"/>
+                  </a:lnTo>
+                  <a:lnTo>
+                    <a:pt x="3418490" y="1094979"/>
+                  </a:lnTo>
+                  <a:lnTo>
+                    <a:pt x="3488834" y="1101672"/>
+                  </a:lnTo>
+                  <a:lnTo>
+                    <a:pt x="3559178" y="1108088"/>
+                  </a:lnTo>
+                  <a:lnTo>
+                    <a:pt x="3629523" y="1114240"/>
+                  </a:lnTo>
+                  <a:lnTo>
+                    <a:pt x="3699867" y="1120138"/>
+                  </a:lnTo>
+                  <a:lnTo>
+                    <a:pt x="3770212" y="1125793"/>
+                  </a:lnTo>
+                  <a:lnTo>
+                    <a:pt x="3840556" y="1131215"/>
+                  </a:lnTo>
+                  <a:lnTo>
+                    <a:pt x="3910901" y="1136412"/>
+                  </a:lnTo>
+                  <a:lnTo>
+                    <a:pt x="3981245" y="1141396"/>
+                  </a:lnTo>
+                  <a:lnTo>
+                    <a:pt x="4051590" y="1146174"/>
+                  </a:lnTo>
+                  <a:lnTo>
+                    <a:pt x="4121934" y="1150754"/>
+                  </a:lnTo>
+                  <a:lnTo>
+                    <a:pt x="4192279" y="1155146"/>
+                  </a:lnTo>
+                  <a:lnTo>
+                    <a:pt x="4262623" y="1159356"/>
+                  </a:lnTo>
+                  <a:lnTo>
+                    <a:pt x="4332968" y="1163393"/>
+                  </a:lnTo>
+                  <a:lnTo>
+                    <a:pt x="4403312" y="1167263"/>
+                  </a:lnTo>
+                  <a:lnTo>
+                    <a:pt x="4473657" y="1170974"/>
+                  </a:lnTo>
+                  <a:lnTo>
+                    <a:pt x="4544001" y="1174531"/>
+                  </a:lnTo>
+                  <a:lnTo>
+                    <a:pt x="4614346" y="1177942"/>
+                  </a:lnTo>
+                  <a:lnTo>
+                    <a:pt x="4684690" y="1181212"/>
+                  </a:lnTo>
+                  <a:lnTo>
+                    <a:pt x="4755035" y="1184347"/>
+                  </a:lnTo>
+                  <a:lnTo>
+                    <a:pt x="4825379" y="1187353"/>
+                  </a:lnTo>
+                  <a:lnTo>
+                    <a:pt x="4895724" y="1190235"/>
+                  </a:lnTo>
+                  <a:lnTo>
+                    <a:pt x="4966068" y="1192997"/>
+                  </a:lnTo>
+                  <a:lnTo>
+                    <a:pt x="5036413" y="1195646"/>
+                  </a:lnTo>
+                  <a:lnTo>
+                    <a:pt x="5106757" y="1198186"/>
+                  </a:lnTo>
+                  <a:lnTo>
+                    <a:pt x="5177102" y="1200621"/>
+                  </a:lnTo>
+                  <a:lnTo>
+                    <a:pt x="5247446" y="1202955"/>
+                  </a:lnTo>
+                  <a:lnTo>
+                    <a:pt x="5317791" y="1205193"/>
+                  </a:lnTo>
+                  <a:lnTo>
+                    <a:pt x="5388135" y="1207339"/>
+                  </a:lnTo>
+                  <a:lnTo>
+                    <a:pt x="5458480" y="1209396"/>
+                  </a:lnTo>
+                  <a:lnTo>
+                    <a:pt x="5528824" y="1211368"/>
+                  </a:lnTo>
+                  <a:lnTo>
+                    <a:pt x="5599169" y="1213259"/>
+                  </a:lnTo>
+                  <a:lnTo>
+                    <a:pt x="5669513" y="1215072"/>
+                  </a:lnTo>
+                  <a:lnTo>
+                    <a:pt x="5739858" y="1216810"/>
+                  </a:lnTo>
+                  <a:lnTo>
+                    <a:pt x="5810202" y="1218477"/>
+                  </a:lnTo>
+                  <a:lnTo>
+                    <a:pt x="5880547" y="1220074"/>
+                  </a:lnTo>
+                  <a:lnTo>
+                    <a:pt x="5950891" y="1221606"/>
+                  </a:lnTo>
+                  <a:lnTo>
+                    <a:pt x="6021236" y="1223075"/>
+                  </a:lnTo>
+                  <a:lnTo>
+                    <a:pt x="6091580" y="1224483"/>
+                  </a:lnTo>
+                  <a:lnTo>
+                    <a:pt x="6161925" y="1225833"/>
+                  </a:lnTo>
+                  <a:lnTo>
+                    <a:pt x="6232269" y="1227127"/>
+                  </a:lnTo>
+                  <a:lnTo>
+                    <a:pt x="6302614" y="1228368"/>
+                  </a:lnTo>
+                  <a:lnTo>
+                    <a:pt x="6302614" y="1256387"/>
+                  </a:lnTo>
+                  <a:lnTo>
+                    <a:pt x="6232269" y="1256295"/>
+                  </a:lnTo>
+                  <a:lnTo>
+                    <a:pt x="6161925" y="1256193"/>
+                  </a:lnTo>
+                  <a:lnTo>
+                    <a:pt x="6091580" y="1256080"/>
+                  </a:lnTo>
+                  <a:lnTo>
+                    <a:pt x="6021236" y="1255954"/>
+                  </a:lnTo>
+                  <a:lnTo>
+                    <a:pt x="5950891" y="1255814"/>
+                  </a:lnTo>
+                  <a:lnTo>
+                    <a:pt x="5880547" y="1255659"/>
+                  </a:lnTo>
+                  <a:lnTo>
+                    <a:pt x="5810202" y="1255486"/>
+                  </a:lnTo>
+                  <a:lnTo>
+                    <a:pt x="5739858" y="1255293"/>
+                  </a:lnTo>
+                  <a:lnTo>
+                    <a:pt x="5669513" y="1255079"/>
+                  </a:lnTo>
+                  <a:lnTo>
+                    <a:pt x="5599169" y="1254841"/>
+                  </a:lnTo>
+                  <a:lnTo>
+                    <a:pt x="5528824" y="1254576"/>
+                  </a:lnTo>
+                  <a:lnTo>
+                    <a:pt x="5458480" y="1254281"/>
+                  </a:lnTo>
+                  <a:lnTo>
+                    <a:pt x="5388135" y="1253954"/>
+                  </a:lnTo>
+                  <a:lnTo>
+                    <a:pt x="5317791" y="1253589"/>
+                  </a:lnTo>
+                  <a:lnTo>
+                    <a:pt x="5247446" y="1253184"/>
+                  </a:lnTo>
+                  <a:lnTo>
+                    <a:pt x="5177102" y="1252733"/>
+                  </a:lnTo>
+                  <a:lnTo>
+                    <a:pt x="5106757" y="1252232"/>
+                  </a:lnTo>
+                  <a:lnTo>
+                    <a:pt x="5036413" y="1251674"/>
+                  </a:lnTo>
+                  <a:lnTo>
+                    <a:pt x="4966068" y="1251054"/>
+                  </a:lnTo>
+                  <a:lnTo>
+                    <a:pt x="4895724" y="1250364"/>
+                  </a:lnTo>
+                  <a:lnTo>
+                    <a:pt x="4825379" y="1249597"/>
+                  </a:lnTo>
+                  <a:lnTo>
+                    <a:pt x="4755035" y="1248744"/>
+                  </a:lnTo>
+                  <a:lnTo>
+                    <a:pt x="4684690" y="1247795"/>
+                  </a:lnTo>
+                  <a:lnTo>
+                    <a:pt x="4614346" y="1246740"/>
+                  </a:lnTo>
+                  <a:lnTo>
+                    <a:pt x="4544001" y="1245566"/>
+                  </a:lnTo>
+                  <a:lnTo>
+                    <a:pt x="4473657" y="1244260"/>
+                  </a:lnTo>
+                  <a:lnTo>
+                    <a:pt x="4403312" y="1242808"/>
+                  </a:lnTo>
+                  <a:lnTo>
+                    <a:pt x="4332968" y="1241193"/>
+                  </a:lnTo>
+                  <a:lnTo>
+                    <a:pt x="4262623" y="1239397"/>
+                  </a:lnTo>
+                  <a:lnTo>
+                    <a:pt x="4192279" y="1237400"/>
+                  </a:lnTo>
+                  <a:lnTo>
+                    <a:pt x="4121934" y="1235178"/>
+                  </a:lnTo>
+                  <a:lnTo>
+                    <a:pt x="4051590" y="1232707"/>
+                  </a:lnTo>
+                  <a:lnTo>
+                    <a:pt x="3981245" y="1229959"/>
+                  </a:lnTo>
+                  <a:lnTo>
+                    <a:pt x="3910901" y="1226902"/>
+                  </a:lnTo>
+                  <a:lnTo>
+                    <a:pt x="3840556" y="1223503"/>
+                  </a:lnTo>
+                  <a:lnTo>
+                    <a:pt x="3770212" y="1219722"/>
+                  </a:lnTo>
+                  <a:lnTo>
+                    <a:pt x="3699867" y="1215517"/>
+                  </a:lnTo>
+                  <a:lnTo>
+                    <a:pt x="3629523" y="1210840"/>
+                  </a:lnTo>
+                  <a:lnTo>
+                    <a:pt x="3559178" y="1205639"/>
+                  </a:lnTo>
+                  <a:lnTo>
+                    <a:pt x="3488834" y="1199854"/>
+                  </a:lnTo>
+                  <a:lnTo>
+                    <a:pt x="3418490" y="1193420"/>
+                  </a:lnTo>
+                  <a:lnTo>
+                    <a:pt x="3348145" y="1186264"/>
+                  </a:lnTo>
+                  <a:lnTo>
+                    <a:pt x="3277801" y="1178305"/>
+                  </a:lnTo>
+                  <a:lnTo>
+                    <a:pt x="3207456" y="1169453"/>
+                  </a:lnTo>
+                  <a:lnTo>
+                    <a:pt x="3137112" y="1159608"/>
+                  </a:lnTo>
+                  <a:lnTo>
+                    <a:pt x="3066767" y="1148659"/>
+                  </a:lnTo>
+                  <a:lnTo>
+                    <a:pt x="2996423" y="1136481"/>
+                  </a:lnTo>
+                  <a:lnTo>
+                    <a:pt x="2926078" y="1122936"/>
+                  </a:lnTo>
+                  <a:lnTo>
+                    <a:pt x="2855734" y="1107873"/>
+                  </a:lnTo>
+                  <a:lnTo>
+                    <a:pt x="2785389" y="1091119"/>
+                  </a:lnTo>
+                  <a:lnTo>
+                    <a:pt x="2715045" y="1072485"/>
+                  </a:lnTo>
+                  <a:lnTo>
+                    <a:pt x="2644700" y="1051761"/>
+                  </a:lnTo>
+                  <a:lnTo>
+                    <a:pt x="2574356" y="1028711"/>
+                  </a:lnTo>
+                  <a:lnTo>
+                    <a:pt x="2504011" y="1003076"/>
+                  </a:lnTo>
+                  <a:lnTo>
+                    <a:pt x="2433667" y="974564"/>
+                  </a:lnTo>
+                  <a:lnTo>
+                    <a:pt x="2363322" y="952007"/>
+                  </a:lnTo>
+                  <a:lnTo>
+                    <a:pt x="2292978" y="938874"/>
+                  </a:lnTo>
+                  <a:lnTo>
+                    <a:pt x="2222633" y="925175"/>
+                  </a:lnTo>
+                  <a:lnTo>
+                    <a:pt x="2152289" y="910888"/>
+                  </a:lnTo>
+                  <a:lnTo>
+                    <a:pt x="2081944" y="895985"/>
+                  </a:lnTo>
+                  <a:lnTo>
+                    <a:pt x="2011600" y="880441"/>
+                  </a:lnTo>
+                  <a:lnTo>
+                    <a:pt x="1941255" y="864228"/>
+                  </a:lnTo>
+                  <a:lnTo>
+                    <a:pt x="1870911" y="847318"/>
+                  </a:lnTo>
+                  <a:lnTo>
+                    <a:pt x="1800566" y="829680"/>
+                  </a:lnTo>
+                  <a:lnTo>
+                    <a:pt x="1730222" y="811283"/>
+                  </a:lnTo>
+                  <a:lnTo>
+                    <a:pt x="1659877" y="792094"/>
+                  </a:lnTo>
+                  <a:lnTo>
+                    <a:pt x="1589533" y="772079"/>
+                  </a:lnTo>
+                  <a:lnTo>
+                    <a:pt x="1519188" y="751204"/>
+                  </a:lnTo>
+                  <a:lnTo>
+                    <a:pt x="1448844" y="729429"/>
+                  </a:lnTo>
+                  <a:lnTo>
+                    <a:pt x="1378499" y="706718"/>
+                  </a:lnTo>
+                  <a:lnTo>
+                    <a:pt x="1308155" y="683030"/>
+                  </a:lnTo>
+                  <a:lnTo>
+                    <a:pt x="1237810" y="658322"/>
+                  </a:lnTo>
+                  <a:lnTo>
+                    <a:pt x="1167466" y="632551"/>
+                  </a:lnTo>
+                  <a:lnTo>
+                    <a:pt x="1097121" y="605671"/>
+                  </a:lnTo>
+                  <a:lnTo>
+                    <a:pt x="1026777" y="577634"/>
+                  </a:lnTo>
+                  <a:lnTo>
+                    <a:pt x="956432" y="548391"/>
+                  </a:lnTo>
+                  <a:lnTo>
+                    <a:pt x="886088" y="517890"/>
+                  </a:lnTo>
+                  <a:lnTo>
+                    <a:pt x="815743" y="486075"/>
+                  </a:lnTo>
+                  <a:lnTo>
+                    <a:pt x="745399" y="452892"/>
+                  </a:lnTo>
+                  <a:lnTo>
+                    <a:pt x="675054" y="418281"/>
+                  </a:lnTo>
+                  <a:lnTo>
+                    <a:pt x="604710" y="382181"/>
+                  </a:lnTo>
+                  <a:lnTo>
+                    <a:pt x="534365" y="344527"/>
+                  </a:lnTo>
+                  <a:lnTo>
+                    <a:pt x="464021" y="305253"/>
+                  </a:lnTo>
+                  <a:lnTo>
+                    <a:pt x="393676" y="264288"/>
+                  </a:lnTo>
+                  <a:lnTo>
+                    <a:pt x="323332" y="221561"/>
+                  </a:lnTo>
+                  <a:lnTo>
+                    <a:pt x="252987" y="176995"/>
+                  </a:lnTo>
+                  <a:lnTo>
+                    <a:pt x="182643" y="130512"/>
+                  </a:lnTo>
+                  <a:lnTo>
+                    <a:pt x="112298" y="82028"/>
+                  </a:lnTo>
+                  <a:lnTo>
+                    <a:pt x="41954" y="31458"/>
+                  </a:lnTo>
+                  <a:lnTo>
+                    <a:pt x="0" y="0"/>
+                  </a:lnTo>
+                  <a:close/>
+                </a:path>
+              </a:pathLst>
+            </a:custGeom>
+            <a:solidFill>
+              <a:srgbClr val="FF8C00">
+                <a:alpha val="20000"/>
+              </a:srgbClr>
+            </a:solidFill>
+          </p:spPr>
+          <p:txBody>
+            <a:bodyPr/>
+            <a:lstStyle/>
+            <a:p/>
+          </p:txBody>
+        </p:sp>
+        <p:sp>
+          <p:nvSpPr>
+            <p:cNvPr id="72" name="pl72"/>
+            <p:cNvSpPr/>
+            <p:nvPr/>
+          </p:nvSpPr>
+          <p:spPr>
+            <a:xfrm>
+              <a:off x="3343268" y="4336484"/>
+              <a:ext cx="4856148" cy="1228368"/>
+            </a:xfrm>
+            <a:custGeom>
+              <a:avLst/>
+              <a:pathLst>
+                <a:path w="4856148" h="1228368">
+                  <a:moveTo>
+                    <a:pt x="0" y="0"/>
+                  </a:moveTo>
+                  <a:lnTo>
+                    <a:pt x="2378" y="4751"/>
+                  </a:lnTo>
+                  <a:lnTo>
+                    <a:pt x="72723" y="131094"/>
+                  </a:lnTo>
+                  <a:lnTo>
+                    <a:pt x="143067" y="244692"/>
+                  </a:lnTo>
+                  <a:lnTo>
+                    <a:pt x="213412" y="346831"/>
+                  </a:lnTo>
+                  <a:lnTo>
+                    <a:pt x="283756" y="438666"/>
+                  </a:lnTo>
+                  <a:lnTo>
+                    <a:pt x="354101" y="521238"/>
+                  </a:lnTo>
+                  <a:lnTo>
+                    <a:pt x="424445" y="595479"/>
+                  </a:lnTo>
+                  <a:lnTo>
+                    <a:pt x="494790" y="662232"/>
+                  </a:lnTo>
+                  <a:lnTo>
+                    <a:pt x="565134" y="722250"/>
+                  </a:lnTo>
+                  <a:lnTo>
+                    <a:pt x="635479" y="776215"/>
+                  </a:lnTo>
+                  <a:lnTo>
+                    <a:pt x="705823" y="824735"/>
+                  </a:lnTo>
+                  <a:lnTo>
+                    <a:pt x="776168" y="868361"/>
+                  </a:lnTo>
+                  <a:lnTo>
+                    <a:pt x="846512" y="907586"/>
+                  </a:lnTo>
+                  <a:lnTo>
+                    <a:pt x="916857" y="942854"/>
+                  </a:lnTo>
+                  <a:lnTo>
+                    <a:pt x="987201" y="964598"/>
+                  </a:lnTo>
+                  <a:lnTo>
+                    <a:pt x="1057546" y="976670"/>
+                  </a:lnTo>
+                  <a:lnTo>
+                    <a:pt x="1127890" y="988244"/>
+                  </a:lnTo>
+                  <a:lnTo>
+                    <a:pt x="1198235" y="999340"/>
+                  </a:lnTo>
+                  <a:lnTo>
+                    <a:pt x="1268579" y="1009979"/>
+                  </a:lnTo>
+                  <a:lnTo>
+                    <a:pt x="1338924" y="1020178"/>
+                  </a:lnTo>
+                  <a:lnTo>
+                    <a:pt x="1409268" y="1029957"/>
+                  </a:lnTo>
+                  <a:lnTo>
+                    <a:pt x="1479613" y="1039332"/>
+                  </a:lnTo>
+                  <a:lnTo>
+                    <a:pt x="1549957" y="1048321"/>
+                  </a:lnTo>
+                  <a:lnTo>
+                    <a:pt x="1620302" y="1056939"/>
+                  </a:lnTo>
+                  <a:lnTo>
+                    <a:pt x="1690646" y="1065201"/>
+                  </a:lnTo>
+                  <a:lnTo>
+                    <a:pt x="1760990" y="1073122"/>
+                  </a:lnTo>
+                  <a:lnTo>
+                    <a:pt x="1831335" y="1080717"/>
+                  </a:lnTo>
+                  <a:lnTo>
+                    <a:pt x="1901679" y="1087998"/>
+                  </a:lnTo>
+                  <a:lnTo>
+                    <a:pt x="1972024" y="1094979"/>
+                  </a:lnTo>
+                  <a:lnTo>
+                    <a:pt x="2042368" y="1101672"/>
+                  </a:lnTo>
+                  <a:lnTo>
+                    <a:pt x="2112713" y="1108088"/>
+                  </a:lnTo>
+                  <a:lnTo>
+                    <a:pt x="2183057" y="1114240"/>
+                  </a:lnTo>
+                  <a:lnTo>
+                    <a:pt x="2253402" y="1120138"/>
+                  </a:lnTo>
+                  <a:lnTo>
+                    <a:pt x="2323746" y="1125793"/>
+                  </a:lnTo>
+                  <a:lnTo>
+                    <a:pt x="2394091" y="1131215"/>
+                  </a:lnTo>
+                  <a:lnTo>
+                    <a:pt x="2464435" y="1136412"/>
+                  </a:lnTo>
+                  <a:lnTo>
+                    <a:pt x="2534780" y="1141396"/>
+                  </a:lnTo>
+                  <a:lnTo>
+                    <a:pt x="2605124" y="1146174"/>
+                  </a:lnTo>
+                  <a:lnTo>
+                    <a:pt x="2675469" y="1150754"/>
+                  </a:lnTo>
+                  <a:lnTo>
+                    <a:pt x="2745813" y="1155146"/>
+                  </a:lnTo>
+                  <a:lnTo>
+                    <a:pt x="2816158" y="1159356"/>
+                  </a:lnTo>
+                  <a:lnTo>
+                    <a:pt x="2886502" y="1163393"/>
+                  </a:lnTo>
+                  <a:lnTo>
+                    <a:pt x="2956847" y="1167263"/>
+                  </a:lnTo>
+                  <a:lnTo>
+                    <a:pt x="3027191" y="1170974"/>
+                  </a:lnTo>
+                  <a:lnTo>
+                    <a:pt x="3097536" y="1174531"/>
+                  </a:lnTo>
+                  <a:lnTo>
+                    <a:pt x="3167880" y="1177942"/>
+                  </a:lnTo>
+                  <a:lnTo>
+                    <a:pt x="3238225" y="1181212"/>
+                  </a:lnTo>
+                  <a:lnTo>
+                    <a:pt x="3308569" y="1184347"/>
+                  </a:lnTo>
+                  <a:lnTo>
+                    <a:pt x="3378914" y="1187353"/>
+                  </a:lnTo>
+                  <a:lnTo>
+                    <a:pt x="3449258" y="1190235"/>
+                  </a:lnTo>
+                  <a:lnTo>
+                    <a:pt x="3519603" y="1192997"/>
+                  </a:lnTo>
+                  <a:lnTo>
+                    <a:pt x="3589947" y="1195646"/>
+                  </a:lnTo>
+                  <a:lnTo>
+                    <a:pt x="3660292" y="1198186"/>
+                  </a:lnTo>
+                  <a:lnTo>
+                    <a:pt x="3730636" y="1200621"/>
+                  </a:lnTo>
+                  <a:lnTo>
+                    <a:pt x="3800981" y="1202955"/>
+                  </a:lnTo>
+                  <a:lnTo>
+                    <a:pt x="3871325" y="1205193"/>
+                  </a:lnTo>
+                  <a:lnTo>
+                    <a:pt x="3941670" y="1207339"/>
+                  </a:lnTo>
+                  <a:lnTo>
+                    <a:pt x="4012014" y="1209396"/>
+                  </a:lnTo>
+                  <a:lnTo>
+                    <a:pt x="4082359" y="1211368"/>
+                  </a:lnTo>
+                  <a:lnTo>
+                    <a:pt x="4152703" y="1213259"/>
+                  </a:lnTo>
+                  <a:lnTo>
+                    <a:pt x="4223048" y="1215072"/>
+                  </a:lnTo>
+                  <a:lnTo>
+                    <a:pt x="4293392" y="1216810"/>
+                  </a:lnTo>
+                  <a:lnTo>
+                    <a:pt x="4363737" y="1218477"/>
+                  </a:lnTo>
+                  <a:lnTo>
+                    <a:pt x="4434081" y="1220074"/>
+                  </a:lnTo>
+                  <a:lnTo>
+                    <a:pt x="4504426" y="1221606"/>
+                  </a:lnTo>
+                  <a:lnTo>
+                    <a:pt x="4574770" y="1223075"/>
+                  </a:lnTo>
+                  <a:lnTo>
+                    <a:pt x="4645115" y="1224483"/>
+                  </a:lnTo>
+                  <a:lnTo>
+                    <a:pt x="4715459" y="1225833"/>
+                  </a:lnTo>
+                  <a:lnTo>
+                    <a:pt x="4785804" y="1227127"/>
+                  </a:lnTo>
+                  <a:lnTo>
+                    <a:pt x="4856148" y="1228368"/>
+                  </a:lnTo>
+                </a:path>
+              </a:pathLst>
+            </a:custGeom>
+          </p:spPr>
+          <p:txBody>
+            <a:bodyPr/>
+            <a:lstStyle/>
+            <a:p/>
+          </p:txBody>
+        </p:sp>
+        <p:sp>
+          <p:nvSpPr>
+            <p:cNvPr id="73" name="pl73"/>
+            <p:cNvSpPr/>
+            <p:nvPr/>
+          </p:nvSpPr>
+          <p:spPr>
+            <a:xfrm>
+              <a:off x="1896802" y="4336484"/>
+              <a:ext cx="6302614" cy="1256387"/>
+            </a:xfrm>
+            <a:custGeom>
+              <a:avLst/>
+              <a:pathLst>
+                <a:path w="6302614" h="1256387">
+                  <a:moveTo>
+                    <a:pt x="6302614" y="1256387"/>
+                  </a:moveTo>
+                  <a:lnTo>
+                    <a:pt x="6232269" y="1256295"/>
+                  </a:lnTo>
+                  <a:lnTo>
+                    <a:pt x="6161925" y="1256193"/>
+                  </a:lnTo>
+                  <a:lnTo>
+                    <a:pt x="6091580" y="1256080"/>
+                  </a:lnTo>
+                  <a:lnTo>
+                    <a:pt x="6021236" y="1255954"/>
+                  </a:lnTo>
+                  <a:lnTo>
+                    <a:pt x="5950891" y="1255814"/>
+                  </a:lnTo>
+                  <a:lnTo>
+                    <a:pt x="5880547" y="1255659"/>
+                  </a:lnTo>
+                  <a:lnTo>
+                    <a:pt x="5810202" y="1255486"/>
+                  </a:lnTo>
+                  <a:lnTo>
+                    <a:pt x="5739858" y="1255293"/>
+                  </a:lnTo>
+                  <a:lnTo>
+                    <a:pt x="5669513" y="1255079"/>
+                  </a:lnTo>
+                  <a:lnTo>
+                    <a:pt x="5599169" y="1254841"/>
+                  </a:lnTo>
+                  <a:lnTo>
+                    <a:pt x="5528824" y="1254576"/>
+                  </a:lnTo>
+                  <a:lnTo>
+                    <a:pt x="5458480" y="1254281"/>
+                  </a:lnTo>
+                  <a:lnTo>
+                    <a:pt x="5388135" y="1253954"/>
+                  </a:lnTo>
+                  <a:lnTo>
+                    <a:pt x="5317791" y="1253589"/>
+                  </a:lnTo>
+                  <a:lnTo>
+                    <a:pt x="5247446" y="1253184"/>
+                  </a:lnTo>
+                  <a:lnTo>
+                    <a:pt x="5177102" y="1252733"/>
+                  </a:lnTo>
+                  <a:lnTo>
+                    <a:pt x="5106757" y="1252232"/>
+                  </a:lnTo>
+                  <a:lnTo>
+                    <a:pt x="5036413" y="1251674"/>
+                  </a:lnTo>
+                  <a:lnTo>
+                    <a:pt x="4966068" y="1251054"/>
+                  </a:lnTo>
+                  <a:lnTo>
+                    <a:pt x="4895724" y="1250364"/>
+                  </a:lnTo>
+                  <a:lnTo>
+                    <a:pt x="4825379" y="1249597"/>
+                  </a:lnTo>
+                  <a:lnTo>
+                    <a:pt x="4755035" y="1248744"/>
+                  </a:lnTo>
+                  <a:lnTo>
+                    <a:pt x="4684690" y="1247795"/>
+                  </a:lnTo>
+                  <a:lnTo>
+                    <a:pt x="4614346" y="1246740"/>
+                  </a:lnTo>
+                  <a:lnTo>
+                    <a:pt x="4544001" y="1245566"/>
+                  </a:lnTo>
+                  <a:lnTo>
+                    <a:pt x="4473657" y="1244260"/>
+                  </a:lnTo>
+                  <a:lnTo>
+                    <a:pt x="4403312" y="1242808"/>
+                  </a:lnTo>
+                  <a:lnTo>
+                    <a:pt x="4332968" y="1241193"/>
+                  </a:lnTo>
+                  <a:lnTo>
+                    <a:pt x="4262623" y="1239397"/>
+                  </a:lnTo>
+                  <a:lnTo>
+                    <a:pt x="4192279" y="1237400"/>
+                  </a:lnTo>
+                  <a:lnTo>
+                    <a:pt x="4121934" y="1235178"/>
+                  </a:lnTo>
+                  <a:lnTo>
+                    <a:pt x="4051590" y="1232707"/>
+                  </a:lnTo>
+                  <a:lnTo>
+                    <a:pt x="3981245" y="1229959"/>
+                  </a:lnTo>
+                  <a:lnTo>
+                    <a:pt x="3910901" y="1226902"/>
+                  </a:lnTo>
+                  <a:lnTo>
+                    <a:pt x="3840556" y="1223503"/>
+                  </a:lnTo>
+                  <a:lnTo>
+                    <a:pt x="3770212" y="1219722"/>
+                  </a:lnTo>
+                  <a:lnTo>
+                    <a:pt x="3699867" y="1215517"/>
+                  </a:lnTo>
+                  <a:lnTo>
+                    <a:pt x="3629523" y="1210840"/>
+                  </a:lnTo>
+                  <a:lnTo>
+                    <a:pt x="3559178" y="1205639"/>
+                  </a:lnTo>
+                  <a:lnTo>
+                    <a:pt x="3488834" y="1199854"/>
+                  </a:lnTo>
+                  <a:lnTo>
+                    <a:pt x="3418490" y="1193420"/>
+                  </a:lnTo>
+                  <a:lnTo>
+                    <a:pt x="3348145" y="1186264"/>
+                  </a:lnTo>
+                  <a:lnTo>
+                    <a:pt x="3277801" y="1178305"/>
+                  </a:lnTo>
+                  <a:lnTo>
+                    <a:pt x="3207456" y="1169453"/>
+                  </a:lnTo>
+                  <a:lnTo>
+                    <a:pt x="3137112" y="1159608"/>
+                  </a:lnTo>
+                  <a:lnTo>
+                    <a:pt x="3066767" y="1148659"/>
+                  </a:lnTo>
+                  <a:lnTo>
+                    <a:pt x="2996423" y="1136481"/>
+                  </a:lnTo>
+                  <a:lnTo>
+                    <a:pt x="2926078" y="1122936"/>
+                  </a:lnTo>
+                  <a:lnTo>
+                    <a:pt x="2855734" y="1107873"/>
+                  </a:lnTo>
+                  <a:lnTo>
+                    <a:pt x="2785389" y="1091119"/>
+                  </a:lnTo>
+                  <a:lnTo>
+                    <a:pt x="2715045" y="1072485"/>
+                  </a:lnTo>
+                  <a:lnTo>
+                    <a:pt x="2644700" y="1051761"/>
+                  </a:lnTo>
+                  <a:lnTo>
+                    <a:pt x="2574356" y="1028711"/>
+                  </a:lnTo>
+                  <a:lnTo>
+                    <a:pt x="2504011" y="1003076"/>
+                  </a:lnTo>
+                  <a:lnTo>
+                    <a:pt x="2433667" y="974564"/>
+                  </a:lnTo>
+                  <a:lnTo>
+                    <a:pt x="2363322" y="952007"/>
+                  </a:lnTo>
+                  <a:lnTo>
+                    <a:pt x="2292978" y="938874"/>
+                  </a:lnTo>
+                  <a:lnTo>
+                    <a:pt x="2222633" y="925175"/>
+                  </a:lnTo>
+                  <a:lnTo>
+                    <a:pt x="2152289" y="910888"/>
+                  </a:lnTo>
+                  <a:lnTo>
+                    <a:pt x="2081944" y="895985"/>
+                  </a:lnTo>
+                  <a:lnTo>
+                    <a:pt x="2011600" y="880441"/>
+                  </a:lnTo>
+                  <a:lnTo>
+                    <a:pt x="1941255" y="864228"/>
+                  </a:lnTo>
+                  <a:lnTo>
+                    <a:pt x="1870911" y="847318"/>
+                  </a:lnTo>
+                  <a:lnTo>
+                    <a:pt x="1800566" y="829680"/>
+                  </a:lnTo>
+                  <a:lnTo>
+                    <a:pt x="1730222" y="811283"/>
+                  </a:lnTo>
+                  <a:lnTo>
+                    <a:pt x="1659877" y="792094"/>
+                  </a:lnTo>
+                  <a:lnTo>
+                    <a:pt x="1589533" y="772079"/>
+                  </a:lnTo>
+                  <a:lnTo>
+                    <a:pt x="1519188" y="751204"/>
+                  </a:lnTo>
+                  <a:lnTo>
+                    <a:pt x="1448844" y="729429"/>
+                  </a:lnTo>
+                  <a:lnTo>
+                    <a:pt x="1378499" y="706718"/>
+                  </a:lnTo>
+                  <a:lnTo>
+                    <a:pt x="1308155" y="683030"/>
+                  </a:lnTo>
+                  <a:lnTo>
+                    <a:pt x="1237810" y="658322"/>
+                  </a:lnTo>
+                  <a:lnTo>
+                    <a:pt x="1167466" y="632551"/>
+                  </a:lnTo>
+                  <a:lnTo>
+                    <a:pt x="1097121" y="605671"/>
+                  </a:lnTo>
+                  <a:lnTo>
+                    <a:pt x="1026777" y="577634"/>
+                  </a:lnTo>
+                  <a:lnTo>
+                    <a:pt x="956432" y="548391"/>
+                  </a:lnTo>
+                  <a:lnTo>
+                    <a:pt x="886088" y="517890"/>
+                  </a:lnTo>
+                  <a:lnTo>
+                    <a:pt x="815743" y="486075"/>
+                  </a:lnTo>
+                  <a:lnTo>
+                    <a:pt x="745399" y="452892"/>
+                  </a:lnTo>
+                  <a:lnTo>
+                    <a:pt x="675054" y="418281"/>
+                  </a:lnTo>
+                  <a:lnTo>
+                    <a:pt x="604710" y="382181"/>
+                  </a:lnTo>
+                  <a:lnTo>
+                    <a:pt x="534365" y="344527"/>
+                  </a:lnTo>
+                  <a:lnTo>
+                    <a:pt x="464021" y="305253"/>
+                  </a:lnTo>
+                  <a:lnTo>
+                    <a:pt x="393676" y="264288"/>
+                  </a:lnTo>
+                  <a:lnTo>
+                    <a:pt x="323332" y="221561"/>
+                  </a:lnTo>
+                  <a:lnTo>
+                    <a:pt x="252987" y="176995"/>
+                  </a:lnTo>
+                  <a:lnTo>
+                    <a:pt x="182643" y="130512"/>
+                  </a:lnTo>
+                  <a:lnTo>
+                    <a:pt x="112298" y="82028"/>
+                  </a:lnTo>
+                  <a:lnTo>
+                    <a:pt x="41954" y="31458"/>
+                  </a:lnTo>
+                  <a:lnTo>
+                    <a:pt x="0" y="0"/>
+                  </a:lnTo>
+                </a:path>
+              </a:pathLst>
+            </a:custGeom>
+          </p:spPr>
+          <p:txBody>
+            <a:bodyPr/>
+            <a:lstStyle/>
+            <a:p/>
+          </p:txBody>
+        </p:sp>
+        <p:sp>
+          <p:nvSpPr>
+            <p:cNvPr id="74" name="pl74"/>
+            <p:cNvSpPr/>
+            <p:nvPr/>
+          </p:nvSpPr>
+          <p:spPr>
+            <a:xfrm>
+              <a:off x="2932894" y="4336484"/>
+              <a:ext cx="5266522" cy="1252353"/>
+            </a:xfrm>
+            <a:custGeom>
+              <a:avLst/>
+              <a:pathLst>
+                <a:path w="5266522" h="1252353">
+                  <a:moveTo>
+                    <a:pt x="0" y="0"/>
+                  </a:moveTo>
+                  <a:lnTo>
+                    <a:pt x="61030" y="78783"/>
+                  </a:lnTo>
+                  <a:lnTo>
+                    <a:pt x="131374" y="163093"/>
+                  </a:lnTo>
+                  <a:lnTo>
+                    <a:pt x="201719" y="241371"/>
+                  </a:lnTo>
+                  <a:lnTo>
+                    <a:pt x="272063" y="314049"/>
+                  </a:lnTo>
+                  <a:lnTo>
+                    <a:pt x="342408" y="381527"/>
+                  </a:lnTo>
+                  <a:lnTo>
+                    <a:pt x="412752" y="444177"/>
+                  </a:lnTo>
+                  <a:lnTo>
+                    <a:pt x="483097" y="502345"/>
+                  </a:lnTo>
+                  <a:lnTo>
+                    <a:pt x="553441" y="556352"/>
+                  </a:lnTo>
+                  <a:lnTo>
+                    <a:pt x="623786" y="606494"/>
+                  </a:lnTo>
+                  <a:lnTo>
+                    <a:pt x="694130" y="653049"/>
+                  </a:lnTo>
+                  <a:lnTo>
+                    <a:pt x="764475" y="696273"/>
+                  </a:lnTo>
+                  <a:lnTo>
+                    <a:pt x="834819" y="736405"/>
+                  </a:lnTo>
+                  <a:lnTo>
+                    <a:pt x="905164" y="773665"/>
+                  </a:lnTo>
+                  <a:lnTo>
+                    <a:pt x="975508" y="808260"/>
+                  </a:lnTo>
+                  <a:lnTo>
+                    <a:pt x="1045853" y="840380"/>
+                  </a:lnTo>
+                  <a:lnTo>
+                    <a:pt x="1116197" y="870201"/>
+                  </a:lnTo>
+                  <a:lnTo>
+                    <a:pt x="1186542" y="897889"/>
+                  </a:lnTo>
+                  <a:lnTo>
+                    <a:pt x="1256886" y="923596"/>
+                  </a:lnTo>
+                  <a:lnTo>
+                    <a:pt x="1327231" y="947464"/>
+                  </a:lnTo>
+                  <a:lnTo>
+                    <a:pt x="1397575" y="969625"/>
+                  </a:lnTo>
+                  <a:lnTo>
+                    <a:pt x="1467919" y="990199"/>
+                  </a:lnTo>
+                  <a:lnTo>
+                    <a:pt x="1538264" y="1009302"/>
+                  </a:lnTo>
+                  <a:lnTo>
+                    <a:pt x="1608608" y="1027038"/>
+                  </a:lnTo>
+                  <a:lnTo>
+                    <a:pt x="1678953" y="1043505"/>
+                  </a:lnTo>
+                  <a:lnTo>
+                    <a:pt x="1749297" y="1058794"/>
+                  </a:lnTo>
+                  <a:lnTo>
+                    <a:pt x="1819642" y="1072989"/>
+                  </a:lnTo>
+                  <a:lnTo>
+                    <a:pt x="1889986" y="1086169"/>
+                  </a:lnTo>
+                  <a:lnTo>
+                    <a:pt x="1960331" y="1098405"/>
+                  </a:lnTo>
+                  <a:lnTo>
+                    <a:pt x="2030675" y="1109766"/>
+                  </a:lnTo>
+                  <a:lnTo>
+                    <a:pt x="2101020" y="1120315"/>
+                  </a:lnTo>
+                  <a:lnTo>
+                    <a:pt x="2171364" y="1130108"/>
+                  </a:lnTo>
+                  <a:lnTo>
+                    <a:pt x="2241709" y="1139201"/>
+                  </a:lnTo>
+                  <a:lnTo>
+                    <a:pt x="2312053" y="1147644"/>
+                  </a:lnTo>
+                  <a:lnTo>
+                    <a:pt x="2382398" y="1155482"/>
+                  </a:lnTo>
+                  <a:lnTo>
+                    <a:pt x="2452742" y="1162760"/>
+                  </a:lnTo>
+                  <a:lnTo>
+                    <a:pt x="2523087" y="1169516"/>
+                  </a:lnTo>
+                  <a:lnTo>
+                    <a:pt x="2593431" y="1175790"/>
+                  </a:lnTo>
+                  <a:lnTo>
+                    <a:pt x="2663776" y="1181615"/>
+                  </a:lnTo>
+                  <a:lnTo>
+                    <a:pt x="2734120" y="1187022"/>
+                  </a:lnTo>
+                  <a:lnTo>
+                    <a:pt x="2804465" y="1192043"/>
+                  </a:lnTo>
+                  <a:lnTo>
+                    <a:pt x="2874809" y="1196705"/>
+                  </a:lnTo>
+                  <a:lnTo>
+                    <a:pt x="2945154" y="1201033"/>
+                  </a:lnTo>
+                  <a:lnTo>
+                    <a:pt x="3015498" y="1205052"/>
+                  </a:lnTo>
+                  <a:lnTo>
+                    <a:pt x="3085843" y="1208783"/>
+                  </a:lnTo>
+                  <a:lnTo>
+                    <a:pt x="3156187" y="1212247"/>
+                  </a:lnTo>
+                  <a:lnTo>
+                    <a:pt x="3226532" y="1215463"/>
+                  </a:lnTo>
+                  <a:lnTo>
+                    <a:pt x="3296876" y="1218450"/>
+                  </a:lnTo>
+                  <a:lnTo>
+                    <a:pt x="3367221" y="1221222"/>
+                  </a:lnTo>
+                  <a:lnTo>
+                    <a:pt x="3437565" y="1223796"/>
+                  </a:lnTo>
+                  <a:lnTo>
+                    <a:pt x="3507910" y="1226186"/>
+                  </a:lnTo>
+                  <a:lnTo>
+                    <a:pt x="3578254" y="1228405"/>
+                  </a:lnTo>
+                  <a:lnTo>
+                    <a:pt x="3648599" y="1230466"/>
+                  </a:lnTo>
+                  <a:lnTo>
+                    <a:pt x="3718943" y="1232378"/>
+                  </a:lnTo>
+                  <a:lnTo>
+                    <a:pt x="3789288" y="1234154"/>
+                  </a:lnTo>
+                  <a:lnTo>
+                    <a:pt x="3859632" y="1235803"/>
+                  </a:lnTo>
+                  <a:lnTo>
+                    <a:pt x="3929977" y="1237334"/>
+                  </a:lnTo>
+                  <a:lnTo>
+                    <a:pt x="4000321" y="1238756"/>
+                  </a:lnTo>
+                  <a:lnTo>
+                    <a:pt x="4070666" y="1240075"/>
+                  </a:lnTo>
+                  <a:lnTo>
+                    <a:pt x="4141010" y="1241301"/>
+                  </a:lnTo>
+                  <a:lnTo>
+                    <a:pt x="4211355" y="1242438"/>
+                  </a:lnTo>
+                  <a:lnTo>
+                    <a:pt x="4281699" y="1243495"/>
+                  </a:lnTo>
+                  <a:lnTo>
+                    <a:pt x="4352044" y="1244475"/>
+                  </a:lnTo>
+                  <a:lnTo>
+                    <a:pt x="4422388" y="1245386"/>
+                  </a:lnTo>
+                  <a:lnTo>
+                    <a:pt x="4492733" y="1246231"/>
+                  </a:lnTo>
+                  <a:lnTo>
+                    <a:pt x="4563077" y="1247016"/>
+                  </a:lnTo>
+                  <a:lnTo>
+                    <a:pt x="4633422" y="1247745"/>
+                  </a:lnTo>
+                  <a:lnTo>
+                    <a:pt x="4703766" y="1248421"/>
+                  </a:lnTo>
+                  <a:lnTo>
+                    <a:pt x="4774111" y="1249050"/>
+                  </a:lnTo>
+                  <a:lnTo>
+                    <a:pt x="4844455" y="1249633"/>
+                  </a:lnTo>
+                  <a:lnTo>
+                    <a:pt x="4914800" y="1250174"/>
+                  </a:lnTo>
+                  <a:lnTo>
+                    <a:pt x="4985144" y="1250677"/>
+                  </a:lnTo>
+                  <a:lnTo>
+                    <a:pt x="5055489" y="1251144"/>
+                  </a:lnTo>
+                  <a:lnTo>
+                    <a:pt x="5125833" y="1251577"/>
+                  </a:lnTo>
+                  <a:lnTo>
+                    <a:pt x="5196177" y="1251980"/>
+                  </a:lnTo>
+                  <a:lnTo>
+                    <a:pt x="5266522" y="1252353"/>
+                  </a:lnTo>
+                </a:path>
+              </a:pathLst>
+            </a:custGeom>
+            <a:ln w="27101" cap="flat">
+              <a:solidFill>
+                <a:srgbClr val="FF8C00">
+                  <a:alpha val="100000"/>
+                </a:srgbClr>
+              </a:solidFill>
+              <a:prstDash val="solid"/>
+              <a:round/>
+            </a:ln>
+          </p:spPr>
+          <p:txBody>
+            <a:bodyPr/>
+            <a:lstStyle/>
+            <a:p/>
+          </p:txBody>
+        </p:sp>
+        <p:sp>
+          <p:nvSpPr>
+            <p:cNvPr id="75" name="pl75"/>
+            <p:cNvSpPr/>
+            <p:nvPr/>
+          </p:nvSpPr>
+          <p:spPr>
+            <a:xfrm>
+              <a:off x="887106" y="5294352"/>
+              <a:ext cx="7660515" cy="0"/>
+            </a:xfrm>
+            <a:custGeom>
+              <a:avLst/>
+              <a:pathLst>
+                <a:path w="7660515" h="0">
+                  <a:moveTo>
+                    <a:pt x="0" y="0"/>
+                  </a:moveTo>
+                  <a:lnTo>
+                    <a:pt x="7660515" y="0"/>
+                  </a:lnTo>
+                  <a:lnTo>
+                    <a:pt x="7660515" y="0"/>
+                  </a:lnTo>
+                </a:path>
+              </a:pathLst>
+            </a:custGeom>
+            <a:ln w="13550" cap="flat">
+              <a:solidFill>
+                <a:srgbClr val="7F7F7F">
+                  <a:alpha val="100000"/>
+                </a:srgbClr>
+              </a:solidFill>
+              <a:prstDash val="dash"/>
+              <a:round/>
+            </a:ln>
+          </p:spPr>
+          <p:txBody>
+            <a:bodyPr/>
+            <a:lstStyle/>
+            <a:p/>
+          </p:txBody>
+        </p:sp>
+        <p:sp>
+          <p:nvSpPr>
+            <p:cNvPr id="76" name="pl76"/>
+            <p:cNvSpPr/>
+            <p:nvPr/>
+          </p:nvSpPr>
+          <p:spPr>
+            <a:xfrm>
+              <a:off x="4292500" y="4336484"/>
+              <a:ext cx="0" cy="1317069"/>
+            </a:xfrm>
+            <a:custGeom>
+              <a:avLst/>
+              <a:pathLst>
+                <a:path w="0" h="1317069">
+                  <a:moveTo>
+                    <a:pt x="0" y="1317069"/>
+                  </a:moveTo>
+                  <a:lnTo>
+                    <a:pt x="0" y="0"/>
+                  </a:lnTo>
+                  <a:lnTo>
+                    <a:pt x="0" y="0"/>
+                  </a:lnTo>
+                </a:path>
+              </a:pathLst>
+            </a:custGeom>
+            <a:ln w="13550" cap="flat">
+              <a:solidFill>
+                <a:srgbClr val="666666">
+                  <a:alpha val="100000"/>
+                </a:srgbClr>
+              </a:solidFill>
+              <a:prstDash val="dot"/>
+              <a:round/>
+            </a:ln>
+          </p:spPr>
+          <p:txBody>
+            <a:bodyPr/>
+            <a:lstStyle/>
+            <a:p/>
+          </p:txBody>
+        </p:sp>
+        <p:sp>
+          <p:nvSpPr>
+            <p:cNvPr id="77" name="pl77"/>
+            <p:cNvSpPr/>
+            <p:nvPr/>
+          </p:nvSpPr>
+          <p:spPr>
+            <a:xfrm>
+              <a:off x="3124839" y="4336484"/>
+              <a:ext cx="0" cy="1317069"/>
+            </a:xfrm>
+            <a:custGeom>
+              <a:avLst/>
+              <a:pathLst>
+                <a:path w="0" h="1317069">
+                  <a:moveTo>
+                    <a:pt x="0" y="1317069"/>
+                  </a:moveTo>
+                  <a:lnTo>
+                    <a:pt x="0" y="0"/>
+                  </a:lnTo>
+                  <a:lnTo>
+                    <a:pt x="0" y="0"/>
+                  </a:lnTo>
+                </a:path>
+              </a:pathLst>
+            </a:custGeom>
+            <a:ln w="13550" cap="flat">
+              <a:solidFill>
+                <a:srgbClr val="4682B4">
+                  <a:alpha val="69803"/>
+                </a:srgbClr>
+              </a:solidFill>
+              <a:prstDash val="dash"/>
+              <a:round/>
+            </a:ln>
+          </p:spPr>
+          <p:txBody>
+            <a:bodyPr/>
+            <a:lstStyle/>
+            <a:p/>
+          </p:txBody>
+        </p:sp>
+        <p:sp>
+          <p:nvSpPr>
+            <p:cNvPr id="78" name="pl78"/>
+            <p:cNvSpPr/>
+            <p:nvPr/>
+          </p:nvSpPr>
+          <p:spPr>
+            <a:xfrm>
+              <a:off x="5508592" y="4336484"/>
+              <a:ext cx="0" cy="1317069"/>
+            </a:xfrm>
+            <a:custGeom>
+              <a:avLst/>
+              <a:pathLst>
+                <a:path w="0" h="1317069">
+                  <a:moveTo>
+                    <a:pt x="0" y="1317069"/>
+                  </a:moveTo>
+                  <a:lnTo>
+                    <a:pt x="0" y="0"/>
+                  </a:lnTo>
+                  <a:lnTo>
+                    <a:pt x="0" y="0"/>
+                  </a:lnTo>
+                </a:path>
+              </a:pathLst>
+            </a:custGeom>
+            <a:ln w="13550" cap="flat">
+              <a:solidFill>
+                <a:srgbClr val="4682B4">
+                  <a:alpha val="69803"/>
+                </a:srgbClr>
+              </a:solidFill>
+              <a:prstDash val="dash"/>
+              <a:round/>
+            </a:ln>
+          </p:spPr>
+          <p:txBody>
+            <a:bodyPr/>
+            <a:lstStyle/>
+            <a:p/>
+          </p:txBody>
+        </p:sp>
+        <p:sp>
+          <p:nvSpPr>
+            <p:cNvPr id="79" name="tx79"/>
+            <p:cNvSpPr/>
+            <p:nvPr/>
+          </p:nvSpPr>
+          <p:spPr>
+            <a:xfrm>
+              <a:off x="762297" y="5553636"/>
+              <a:ext cx="62179" cy="80101"/>
+            </a:xfrm>
+            <a:prstGeom prst="rect">
+              <a:avLst/>
+            </a:prstGeom>
+            <a:noFill/>
+          </p:spPr>
+          <p:txBody>
+            <a:bodyPr lIns="0" rIns="0" tIns="0" bIns="0" anchorCtr="1" anchor="ctr" wrap="none"/>
+            <a:lstStyle/>
+            <a:p>
+              <a:pPr algn="l" marL="0" marR="0" indent="0">
+                <a:lnSpc>
+                  <a:spcPts val="880"/>
+                </a:lnSpc>
+                <a:spcBef>
+                  <a:spcPts val="0"/>
+                </a:spcBef>
+                <a:spcAft>
+                  <a:spcPts val="0"/>
+                </a:spcAft>
+              </a:pPr>
+              <a:r>
+                <a:rPr sz="880">
+                  <a:solidFill>
+                    <a:srgbClr val="4D4D4D">
+                      <a:alpha val="100000"/>
+                    </a:srgbClr>
+                  </a:solidFill>
+                  <a:latin typeface="Helvetica"/>
+                  <a:cs typeface="Helvetica"/>
+                </a:rPr>
+                <a:t>0</a:t>
+              </a:r>
+            </a:p>
+          </p:txBody>
+        </p:sp>
+        <p:sp>
+          <p:nvSpPr>
+            <p:cNvPr id="80" name="tx80"/>
+            <p:cNvSpPr/>
+            <p:nvPr/>
+          </p:nvSpPr>
+          <p:spPr>
+            <a:xfrm>
+              <a:off x="762297" y="5254302"/>
+              <a:ext cx="62179" cy="80101"/>
+            </a:xfrm>
+            <a:prstGeom prst="rect">
+              <a:avLst/>
+            </a:prstGeom>
+            <a:noFill/>
+          </p:spPr>
+          <p:txBody>
+            <a:bodyPr lIns="0" rIns="0" tIns="0" bIns="0" anchorCtr="1" anchor="ctr" wrap="none"/>
+            <a:lstStyle/>
+            <a:p>
+              <a:pPr algn="l" marL="0" marR="0" indent="0">
+                <a:lnSpc>
+                  <a:spcPts val="880"/>
+                </a:lnSpc>
+                <a:spcBef>
+                  <a:spcPts val="0"/>
+                </a:spcBef>
+                <a:spcAft>
+                  <a:spcPts val="0"/>
+                </a:spcAft>
+              </a:pPr>
+              <a:r>
+                <a:rPr sz="880">
+                  <a:solidFill>
+                    <a:srgbClr val="4D4D4D">
+                      <a:alpha val="100000"/>
+                    </a:srgbClr>
+                  </a:solidFill>
+                  <a:latin typeface="Helvetica"/>
+                  <a:cs typeface="Helvetica"/>
+                </a:rPr>
+                <a:t>1</a:t>
+              </a:r>
+            </a:p>
+          </p:txBody>
+        </p:sp>
+        <p:sp>
+          <p:nvSpPr>
+            <p:cNvPr id="81" name="tx81"/>
+            <p:cNvSpPr/>
+            <p:nvPr/>
+          </p:nvSpPr>
+          <p:spPr>
+            <a:xfrm>
+              <a:off x="762297" y="4954968"/>
+              <a:ext cx="62179" cy="80101"/>
+            </a:xfrm>
+            <a:prstGeom prst="rect">
+              <a:avLst/>
+            </a:prstGeom>
+            <a:noFill/>
+          </p:spPr>
+          <p:txBody>
+            <a:bodyPr lIns="0" rIns="0" tIns="0" bIns="0" anchorCtr="1" anchor="ctr" wrap="none"/>
+            <a:lstStyle/>
+            <a:p>
+              <a:pPr algn="l" marL="0" marR="0" indent="0">
+                <a:lnSpc>
+                  <a:spcPts val="880"/>
+                </a:lnSpc>
+                <a:spcBef>
+                  <a:spcPts val="0"/>
+                </a:spcBef>
+                <a:spcAft>
+                  <a:spcPts val="0"/>
+                </a:spcAft>
+              </a:pPr>
+              <a:r>
+                <a:rPr sz="880">
+                  <a:solidFill>
+                    <a:srgbClr val="4D4D4D">
+                      <a:alpha val="100000"/>
+                    </a:srgbClr>
+                  </a:solidFill>
+                  <a:latin typeface="Helvetica"/>
+                  <a:cs typeface="Helvetica"/>
+                </a:rPr>
+                <a:t>2</a:t>
+              </a:r>
+            </a:p>
+          </p:txBody>
+        </p:sp>
+        <p:sp>
+          <p:nvSpPr>
+            <p:cNvPr id="82" name="tx82"/>
+            <p:cNvSpPr/>
+            <p:nvPr/>
+          </p:nvSpPr>
+          <p:spPr>
+            <a:xfrm>
+              <a:off x="762297" y="4655634"/>
+              <a:ext cx="62179" cy="80101"/>
+            </a:xfrm>
+            <a:prstGeom prst="rect">
+              <a:avLst/>
+            </a:prstGeom>
+            <a:noFill/>
+          </p:spPr>
+          <p:txBody>
+            <a:bodyPr lIns="0" rIns="0" tIns="0" bIns="0" anchorCtr="1" anchor="ctr" wrap="none"/>
+            <a:lstStyle/>
+            <a:p>
+              <a:pPr algn="l" marL="0" marR="0" indent="0">
+                <a:lnSpc>
+                  <a:spcPts val="880"/>
+                </a:lnSpc>
+                <a:spcBef>
+                  <a:spcPts val="0"/>
+                </a:spcBef>
+                <a:spcAft>
+                  <a:spcPts val="0"/>
+                </a:spcAft>
+              </a:pPr>
+              <a:r>
+                <a:rPr sz="880">
+                  <a:solidFill>
+                    <a:srgbClr val="4D4D4D">
+                      <a:alpha val="100000"/>
+                    </a:srgbClr>
+                  </a:solidFill>
+                  <a:latin typeface="Helvetica"/>
+                  <a:cs typeface="Helvetica"/>
+                </a:rPr>
+                <a:t>3</a:t>
+              </a:r>
+            </a:p>
+          </p:txBody>
+        </p:sp>
+        <p:sp>
+          <p:nvSpPr>
+            <p:cNvPr id="83" name="tx83"/>
+            <p:cNvSpPr/>
+            <p:nvPr/>
+          </p:nvSpPr>
+          <p:spPr>
+            <a:xfrm>
+              <a:off x="762297" y="4356300"/>
+              <a:ext cx="62179" cy="80101"/>
+            </a:xfrm>
+            <a:prstGeom prst="rect">
+              <a:avLst/>
+            </a:prstGeom>
+            <a:noFill/>
+          </p:spPr>
+          <p:txBody>
+            <a:bodyPr lIns="0" rIns="0" tIns="0" bIns="0" anchorCtr="1" anchor="ctr" wrap="none"/>
+            <a:lstStyle/>
+            <a:p>
+              <a:pPr algn="l" marL="0" marR="0" indent="0">
+                <a:lnSpc>
+                  <a:spcPts val="880"/>
+                </a:lnSpc>
+                <a:spcBef>
+                  <a:spcPts val="0"/>
+                </a:spcBef>
+                <a:spcAft>
+                  <a:spcPts val="0"/>
+                </a:spcAft>
+              </a:pPr>
+              <a:r>
+                <a:rPr sz="880">
+                  <a:solidFill>
+                    <a:srgbClr val="4D4D4D">
+                      <a:alpha val="100000"/>
+                    </a:srgbClr>
+                  </a:solidFill>
+                  <a:latin typeface="Helvetica"/>
+                  <a:cs typeface="Helvetica"/>
+                </a:rPr>
+                <a:t>4</a:t>
+              </a:r>
+            </a:p>
+          </p:txBody>
+        </p:sp>
+        <p:sp>
+          <p:nvSpPr>
+            <p:cNvPr id="84" name="tx84"/>
+            <p:cNvSpPr/>
+            <p:nvPr/>
+          </p:nvSpPr>
+          <p:spPr>
+            <a:xfrm>
+              <a:off x="1346003" y="5716183"/>
+              <a:ext cx="161574" cy="80101"/>
+            </a:xfrm>
+            <a:prstGeom prst="rect">
+              <a:avLst/>
+            </a:prstGeom>
+            <a:noFill/>
+          </p:spPr>
+          <p:txBody>
+            <a:bodyPr lIns="0" rIns="0" tIns="0" bIns="0" anchorCtr="1" anchor="ctr" wrap="none"/>
+            <a:lstStyle/>
+            <a:p>
+              <a:pPr algn="l" marL="0" marR="0" indent="0">
+                <a:lnSpc>
+                  <a:spcPts val="880"/>
+                </a:lnSpc>
+                <a:spcBef>
+                  <a:spcPts val="0"/>
+                </a:spcBef>
+                <a:spcAft>
+                  <a:spcPts val="0"/>
+                </a:spcAft>
+              </a:pPr>
+              <a:r>
+                <a:rPr sz="880">
+                  <a:solidFill>
+                    <a:srgbClr val="4D4D4D">
+                      <a:alpha val="100000"/>
+                    </a:srgbClr>
+                  </a:solidFill>
+                  <a:latin typeface="Helvetica"/>
+                  <a:cs typeface="Helvetica"/>
+                </a:rPr>
+                <a:t>-50</a:t>
+              </a:r>
+            </a:p>
+          </p:txBody>
+        </p:sp>
+        <p:sp>
+          <p:nvSpPr>
+            <p:cNvPr id="85" name="tx85"/>
+            <p:cNvSpPr/>
+            <p:nvPr/>
+          </p:nvSpPr>
+          <p:spPr>
+            <a:xfrm>
+              <a:off x="2196512" y="5716183"/>
+              <a:ext cx="161574" cy="80101"/>
+            </a:xfrm>
+            <a:prstGeom prst="rect">
+              <a:avLst/>
+            </a:prstGeom>
+            <a:noFill/>
+          </p:spPr>
+          <p:txBody>
+            <a:bodyPr lIns="0" rIns="0" tIns="0" bIns="0" anchorCtr="1" anchor="ctr" wrap="none"/>
+            <a:lstStyle/>
+            <a:p>
+              <a:pPr algn="l" marL="0" marR="0" indent="0">
+                <a:lnSpc>
+                  <a:spcPts val="880"/>
+                </a:lnSpc>
+                <a:spcBef>
+                  <a:spcPts val="0"/>
+                </a:spcBef>
+                <a:spcAft>
+                  <a:spcPts val="0"/>
+                </a:spcAft>
+              </a:pPr>
+              <a:r>
+                <a:rPr sz="880">
+                  <a:solidFill>
+                    <a:srgbClr val="4D4D4D">
+                      <a:alpha val="100000"/>
+                    </a:srgbClr>
+                  </a:solidFill>
+                  <a:latin typeface="Helvetica"/>
+                  <a:cs typeface="Helvetica"/>
+                </a:rPr>
+                <a:t>-40</a:t>
+              </a:r>
+            </a:p>
+          </p:txBody>
+        </p:sp>
+        <p:sp>
+          <p:nvSpPr>
+            <p:cNvPr id="86" name="tx86"/>
+            <p:cNvSpPr/>
+            <p:nvPr/>
+          </p:nvSpPr>
+          <p:spPr>
+            <a:xfrm>
+              <a:off x="3047022" y="5716183"/>
+              <a:ext cx="161574" cy="80101"/>
+            </a:xfrm>
+            <a:prstGeom prst="rect">
+              <a:avLst/>
+            </a:prstGeom>
+            <a:noFill/>
+          </p:spPr>
+          <p:txBody>
+            <a:bodyPr lIns="0" rIns="0" tIns="0" bIns="0" anchorCtr="1" anchor="ctr" wrap="none"/>
+            <a:lstStyle/>
+            <a:p>
+              <a:pPr algn="l" marL="0" marR="0" indent="0">
+                <a:lnSpc>
+                  <a:spcPts val="880"/>
+                </a:lnSpc>
+                <a:spcBef>
+                  <a:spcPts val="0"/>
+                </a:spcBef>
+                <a:spcAft>
+                  <a:spcPts val="0"/>
+                </a:spcAft>
+              </a:pPr>
+              <a:r>
+                <a:rPr sz="880">
+                  <a:solidFill>
+                    <a:srgbClr val="4D4D4D">
+                      <a:alpha val="100000"/>
+                    </a:srgbClr>
+                  </a:solidFill>
+                  <a:latin typeface="Helvetica"/>
+                  <a:cs typeface="Helvetica"/>
+                </a:rPr>
+                <a:t>-30</a:t>
+              </a:r>
+            </a:p>
+          </p:txBody>
+        </p:sp>
+        <p:sp>
+          <p:nvSpPr>
+            <p:cNvPr id="87" name="tx87"/>
+            <p:cNvSpPr/>
+            <p:nvPr/>
+          </p:nvSpPr>
+          <p:spPr>
+            <a:xfrm>
+              <a:off x="3897531" y="5716183"/>
+              <a:ext cx="161574" cy="80101"/>
+            </a:xfrm>
+            <a:prstGeom prst="rect">
+              <a:avLst/>
+            </a:prstGeom>
+            <a:noFill/>
+          </p:spPr>
+          <p:txBody>
+            <a:bodyPr lIns="0" rIns="0" tIns="0" bIns="0" anchorCtr="1" anchor="ctr" wrap="none"/>
+            <a:lstStyle/>
+            <a:p>
+              <a:pPr algn="l" marL="0" marR="0" indent="0">
+                <a:lnSpc>
+                  <a:spcPts val="880"/>
+                </a:lnSpc>
+                <a:spcBef>
+                  <a:spcPts val="0"/>
+                </a:spcBef>
+                <a:spcAft>
+                  <a:spcPts val="0"/>
+                </a:spcAft>
+              </a:pPr>
+              <a:r>
+                <a:rPr sz="880">
+                  <a:solidFill>
+                    <a:srgbClr val="4D4D4D">
+                      <a:alpha val="100000"/>
+                    </a:srgbClr>
+                  </a:solidFill>
+                  <a:latin typeface="Helvetica"/>
+                  <a:cs typeface="Helvetica"/>
+                </a:rPr>
+                <a:t>-20</a:t>
+              </a:r>
+            </a:p>
+          </p:txBody>
+        </p:sp>
+        <p:sp>
+          <p:nvSpPr>
+            <p:cNvPr id="88" name="tx88"/>
+            <p:cNvSpPr/>
+            <p:nvPr/>
+          </p:nvSpPr>
+          <p:spPr>
+            <a:xfrm>
+              <a:off x="4748041" y="5716183"/>
+              <a:ext cx="161574" cy="80101"/>
+            </a:xfrm>
+            <a:prstGeom prst="rect">
+              <a:avLst/>
+            </a:prstGeom>
+            <a:noFill/>
+          </p:spPr>
+          <p:txBody>
+            <a:bodyPr lIns="0" rIns="0" tIns="0" bIns="0" anchorCtr="1" anchor="ctr" wrap="none"/>
+            <a:lstStyle/>
+            <a:p>
+              <a:pPr algn="l" marL="0" marR="0" indent="0">
+                <a:lnSpc>
+                  <a:spcPts val="880"/>
+                </a:lnSpc>
+                <a:spcBef>
+                  <a:spcPts val="0"/>
+                </a:spcBef>
+                <a:spcAft>
+                  <a:spcPts val="0"/>
+                </a:spcAft>
+              </a:pPr>
+              <a:r>
+                <a:rPr sz="880">
+                  <a:solidFill>
+                    <a:srgbClr val="4D4D4D">
+                      <a:alpha val="100000"/>
+                    </a:srgbClr>
+                  </a:solidFill>
+                  <a:latin typeface="Helvetica"/>
+                  <a:cs typeface="Helvetica"/>
+                </a:rPr>
+                <a:t>-10</a:t>
+              </a:r>
+            </a:p>
+          </p:txBody>
+        </p:sp>
+        <p:sp>
+          <p:nvSpPr>
+            <p:cNvPr id="89" name="tx89"/>
+            <p:cNvSpPr/>
+            <p:nvPr/>
+          </p:nvSpPr>
+          <p:spPr>
+            <a:xfrm>
+              <a:off x="5648248" y="5716183"/>
+              <a:ext cx="62179" cy="80101"/>
+            </a:xfrm>
+            <a:prstGeom prst="rect">
+              <a:avLst/>
+            </a:prstGeom>
+            <a:noFill/>
+          </p:spPr>
+          <p:txBody>
+            <a:bodyPr lIns="0" rIns="0" tIns="0" bIns="0" anchorCtr="1" anchor="ctr" wrap="none"/>
+            <a:lstStyle/>
+            <a:p>
+              <a:pPr algn="l" marL="0" marR="0" indent="0">
+                <a:lnSpc>
+                  <a:spcPts val="880"/>
+                </a:lnSpc>
+                <a:spcBef>
+                  <a:spcPts val="0"/>
+                </a:spcBef>
+                <a:spcAft>
+                  <a:spcPts val="0"/>
+                </a:spcAft>
+              </a:pPr>
+              <a:r>
+                <a:rPr sz="880">
+                  <a:solidFill>
+                    <a:srgbClr val="4D4D4D">
+                      <a:alpha val="100000"/>
+                    </a:srgbClr>
+                  </a:solidFill>
+                  <a:latin typeface="Helvetica"/>
+                  <a:cs typeface="Helvetica"/>
+                </a:rPr>
+                <a:t>0</a:t>
+              </a:r>
+            </a:p>
+          </p:txBody>
+        </p:sp>
+        <p:sp>
+          <p:nvSpPr>
+            <p:cNvPr id="90" name="tx90"/>
+            <p:cNvSpPr/>
+            <p:nvPr/>
+          </p:nvSpPr>
+          <p:spPr>
+            <a:xfrm>
+              <a:off x="6467667" y="5716183"/>
+              <a:ext cx="124358" cy="80101"/>
+            </a:xfrm>
+            <a:prstGeom prst="rect">
+              <a:avLst/>
+            </a:prstGeom>
+            <a:noFill/>
+          </p:spPr>
+          <p:txBody>
+            <a:bodyPr lIns="0" rIns="0" tIns="0" bIns="0" anchorCtr="1" anchor="ctr" wrap="none"/>
+            <a:lstStyle/>
+            <a:p>
+              <a:pPr algn="l" marL="0" marR="0" indent="0">
+                <a:lnSpc>
+                  <a:spcPts val="880"/>
+                </a:lnSpc>
+                <a:spcBef>
+                  <a:spcPts val="0"/>
+                </a:spcBef>
+                <a:spcAft>
+                  <a:spcPts val="0"/>
+                </a:spcAft>
+              </a:pPr>
+              <a:r>
+                <a:rPr sz="880">
+                  <a:solidFill>
+                    <a:srgbClr val="4D4D4D">
+                      <a:alpha val="100000"/>
+                    </a:srgbClr>
+                  </a:solidFill>
+                  <a:latin typeface="Helvetica"/>
+                  <a:cs typeface="Helvetica"/>
+                </a:rPr>
+                <a:t>10</a:t>
+              </a:r>
+            </a:p>
+          </p:txBody>
+        </p:sp>
+        <p:sp>
+          <p:nvSpPr>
+            <p:cNvPr id="91" name="tx91"/>
+            <p:cNvSpPr/>
+            <p:nvPr/>
+          </p:nvSpPr>
+          <p:spPr>
+            <a:xfrm>
+              <a:off x="7318177" y="5716183"/>
+              <a:ext cx="124358" cy="80101"/>
+            </a:xfrm>
+            <a:prstGeom prst="rect">
+              <a:avLst/>
+            </a:prstGeom>
+            <a:noFill/>
+          </p:spPr>
+          <p:txBody>
+            <a:bodyPr lIns="0" rIns="0" tIns="0" bIns="0" anchorCtr="1" anchor="ctr" wrap="none"/>
+            <a:lstStyle/>
+            <a:p>
+              <a:pPr algn="l" marL="0" marR="0" indent="0">
+                <a:lnSpc>
+                  <a:spcPts val="880"/>
+                </a:lnSpc>
+                <a:spcBef>
+                  <a:spcPts val="0"/>
+                </a:spcBef>
+                <a:spcAft>
+                  <a:spcPts val="0"/>
+                </a:spcAft>
+              </a:pPr>
+              <a:r>
+                <a:rPr sz="880">
+                  <a:solidFill>
+                    <a:srgbClr val="4D4D4D">
+                      <a:alpha val="100000"/>
+                    </a:srgbClr>
+                  </a:solidFill>
+                  <a:latin typeface="Helvetica"/>
+                  <a:cs typeface="Helvetica"/>
+                </a:rPr>
+                <a:t>20</a:t>
+              </a:r>
+            </a:p>
+          </p:txBody>
+        </p:sp>
+        <p:sp>
+          <p:nvSpPr>
+            <p:cNvPr id="92" name="tx92"/>
+            <p:cNvSpPr/>
+            <p:nvPr/>
+          </p:nvSpPr>
+          <p:spPr>
+            <a:xfrm>
+              <a:off x="8168686" y="5716183"/>
+              <a:ext cx="124358" cy="80101"/>
+            </a:xfrm>
+            <a:prstGeom prst="rect">
+              <a:avLst/>
+            </a:prstGeom>
+            <a:noFill/>
+          </p:spPr>
+          <p:txBody>
+            <a:bodyPr lIns="0" rIns="0" tIns="0" bIns="0" anchorCtr="1" anchor="ctr" wrap="none"/>
+            <a:lstStyle/>
+            <a:p>
+              <a:pPr algn="l" marL="0" marR="0" indent="0">
+                <a:lnSpc>
+                  <a:spcPts val="880"/>
+                </a:lnSpc>
+                <a:spcBef>
+                  <a:spcPts val="0"/>
+                </a:spcBef>
+                <a:spcAft>
+                  <a:spcPts val="0"/>
+                </a:spcAft>
+              </a:pPr>
+              <a:r>
+                <a:rPr sz="880">
+                  <a:solidFill>
+                    <a:srgbClr val="4D4D4D">
+                      <a:alpha val="100000"/>
+                    </a:srgbClr>
+                  </a:solidFill>
+                  <a:latin typeface="Helvetica"/>
+                  <a:cs typeface="Helvetica"/>
+                </a:rPr>
+                <a:t>30</a:t>
+              </a:r>
+            </a:p>
+          </p:txBody>
+        </p:sp>
+        <p:sp>
+          <p:nvSpPr>
+            <p:cNvPr id="93" name="tx93"/>
+            <p:cNvSpPr/>
+            <p:nvPr/>
+          </p:nvSpPr>
+          <p:spPr>
+            <a:xfrm>
+              <a:off x="1561815" y="5855859"/>
+              <a:ext cx="6311097" cy="100218"/>
+            </a:xfrm>
+            <a:prstGeom prst="rect">
+              <a:avLst/>
+            </a:prstGeom>
+            <a:noFill/>
+          </p:spPr>
+          <p:txBody>
+            <a:bodyPr lIns="0" rIns="0" tIns="0" bIns="0" anchorCtr="1" anchor="ctr" wrap="none"/>
+            <a:lstStyle/>
+            <a:p>
+              <a:pPr algn="l" marL="0" marR="0" indent="0">
+                <a:lnSpc>
+                  <a:spcPts val="1100"/>
+                </a:lnSpc>
+                <a:spcBef>
+                  <a:spcPts val="0"/>
+                </a:spcBef>
+                <a:spcAft>
+                  <a:spcPts val="0"/>
+                </a:spcAft>
+              </a:pPr>
+              <a:r>
+                <a:rPr sz="1100">
+                  <a:solidFill>
+                    <a:srgbClr val="000000">
+                      <a:alpha val="100000"/>
+                    </a:srgbClr>
+                  </a:solidFill>
+                  <a:latin typeface="Helvetica"/>
+                  <a:cs typeface="Helvetica"/>
+                </a:rPr>
+                <a:t>Sensitivity eGFR Difference (%): 100 × (CKD-EPI 2012 CysC − CKD-EPI 2021 Cr) / CKD-EPI 2021 Cr</a:t>
+              </a:r>
+            </a:p>
+          </p:txBody>
+        </p:sp>
+        <p:sp>
+          <p:nvSpPr>
+            <p:cNvPr id="94" name="tx94"/>
+            <p:cNvSpPr/>
+            <p:nvPr/>
+          </p:nvSpPr>
+          <p:spPr>
+            <a:xfrm rot="-5400000">
+              <a:off x="250689" y="4944909"/>
+              <a:ext cx="791596" cy="100218"/>
+            </a:xfrm>
+            <a:prstGeom prst="rect">
+              <a:avLst/>
+            </a:prstGeom>
+            <a:noFill/>
+          </p:spPr>
+          <p:txBody>
+            <a:bodyPr lIns="0" rIns="0" tIns="0" bIns="0" anchorCtr="1" anchor="ctr" wrap="none"/>
+            <a:lstStyle/>
+            <a:p>
+              <a:pPr algn="l" marL="0" marR="0" indent="0">
+                <a:lnSpc>
+                  <a:spcPts val="1100"/>
+                </a:lnSpc>
+                <a:spcBef>
+                  <a:spcPts val="0"/>
+                </a:spcBef>
+                <a:spcAft>
+                  <a:spcPts val="0"/>
+                </a:spcAft>
+              </a:pPr>
+              <a:r>
+                <a:rPr sz="1100">
+                  <a:solidFill>
+                    <a:srgbClr val="000000">
+                      <a:alpha val="100000"/>
+                    </a:srgbClr>
+                  </a:solidFill>
+                  <a:latin typeface="Helvetica"/>
+                  <a:cs typeface="Helvetica"/>
+                </a:rPr>
+                <a:t>HR (95% CI)</a:t>
+              </a:r>
+            </a:p>
+          </p:txBody>
+        </p:sp>
+        <p:sp>
+          <p:nvSpPr>
+            <p:cNvPr id="95" name="tx95"/>
+            <p:cNvSpPr/>
+            <p:nvPr/>
+          </p:nvSpPr>
+          <p:spPr>
+            <a:xfrm>
+              <a:off x="887106" y="4159544"/>
+              <a:ext cx="6969465" cy="82021"/>
+            </a:xfrm>
+            <a:prstGeom prst="rect">
+              <a:avLst/>
+            </a:prstGeom>
+            <a:noFill/>
+          </p:spPr>
+          <p:txBody>
+            <a:bodyPr lIns="0" rIns="0" tIns="0" bIns="0" anchorCtr="1" anchor="ctr" wrap="none"/>
+            <a:lstStyle/>
+            <a:p>
+              <a:pPr algn="l" marL="0" marR="0" indent="0">
+                <a:lnSpc>
+                  <a:spcPts val="900"/>
+                </a:lnSpc>
+                <a:spcBef>
+                  <a:spcPts val="0"/>
+                </a:spcBef>
+                <a:spcAft>
+                  <a:spcPts val="0"/>
+                </a:spcAft>
+              </a:pPr>
+              <a:r>
+                <a:rPr sz="900">
+                  <a:solidFill>
+                    <a:srgbClr val="404040">
+                      <a:alpha val="100000"/>
+                    </a:srgbClr>
+                  </a:solidFill>
+                  <a:latin typeface="Helvetica"/>
+                  <a:cs typeface="Helvetica"/>
+                </a:rPr>
+                <a:t>HR per 10 % decline: 2.45 (1.66-3.62), p_Bonf = &lt;0.001 (n = 6)  |  per IQR decline (Δ = 28.0 %): 12.37 (4.17-36.72)  |  IQR: [-30.0, -2.0] %</a:t>
+              </a:r>
+            </a:p>
+          </p:txBody>
+        </p:sp>
+        <p:sp>
+          <p:nvSpPr>
+            <p:cNvPr id="96" name="tx96"/>
+            <p:cNvSpPr/>
+            <p:nvPr/>
+          </p:nvSpPr>
+          <p:spPr>
+            <a:xfrm>
+              <a:off x="887106" y="3932770"/>
               <a:ext cx="3630990" cy="120152"/>
             </a:xfrm>
             <a:prstGeom prst="rect">
